--- a/presentations/Травмы различных областей тела.pptx
+++ b/presentations/Травмы различных областей тела.pptx
@@ -16,6 +16,14 @@
     <p:sldId id="264" r:id="rId15"/>
     <p:sldId id="265" r:id="rId16"/>
     <p:sldId id="266" r:id="rId17"/>
+    <p:sldId id="267" r:id="rId18"/>
+    <p:sldId id="268" r:id="rId19"/>
+    <p:sldId id="269" r:id="rId20"/>
+    <p:sldId id="270" r:id="rId21"/>
+    <p:sldId id="271" r:id="rId22"/>
+    <p:sldId id="272" r:id="rId23"/>
+    <p:sldId id="273" r:id="rId24"/>
+    <p:sldId id="274" r:id="rId25"/>
   </p:sldIdLst>
   <p:sldSz cx="12191695" cy="6858000" type="screen4x3"/>
   <p:notesSz cx="6858000" cy="9144000"/>
@@ -3438,7 +3446,7 @@
                 <a:ea typeface="Open Sans"/>
                 <a:cs typeface="Open Sans"/>
               </a:rPr>
-              <a:t>ПАМЯТКА</a:t>
+              <a:t>ТРАВМЫ ЖИВОТА: ЗАКРЫТАЯ И ОТКРЫТАЯ</a:t>
             </a:r>
           </a:p>
         </p:txBody>
@@ -3603,30 +3611,270 @@
           </a:p>
         </p:txBody>
       </p:sp>
-      <p:pic>
-        <p:nvPicPr>
-          <p:cNvPr id="8" name="Picture 7" descr="pamyatka-tema4-travmy-oblastey-16x9.png"/>
-          <p:cNvPicPr>
-            <a:picLocks noChangeAspect="1"/>
-          </p:cNvPicPr>
-          <p:nvPr/>
-        </p:nvPicPr>
-        <p:blipFill>
-          <a:blip r:embed="rId2"/>
-          <a:stretch>
-            <a:fillRect/>
-          </a:stretch>
-        </p:blipFill>
-        <p:spPr>
-          <a:xfrm>
-            <a:off x="2300000" y="1400000"/>
-            <a:ext cx="7800000" cy="5200000"/>
-          </a:xfrm>
-          <a:prstGeom prst="rect">
-            <a:avLst/>
-          </a:prstGeom>
-        </p:spPr>
-      </p:pic>
+      <p:sp>
+        <p:nvSpPr>
+          <p:cNvPr id="8" name="TextBox 7"/>
+          <p:cNvSpPr txBox="1"/>
+          <p:nvPr/>
+        </p:nvSpPr>
+        <p:spPr>
+          <a:xfrm>
+            <a:off x="700000" y="1400000"/>
+            <a:ext cx="5400000" cy="400000"/>
+          </a:xfrm>
+          <a:prstGeom prst="rect">
+            <a:avLst/>
+          </a:prstGeom>
+          <a:noFill/>
+        </p:spPr>
+        <p:txBody>
+          <a:bodyPr wrap="square" anchor="t">
+            <a:spAutoFit/>
+          </a:bodyPr>
+          <a:lstStyle/>
+          <a:p>
+            <a:pPr algn="l"/>
+            <a:r>
+              <a:rPr sz="1400" b="1">
+                <a:solidFill>
+                  <a:srgbClr val="333333"/>
+                </a:solidFill>
+                <a:latin typeface="Open Sans"/>
+                <a:ea typeface="Open Sans"/>
+                <a:cs typeface="Open Sans"/>
+              </a:rPr>
+              <a:t>Закрытая травма</a:t>
+            </a:r>
+          </a:p>
+        </p:txBody>
+      </p:sp>
+      <p:sp>
+        <p:nvSpPr>
+          <p:cNvPr id="9" name="TextBox 8"/>
+          <p:cNvSpPr txBox="1"/>
+          <p:nvPr/>
+        </p:nvSpPr>
+        <p:spPr>
+          <a:xfrm>
+            <a:off x="6600000" y="1400000"/>
+            <a:ext cx="5400000" cy="400000"/>
+          </a:xfrm>
+          <a:prstGeom prst="rect">
+            <a:avLst/>
+          </a:prstGeom>
+          <a:noFill/>
+        </p:spPr>
+        <p:txBody>
+          <a:bodyPr wrap="square" anchor="t">
+            <a:spAutoFit/>
+          </a:bodyPr>
+          <a:lstStyle/>
+          <a:p>
+            <a:pPr algn="l"/>
+            <a:r>
+              <a:rPr sz="1400" b="1">
+                <a:solidFill>
+                  <a:srgbClr val="333333"/>
+                </a:solidFill>
+                <a:latin typeface="Open Sans"/>
+                <a:ea typeface="Open Sans"/>
+                <a:cs typeface="Open Sans"/>
+              </a:rPr>
+              <a:t>Открытая травма</a:t>
+            </a:r>
+          </a:p>
+        </p:txBody>
+      </p:sp>
+      <p:sp>
+        <p:nvSpPr>
+          <p:cNvPr id="10" name="TextBox 9"/>
+          <p:cNvSpPr txBox="1"/>
+          <p:nvPr/>
+        </p:nvSpPr>
+        <p:spPr>
+          <a:xfrm>
+            <a:off x="700000" y="1850000"/>
+            <a:ext cx="5400000" cy="4000000"/>
+          </a:xfrm>
+          <a:prstGeom prst="rect">
+            <a:avLst/>
+          </a:prstGeom>
+          <a:noFill/>
+        </p:spPr>
+        <p:txBody>
+          <a:bodyPr wrap="square">
+            <a:spAutoFit/>
+          </a:bodyPr>
+          <a:lstStyle/>
+          <a:p>
+            <a:pPr algn="l">
+              <a:spcAft>
+                <a:spcPts val="800"/>
+              </a:spcAft>
+            </a:pPr>
+            <a:r>
+              <a:rPr sz="1300" b="0">
+                <a:solidFill>
+                  <a:srgbClr val="333333"/>
+                </a:solidFill>
+                <a:latin typeface="Open Sans"/>
+                <a:ea typeface="Open Sans"/>
+                <a:cs typeface="Open Sans"/>
+              </a:rPr>
+              <a:t>•  возможны боль, напряжение, вздутие, синяки и ссадины</a:t>
+            </a:r>
+          </a:p>
+          <a:p>
+            <a:pPr algn="l">
+              <a:spcAft>
+                <a:spcPts val="800"/>
+              </a:spcAft>
+            </a:pPr>
+            <a:r>
+              <a:rPr sz="1300" b="0">
+                <a:solidFill>
+                  <a:srgbClr val="333333"/>
+                </a:solidFill>
+                <a:latin typeface="Open Sans"/>
+                <a:ea typeface="Open Sans"/>
+                <a:cs typeface="Open Sans"/>
+              </a:rPr>
+              <a:t>•  бледность, холодный пот, слабость и жажда указывают на ухудшение</a:t>
+            </a:r>
+          </a:p>
+          <a:p>
+            <a:pPr algn="l">
+              <a:spcAft>
+                <a:spcPts val="800"/>
+              </a:spcAft>
+            </a:pPr>
+            <a:r>
+              <a:rPr sz="1300" b="0">
+                <a:solidFill>
+                  <a:srgbClr val="333333"/>
+                </a:solidFill>
+                <a:latin typeface="Open Sans"/>
+                <a:ea typeface="Open Sans"/>
+                <a:cs typeface="Open Sans"/>
+              </a:rPr>
+              <a:t>•  уложите, обеспечьте покой и не давайте пищу или питье</a:t>
+            </a:r>
+          </a:p>
+          <a:p>
+            <a:pPr algn="l">
+              <a:spcAft>
+                <a:spcPts val="800"/>
+              </a:spcAft>
+            </a:pPr>
+            <a:r>
+              <a:rPr sz="1300" b="0">
+                <a:solidFill>
+                  <a:srgbClr val="333333"/>
+                </a:solidFill>
+                <a:latin typeface="Open Sans"/>
+                <a:ea typeface="Open Sans"/>
+                <a:cs typeface="Open Sans"/>
+              </a:rPr>
+              <a:t>•  контролируйте сознание и дыхание до прибытия скорой помощи</a:t>
+            </a:r>
+          </a:p>
+        </p:txBody>
+      </p:sp>
+      <p:sp>
+        <p:nvSpPr>
+          <p:cNvPr id="11" name="TextBox 10"/>
+          <p:cNvSpPr txBox="1"/>
+          <p:nvPr/>
+        </p:nvSpPr>
+        <p:spPr>
+          <a:xfrm>
+            <a:off x="6600000" y="1850000"/>
+            <a:ext cx="5400000" cy="4000000"/>
+          </a:xfrm>
+          <a:prstGeom prst="rect">
+            <a:avLst/>
+          </a:prstGeom>
+          <a:noFill/>
+        </p:spPr>
+        <p:txBody>
+          <a:bodyPr wrap="square">
+            <a:spAutoFit/>
+          </a:bodyPr>
+          <a:lstStyle/>
+          <a:p>
+            <a:pPr algn="l">
+              <a:spcAft>
+                <a:spcPts val="800"/>
+              </a:spcAft>
+            </a:pPr>
+            <a:r>
+              <a:rPr sz="1300" b="0">
+                <a:solidFill>
+                  <a:srgbClr val="333333"/>
+                </a:solidFill>
+                <a:latin typeface="Open Sans"/>
+                <a:ea typeface="Open Sans"/>
+                <a:cs typeface="Open Sans"/>
+              </a:rPr>
+              <a:t>•  закройте рану стерильной салфеткой без сильного давления</a:t>
+            </a:r>
+          </a:p>
+          <a:p>
+            <a:pPr algn="l">
+              <a:spcAft>
+                <a:spcPts val="800"/>
+              </a:spcAft>
+            </a:pPr>
+            <a:r>
+              <a:rPr sz="1300" b="0">
+                <a:solidFill>
+                  <a:srgbClr val="333333"/>
+                </a:solidFill>
+                <a:latin typeface="Open Sans"/>
+                <a:ea typeface="Open Sans"/>
+                <a:cs typeface="Open Sans"/>
+              </a:rPr>
+              <a:t>•  инородный предмет не извлекайте, а фиксируйте вокруг</a:t>
+            </a:r>
+          </a:p>
+          <a:p>
+            <a:pPr algn="l">
+              <a:spcAft>
+                <a:spcPts val="800"/>
+              </a:spcAft>
+            </a:pPr>
+            <a:r>
+              <a:rPr sz="1300" b="0">
+                <a:solidFill>
+                  <a:srgbClr val="333333"/>
+                </a:solidFill>
+                <a:latin typeface="Open Sans"/>
+                <a:ea typeface="Open Sans"/>
+                <a:cs typeface="Open Sans"/>
+              </a:rPr>
+              <a:t>•  при выпавших органах не трогайте и не вправляйте их</a:t>
+            </a:r>
+          </a:p>
+          <a:p>
+            <a:pPr algn="l">
+              <a:spcAft>
+                <a:spcPts val="800"/>
+              </a:spcAft>
+            </a:pPr>
+            <a:r>
+              <a:rPr sz="1300" b="0">
+                <a:solidFill>
+                  <a:srgbClr val="333333"/>
+                </a:solidFill>
+                <a:latin typeface="Open Sans"/>
+                <a:ea typeface="Open Sans"/>
+                <a:cs typeface="Open Sans"/>
+              </a:rPr>
+              <a:t>•  не накладывайте поверх выпавших органов давящую повязку</a:t>
+            </a:r>
+          </a:p>
+        </p:txBody>
+      </p:sp>
     </p:spTree>
   </p:cSld>
   <p:clrMapOvr>
@@ -3654,6 +3902,4856 @@
         <p:spPr>
           <a:xfrm>
             <a:off x="0" y="0"/>
+            <a:ext cx="12191695" cy="6858000"/>
+          </a:xfrm>
+          <a:prstGeom prst="rect">
+            <a:avLst/>
+          </a:prstGeom>
+          <a:solidFill>
+            <a:srgbClr val="FFFFFF"/>
+          </a:solidFill>
+          <a:ln>
+            <a:noFill/>
+          </a:ln>
+        </p:spPr>
+        <p:style>
+          <a:lnRef idx="1">
+            <a:schemeClr val="accent1"/>
+          </a:lnRef>
+          <a:fillRef idx="3">
+            <a:schemeClr val="accent1"/>
+          </a:fillRef>
+          <a:effectRef idx="2">
+            <a:schemeClr val="accent1"/>
+          </a:effectRef>
+          <a:fontRef idx="minor">
+            <a:schemeClr val="lt1"/>
+          </a:fontRef>
+        </p:style>
+        <p:txBody>
+          <a:bodyPr rtlCol="0" anchor="ctr"/>
+          <a:lstStyle/>
+          <a:p>
+            <a:pPr algn="ctr"/>
+          </a:p>
+        </p:txBody>
+      </p:sp>
+      <p:sp>
+        <p:nvSpPr>
+          <p:cNvPr id="3" name="TextBox 2"/>
+          <p:cNvSpPr txBox="1"/>
+          <p:nvPr/>
+        </p:nvSpPr>
+        <p:spPr>
+          <a:xfrm>
+            <a:off x="700000" y="250000"/>
+            <a:ext cx="11200000" cy="550000"/>
+          </a:xfrm>
+          <a:prstGeom prst="rect">
+            <a:avLst/>
+          </a:prstGeom>
+          <a:noFill/>
+        </p:spPr>
+        <p:txBody>
+          <a:bodyPr wrap="square" anchor="t">
+            <a:spAutoFit/>
+          </a:bodyPr>
+          <a:lstStyle/>
+          <a:p>
+            <a:pPr algn="l"/>
+            <a:r>
+              <a:rPr sz="2200" b="1">
+                <a:solidFill>
+                  <a:srgbClr val="333333"/>
+                </a:solidFill>
+                <a:latin typeface="Open Sans"/>
+                <a:ea typeface="Open Sans"/>
+                <a:cs typeface="Open Sans"/>
+              </a:rPr>
+              <a:t>ТРАВМА ТАЗА: БЕЗОПАСНОЕ ПОЛОЖЕНИЕ</a:t>
+            </a:r>
+          </a:p>
+        </p:txBody>
+      </p:sp>
+      <p:sp>
+        <p:nvSpPr>
+          <p:cNvPr id="4" name="Rectangle 3"/>
+          <p:cNvSpPr/>
+          <p:nvPr/>
+        </p:nvSpPr>
+        <p:spPr>
+          <a:xfrm>
+            <a:off x="700000" y="850000"/>
+            <a:ext cx="9000000" cy="28000"/>
+          </a:xfrm>
+          <a:prstGeom prst="rect">
+            <a:avLst/>
+          </a:prstGeom>
+          <a:solidFill>
+            <a:srgbClr val="555555"/>
+          </a:solidFill>
+          <a:ln>
+            <a:noFill/>
+          </a:ln>
+        </p:spPr>
+        <p:style>
+          <a:lnRef idx="1">
+            <a:schemeClr val="accent1"/>
+          </a:lnRef>
+          <a:fillRef idx="3">
+            <a:schemeClr val="accent1"/>
+          </a:fillRef>
+          <a:effectRef idx="2">
+            <a:schemeClr val="accent1"/>
+          </a:effectRef>
+          <a:fontRef idx="minor">
+            <a:schemeClr val="lt1"/>
+          </a:fontRef>
+        </p:style>
+        <p:txBody>
+          <a:bodyPr rtlCol="0" anchor="ctr"/>
+          <a:lstStyle/>
+          <a:p>
+            <a:pPr algn="ctr"/>
+          </a:p>
+        </p:txBody>
+      </p:sp>
+      <p:sp>
+        <p:nvSpPr>
+          <p:cNvPr id="5" name="TextBox 4"/>
+          <p:cNvSpPr txBox="1"/>
+          <p:nvPr/>
+        </p:nvSpPr>
+        <p:spPr>
+          <a:xfrm>
+            <a:off x="700000" y="920000"/>
+            <a:ext cx="11000000" cy="350000"/>
+          </a:xfrm>
+          <a:prstGeom prst="rect">
+            <a:avLst/>
+          </a:prstGeom>
+          <a:noFill/>
+        </p:spPr>
+        <p:txBody>
+          <a:bodyPr wrap="square" anchor="t">
+            <a:spAutoFit/>
+          </a:bodyPr>
+          <a:lstStyle/>
+          <a:p>
+            <a:pPr algn="l"/>
+            <a:r>
+              <a:rPr sz="1200" b="0">
+                <a:solidFill>
+                  <a:srgbClr val="666666"/>
+                </a:solidFill>
+                <a:latin typeface="Open Sans"/>
+                <a:ea typeface="Open Sans"/>
+                <a:cs typeface="Open Sans"/>
+              </a:rPr>
+              <a:t>Оказание первой помощи при травмах, ранениях и поражениях, прочих состояниях</a:t>
+            </a:r>
+          </a:p>
+        </p:txBody>
+      </p:sp>
+      <p:sp>
+        <p:nvSpPr>
+          <p:cNvPr id="6" name="Rectangle 5"/>
+          <p:cNvSpPr/>
+          <p:nvPr/>
+        </p:nvSpPr>
+        <p:spPr>
+          <a:xfrm>
+            <a:off x="0" y="2800000"/>
+            <a:ext cx="420000" cy="420000"/>
+          </a:xfrm>
+          <a:prstGeom prst="rect">
+            <a:avLst/>
+          </a:prstGeom>
+          <a:solidFill>
+            <a:srgbClr val="555555"/>
+          </a:solidFill>
+          <a:ln>
+            <a:noFill/>
+          </a:ln>
+        </p:spPr>
+        <p:style>
+          <a:lnRef idx="1">
+            <a:schemeClr val="accent1"/>
+          </a:lnRef>
+          <a:fillRef idx="3">
+            <a:schemeClr val="accent1"/>
+          </a:fillRef>
+          <a:effectRef idx="2">
+            <a:schemeClr val="accent1"/>
+          </a:effectRef>
+          <a:fontRef idx="minor">
+            <a:schemeClr val="lt1"/>
+          </a:fontRef>
+        </p:style>
+        <p:txBody>
+          <a:bodyPr rtlCol="0" anchor="ctr"/>
+          <a:lstStyle/>
+          <a:p>
+            <a:pPr algn="ctr"/>
+          </a:p>
+        </p:txBody>
+      </p:sp>
+      <p:sp>
+        <p:nvSpPr>
+          <p:cNvPr id="7" name="TextBox 6"/>
+          <p:cNvSpPr txBox="1"/>
+          <p:nvPr/>
+        </p:nvSpPr>
+        <p:spPr>
+          <a:xfrm>
+            <a:off x="0" y="2800000"/>
+            <a:ext cx="420000" cy="420000"/>
+          </a:xfrm>
+          <a:prstGeom prst="rect">
+            <a:avLst/>
+          </a:prstGeom>
+          <a:noFill/>
+        </p:spPr>
+        <p:txBody>
+          <a:bodyPr wrap="square" anchor="ctr">
+            <a:spAutoFit/>
+          </a:bodyPr>
+          <a:lstStyle/>
+          <a:p>
+            <a:pPr algn="ctr"/>
+            <a:r>
+              <a:rPr sz="1400" b="1">
+                <a:solidFill>
+                  <a:srgbClr val="FFFFFF"/>
+                </a:solidFill>
+                <a:latin typeface="Open Sans"/>
+                <a:ea typeface="Open Sans"/>
+                <a:cs typeface="Open Sans"/>
+              </a:rPr>
+              <a:t>11</a:t>
+            </a:r>
+          </a:p>
+        </p:txBody>
+      </p:sp>
+      <p:pic>
+        <p:nvPicPr>
+          <p:cNvPr id="8" name="Picture 7" descr="fig70.jpeg"/>
+          <p:cNvPicPr>
+            <a:picLocks noChangeAspect="1"/>
+          </p:cNvPicPr>
+          <p:nvPr/>
+        </p:nvPicPr>
+        <p:blipFill>
+          <a:blip r:embed="rId2"/>
+          <a:stretch>
+            <a:fillRect/>
+          </a:stretch>
+        </p:blipFill>
+        <p:spPr>
+          <a:xfrm>
+            <a:off x="500000" y="2492230"/>
+            <a:ext cx="5200000" cy="1915539"/>
+          </a:xfrm>
+          <a:prstGeom prst="rect">
+            <a:avLst/>
+          </a:prstGeom>
+        </p:spPr>
+      </p:pic>
+      <p:sp>
+        <p:nvSpPr>
+          <p:cNvPr id="9" name="TextBox 8"/>
+          <p:cNvSpPr txBox="1"/>
+          <p:nvPr/>
+        </p:nvSpPr>
+        <p:spPr>
+          <a:xfrm>
+            <a:off x="6000000" y="1450000"/>
+            <a:ext cx="6200000" cy="3800000"/>
+          </a:xfrm>
+          <a:prstGeom prst="rect">
+            <a:avLst/>
+          </a:prstGeom>
+          <a:noFill/>
+        </p:spPr>
+        <p:txBody>
+          <a:bodyPr wrap="square">
+            <a:spAutoFit/>
+          </a:bodyPr>
+          <a:lstStyle/>
+          <a:p>
+            <a:pPr algn="l">
+              <a:spcAft>
+                <a:spcPts val="800"/>
+              </a:spcAft>
+            </a:pPr>
+            <a:r>
+              <a:rPr sz="1300" b="0">
+                <a:solidFill>
+                  <a:srgbClr val="333333"/>
+                </a:solidFill>
+                <a:latin typeface="Open Sans"/>
+                <a:ea typeface="Open Sans"/>
+                <a:cs typeface="Open Sans"/>
+              </a:rPr>
+              <a:t>•  Подозревайте травму таза при боли, деформации, вынужденном положении и невозможности встать.</a:t>
+            </a:r>
+          </a:p>
+          <a:p>
+            <a:pPr algn="l">
+              <a:spcAft>
+                <a:spcPts val="800"/>
+              </a:spcAft>
+            </a:pPr>
+            <a:r>
+              <a:rPr sz="1300" b="0">
+                <a:solidFill>
+                  <a:srgbClr val="333333"/>
+                </a:solidFill>
+                <a:latin typeface="Open Sans"/>
+                <a:ea typeface="Open Sans"/>
+                <a:cs typeface="Open Sans"/>
+              </a:rPr>
+              <a:t>•  Не проверяйте подвижность таза сдавливанием и не просите пострадавшего ходить.</a:t>
+            </a:r>
+          </a:p>
+          <a:p>
+            <a:pPr algn="l">
+              <a:spcAft>
+                <a:spcPts val="800"/>
+              </a:spcAft>
+            </a:pPr>
+            <a:r>
+              <a:rPr sz="1300" b="0">
+                <a:solidFill>
+                  <a:srgbClr val="333333"/>
+                </a:solidFill>
+                <a:latin typeface="Open Sans"/>
+                <a:ea typeface="Open Sans"/>
+                <a:cs typeface="Open Sans"/>
+              </a:rPr>
+              <a:t>•  Уложите на спину на твердую поверхность, если состояние это позволяет.</a:t>
+            </a:r>
+          </a:p>
+          <a:p>
+            <a:pPr algn="l">
+              <a:spcAft>
+                <a:spcPts val="800"/>
+              </a:spcAft>
+            </a:pPr>
+            <a:r>
+              <a:rPr sz="1300" b="0">
+                <a:solidFill>
+                  <a:srgbClr val="333333"/>
+                </a:solidFill>
+                <a:latin typeface="Open Sans"/>
+                <a:ea typeface="Open Sans"/>
+                <a:cs typeface="Open Sans"/>
+              </a:rPr>
+              <a:t>•  Согните и слегка разведите ноги, подложив под колени валик.</a:t>
+            </a:r>
+          </a:p>
+          <a:p>
+            <a:pPr algn="l">
+              <a:spcAft>
+                <a:spcPts val="800"/>
+              </a:spcAft>
+            </a:pPr>
+            <a:r>
+              <a:rPr sz="1300" b="0">
+                <a:solidFill>
+                  <a:srgbClr val="333333"/>
+                </a:solidFill>
+                <a:latin typeface="Open Sans"/>
+                <a:ea typeface="Open Sans"/>
+                <a:cs typeface="Open Sans"/>
+              </a:rPr>
+              <a:t>•  Сохраняйте тепло, контролируйте состояние и не давайте пищу или питье.</a:t>
+            </a:r>
+          </a:p>
+        </p:txBody>
+      </p:sp>
+      <p:sp>
+        <p:nvSpPr>
+          <p:cNvPr id="10" name="Rounded Rectangle 9"/>
+          <p:cNvSpPr/>
+          <p:nvPr/>
+        </p:nvSpPr>
+        <p:spPr>
+          <a:xfrm>
+            <a:off x="6000000" y="5400000"/>
+            <a:ext cx="6200000" cy="1100000"/>
+          </a:xfrm>
+          <a:prstGeom prst="roundRect">
+            <a:avLst/>
+          </a:prstGeom>
+          <a:solidFill>
+            <a:srgbClr val="F5F0E1"/>
+          </a:solidFill>
+          <a:ln>
+            <a:noFill/>
+          </a:ln>
+        </p:spPr>
+        <p:style>
+          <a:lnRef idx="1">
+            <a:schemeClr val="accent1"/>
+          </a:lnRef>
+          <a:fillRef idx="3">
+            <a:schemeClr val="accent1"/>
+          </a:fillRef>
+          <a:effectRef idx="2">
+            <a:schemeClr val="accent1"/>
+          </a:effectRef>
+          <a:fontRef idx="minor">
+            <a:schemeClr val="lt1"/>
+          </a:fontRef>
+        </p:style>
+        <p:txBody>
+          <a:bodyPr rtlCol="0" anchor="ctr"/>
+          <a:lstStyle/>
+          <a:p>
+            <a:pPr algn="ctr"/>
+          </a:p>
+        </p:txBody>
+      </p:sp>
+      <p:sp>
+        <p:nvSpPr>
+          <p:cNvPr id="11" name="TextBox 10"/>
+          <p:cNvSpPr txBox="1"/>
+          <p:nvPr/>
+        </p:nvSpPr>
+        <p:spPr>
+          <a:xfrm>
+            <a:off x="6250000" y="5600000"/>
+            <a:ext cx="5700000" cy="700000"/>
+          </a:xfrm>
+          <a:prstGeom prst="rect">
+            <a:avLst/>
+          </a:prstGeom>
+          <a:noFill/>
+        </p:spPr>
+        <p:txBody>
+          <a:bodyPr wrap="square" anchor="ctr">
+            <a:spAutoFit/>
+          </a:bodyPr>
+          <a:lstStyle/>
+          <a:p>
+            <a:pPr algn="l"/>
+            <a:r>
+              <a:rPr sz="1200" b="0">
+                <a:solidFill>
+                  <a:srgbClr val="333333"/>
+                </a:solidFill>
+                <a:latin typeface="Open Sans"/>
+                <a:ea typeface="Open Sans"/>
+                <a:cs typeface="Open Sans"/>
+              </a:rPr>
+              <a:t>Перемещение выполняют только при необходимости, поддерживая таз и туловище без скручивания.</a:t>
+            </a:r>
+          </a:p>
+        </p:txBody>
+      </p:sp>
+    </p:spTree>
+  </p:cSld>
+  <p:clrMapOvr>
+    <a:masterClrMapping/>
+  </p:clrMapOvr>
+</p:sld>
+</file>
+
+<file path=ppt/slides/slide12.xml><?xml version="1.0" encoding="utf-8"?>
+<p:sld xmlns:a="http://schemas.openxmlformats.org/drawingml/2006/main" xmlns:p="http://schemas.openxmlformats.org/presentationml/2006/main" xmlns:r="http://schemas.openxmlformats.org/officeDocument/2006/relationships">
+  <p:cSld>
+    <p:spTree>
+      <p:nvGrpSpPr>
+        <p:cNvPr id="1" name=""/>
+        <p:cNvGrpSpPr/>
+        <p:nvPr/>
+      </p:nvGrpSpPr>
+      <p:grpSpPr/>
+      <p:sp>
+        <p:nvSpPr>
+          <p:cNvPr id="2" name="Rectangle 1"/>
+          <p:cNvSpPr/>
+          <p:nvPr/>
+        </p:nvSpPr>
+        <p:spPr>
+          <a:xfrm>
+            <a:off x="0" y="0"/>
+            <a:ext cx="12191695" cy="6858000"/>
+          </a:xfrm>
+          <a:prstGeom prst="rect">
+            <a:avLst/>
+          </a:prstGeom>
+          <a:solidFill>
+            <a:srgbClr val="FFFFFF"/>
+          </a:solidFill>
+          <a:ln>
+            <a:noFill/>
+          </a:ln>
+        </p:spPr>
+        <p:style>
+          <a:lnRef idx="1">
+            <a:schemeClr val="accent1"/>
+          </a:lnRef>
+          <a:fillRef idx="3">
+            <a:schemeClr val="accent1"/>
+          </a:fillRef>
+          <a:effectRef idx="2">
+            <a:schemeClr val="accent1"/>
+          </a:effectRef>
+          <a:fontRef idx="minor">
+            <a:schemeClr val="lt1"/>
+          </a:fontRef>
+        </p:style>
+        <p:txBody>
+          <a:bodyPr rtlCol="0" anchor="ctr"/>
+          <a:lstStyle/>
+          <a:p>
+            <a:pPr algn="ctr"/>
+          </a:p>
+        </p:txBody>
+      </p:sp>
+      <p:sp>
+        <p:nvSpPr>
+          <p:cNvPr id="3" name="TextBox 2"/>
+          <p:cNvSpPr txBox="1"/>
+          <p:nvPr/>
+        </p:nvSpPr>
+        <p:spPr>
+          <a:xfrm>
+            <a:off x="700000" y="250000"/>
+            <a:ext cx="11200000" cy="550000"/>
+          </a:xfrm>
+          <a:prstGeom prst="rect">
+            <a:avLst/>
+          </a:prstGeom>
+          <a:noFill/>
+        </p:spPr>
+        <p:txBody>
+          <a:bodyPr wrap="square" anchor="t">
+            <a:spAutoFit/>
+          </a:bodyPr>
+          <a:lstStyle/>
+          <a:p>
+            <a:pPr algn="l"/>
+            <a:r>
+              <a:rPr sz="2200" b="1">
+                <a:solidFill>
+                  <a:srgbClr val="333333"/>
+                </a:solidFill>
+                <a:latin typeface="Open Sans"/>
+                <a:ea typeface="Open Sans"/>
+                <a:cs typeface="Open Sans"/>
+              </a:rPr>
+              <a:t>ОБЩИЙ ПОРЯДОК ПРИ ТРАВМЕ КОНЕЧНОСТИ</a:t>
+            </a:r>
+          </a:p>
+        </p:txBody>
+      </p:sp>
+      <p:sp>
+        <p:nvSpPr>
+          <p:cNvPr id="4" name="Rectangle 3"/>
+          <p:cNvSpPr/>
+          <p:nvPr/>
+        </p:nvSpPr>
+        <p:spPr>
+          <a:xfrm>
+            <a:off x="700000" y="850000"/>
+            <a:ext cx="9000000" cy="28000"/>
+          </a:xfrm>
+          <a:prstGeom prst="rect">
+            <a:avLst/>
+          </a:prstGeom>
+          <a:solidFill>
+            <a:srgbClr val="555555"/>
+          </a:solidFill>
+          <a:ln>
+            <a:noFill/>
+          </a:ln>
+        </p:spPr>
+        <p:style>
+          <a:lnRef idx="1">
+            <a:schemeClr val="accent1"/>
+          </a:lnRef>
+          <a:fillRef idx="3">
+            <a:schemeClr val="accent1"/>
+          </a:fillRef>
+          <a:effectRef idx="2">
+            <a:schemeClr val="accent1"/>
+          </a:effectRef>
+          <a:fontRef idx="minor">
+            <a:schemeClr val="lt1"/>
+          </a:fontRef>
+        </p:style>
+        <p:txBody>
+          <a:bodyPr rtlCol="0" anchor="ctr"/>
+          <a:lstStyle/>
+          <a:p>
+            <a:pPr algn="ctr"/>
+          </a:p>
+        </p:txBody>
+      </p:sp>
+      <p:sp>
+        <p:nvSpPr>
+          <p:cNvPr id="5" name="TextBox 4"/>
+          <p:cNvSpPr txBox="1"/>
+          <p:nvPr/>
+        </p:nvSpPr>
+        <p:spPr>
+          <a:xfrm>
+            <a:off x="700000" y="920000"/>
+            <a:ext cx="11000000" cy="350000"/>
+          </a:xfrm>
+          <a:prstGeom prst="rect">
+            <a:avLst/>
+          </a:prstGeom>
+          <a:noFill/>
+        </p:spPr>
+        <p:txBody>
+          <a:bodyPr wrap="square" anchor="t">
+            <a:spAutoFit/>
+          </a:bodyPr>
+          <a:lstStyle/>
+          <a:p>
+            <a:pPr algn="l"/>
+            <a:r>
+              <a:rPr sz="1200" b="0">
+                <a:solidFill>
+                  <a:srgbClr val="666666"/>
+                </a:solidFill>
+                <a:latin typeface="Open Sans"/>
+                <a:ea typeface="Open Sans"/>
+                <a:cs typeface="Open Sans"/>
+              </a:rPr>
+              <a:t>Оказание первой помощи при травмах, ранениях и поражениях, прочих состояниях</a:t>
+            </a:r>
+          </a:p>
+        </p:txBody>
+      </p:sp>
+      <p:sp>
+        <p:nvSpPr>
+          <p:cNvPr id="6" name="Rectangle 5"/>
+          <p:cNvSpPr/>
+          <p:nvPr/>
+        </p:nvSpPr>
+        <p:spPr>
+          <a:xfrm>
+            <a:off x="0" y="2800000"/>
+            <a:ext cx="420000" cy="420000"/>
+          </a:xfrm>
+          <a:prstGeom prst="rect">
+            <a:avLst/>
+          </a:prstGeom>
+          <a:solidFill>
+            <a:srgbClr val="555555"/>
+          </a:solidFill>
+          <a:ln>
+            <a:noFill/>
+          </a:ln>
+        </p:spPr>
+        <p:style>
+          <a:lnRef idx="1">
+            <a:schemeClr val="accent1"/>
+          </a:lnRef>
+          <a:fillRef idx="3">
+            <a:schemeClr val="accent1"/>
+          </a:fillRef>
+          <a:effectRef idx="2">
+            <a:schemeClr val="accent1"/>
+          </a:effectRef>
+          <a:fontRef idx="minor">
+            <a:schemeClr val="lt1"/>
+          </a:fontRef>
+        </p:style>
+        <p:txBody>
+          <a:bodyPr rtlCol="0" anchor="ctr"/>
+          <a:lstStyle/>
+          <a:p>
+            <a:pPr algn="ctr"/>
+          </a:p>
+        </p:txBody>
+      </p:sp>
+      <p:sp>
+        <p:nvSpPr>
+          <p:cNvPr id="7" name="TextBox 6"/>
+          <p:cNvSpPr txBox="1"/>
+          <p:nvPr/>
+        </p:nvSpPr>
+        <p:spPr>
+          <a:xfrm>
+            <a:off x="0" y="2800000"/>
+            <a:ext cx="420000" cy="420000"/>
+          </a:xfrm>
+          <a:prstGeom prst="rect">
+            <a:avLst/>
+          </a:prstGeom>
+          <a:noFill/>
+        </p:spPr>
+        <p:txBody>
+          <a:bodyPr wrap="square" anchor="ctr">
+            <a:spAutoFit/>
+          </a:bodyPr>
+          <a:lstStyle/>
+          <a:p>
+            <a:pPr algn="ctr"/>
+            <a:r>
+              <a:rPr sz="1400" b="1">
+                <a:solidFill>
+                  <a:srgbClr val="FFFFFF"/>
+                </a:solidFill>
+                <a:latin typeface="Open Sans"/>
+                <a:ea typeface="Open Sans"/>
+                <a:cs typeface="Open Sans"/>
+              </a:rPr>
+              <a:t>12</a:t>
+            </a:r>
+          </a:p>
+        </p:txBody>
+      </p:sp>
+      <p:sp>
+        <p:nvSpPr>
+          <p:cNvPr id="8" name="Oval 7"/>
+          <p:cNvSpPr/>
+          <p:nvPr/>
+        </p:nvSpPr>
+        <p:spPr>
+          <a:xfrm>
+            <a:off x="700000" y="1400000"/>
+            <a:ext cx="500000" cy="500000"/>
+          </a:xfrm>
+          <a:prstGeom prst="ellipse">
+            <a:avLst/>
+          </a:prstGeom>
+          <a:solidFill>
+            <a:srgbClr val="CC0000"/>
+          </a:solidFill>
+          <a:ln>
+            <a:noFill/>
+          </a:ln>
+        </p:spPr>
+        <p:style>
+          <a:lnRef idx="1">
+            <a:schemeClr val="accent1"/>
+          </a:lnRef>
+          <a:fillRef idx="3">
+            <a:schemeClr val="accent1"/>
+          </a:fillRef>
+          <a:effectRef idx="2">
+            <a:schemeClr val="accent1"/>
+          </a:effectRef>
+          <a:fontRef idx="minor">
+            <a:schemeClr val="lt1"/>
+          </a:fontRef>
+        </p:style>
+        <p:txBody>
+          <a:bodyPr rtlCol="0" anchor="ctr"/>
+          <a:lstStyle/>
+          <a:p>
+            <a:pPr algn="ctr"/>
+          </a:p>
+        </p:txBody>
+      </p:sp>
+      <p:sp>
+        <p:nvSpPr>
+          <p:cNvPr id="9" name="TextBox 8"/>
+          <p:cNvSpPr txBox="1"/>
+          <p:nvPr/>
+        </p:nvSpPr>
+        <p:spPr>
+          <a:xfrm>
+            <a:off x="700000" y="1400000"/>
+            <a:ext cx="500000" cy="500000"/>
+          </a:xfrm>
+          <a:prstGeom prst="rect">
+            <a:avLst/>
+          </a:prstGeom>
+          <a:noFill/>
+        </p:spPr>
+        <p:txBody>
+          <a:bodyPr wrap="square" anchor="ctr">
+            <a:spAutoFit/>
+          </a:bodyPr>
+          <a:lstStyle/>
+          <a:p>
+            <a:pPr algn="ctr"/>
+            <a:r>
+              <a:rPr sz="1300" b="1">
+                <a:solidFill>
+                  <a:srgbClr val="FFFFFF"/>
+                </a:solidFill>
+                <a:latin typeface="Open Sans"/>
+                <a:ea typeface="Open Sans"/>
+                <a:cs typeface="Open Sans"/>
+              </a:rPr>
+              <a:t>1</a:t>
+            </a:r>
+          </a:p>
+        </p:txBody>
+      </p:sp>
+      <p:sp>
+        <p:nvSpPr>
+          <p:cNvPr id="10" name="Rectangle 9"/>
+          <p:cNvSpPr/>
+          <p:nvPr/>
+        </p:nvSpPr>
+        <p:spPr>
+          <a:xfrm>
+            <a:off x="1400000" y="1400000"/>
+            <a:ext cx="10550000" cy="620000"/>
+          </a:xfrm>
+          <a:prstGeom prst="rect">
+            <a:avLst/>
+          </a:prstGeom>
+          <a:solidFill>
+            <a:srgbClr val="FFFFFF"/>
+          </a:solidFill>
+          <a:ln w="12700">
+            <a:solidFill>
+              <a:srgbClr val="999999"/>
+            </a:solidFill>
+          </a:ln>
+        </p:spPr>
+        <p:style>
+          <a:lnRef idx="1">
+            <a:schemeClr val="accent1"/>
+          </a:lnRef>
+          <a:fillRef idx="3">
+            <a:schemeClr val="accent1"/>
+          </a:fillRef>
+          <a:effectRef idx="2">
+            <a:schemeClr val="accent1"/>
+          </a:effectRef>
+          <a:fontRef idx="minor">
+            <a:schemeClr val="lt1"/>
+          </a:fontRef>
+        </p:style>
+        <p:txBody>
+          <a:bodyPr rtlCol="0" anchor="ctr"/>
+          <a:lstStyle/>
+          <a:p>
+            <a:pPr algn="ctr"/>
+          </a:p>
+        </p:txBody>
+      </p:sp>
+      <p:sp>
+        <p:nvSpPr>
+          <p:cNvPr id="11" name="TextBox 10"/>
+          <p:cNvSpPr txBox="1"/>
+          <p:nvPr/>
+        </p:nvSpPr>
+        <p:spPr>
+          <a:xfrm>
+            <a:off x="1600000" y="1400000"/>
+            <a:ext cx="10150000" cy="620000"/>
+          </a:xfrm>
+          <a:prstGeom prst="rect">
+            <a:avLst/>
+          </a:prstGeom>
+          <a:noFill/>
+        </p:spPr>
+        <p:txBody>
+          <a:bodyPr wrap="square" anchor="ctr">
+            <a:spAutoFit/>
+          </a:bodyPr>
+          <a:lstStyle/>
+          <a:p>
+            <a:pPr algn="l"/>
+            <a:r>
+              <a:rPr sz="1300" b="0">
+                <a:solidFill>
+                  <a:srgbClr val="333333"/>
+                </a:solidFill>
+                <a:latin typeface="Open Sans"/>
+                <a:ea typeface="Open Sans"/>
+                <a:cs typeface="Open Sans"/>
+              </a:rPr>
+              <a:t>Остановите массивное кровотечение, затем закройте рану повязкой.</a:t>
+            </a:r>
+          </a:p>
+        </p:txBody>
+      </p:sp>
+      <p:sp>
+        <p:nvSpPr>
+          <p:cNvPr id="12" name="Oval 11"/>
+          <p:cNvSpPr/>
+          <p:nvPr/>
+        </p:nvSpPr>
+        <p:spPr>
+          <a:xfrm>
+            <a:off x="700000" y="2100000"/>
+            <a:ext cx="500000" cy="500000"/>
+          </a:xfrm>
+          <a:prstGeom prst="ellipse">
+            <a:avLst/>
+          </a:prstGeom>
+          <a:solidFill>
+            <a:srgbClr val="555555"/>
+          </a:solidFill>
+          <a:ln>
+            <a:noFill/>
+          </a:ln>
+        </p:spPr>
+        <p:style>
+          <a:lnRef idx="1">
+            <a:schemeClr val="accent1"/>
+          </a:lnRef>
+          <a:fillRef idx="3">
+            <a:schemeClr val="accent1"/>
+          </a:fillRef>
+          <a:effectRef idx="2">
+            <a:schemeClr val="accent1"/>
+          </a:effectRef>
+          <a:fontRef idx="minor">
+            <a:schemeClr val="lt1"/>
+          </a:fontRef>
+        </p:style>
+        <p:txBody>
+          <a:bodyPr rtlCol="0" anchor="ctr"/>
+          <a:lstStyle/>
+          <a:p>
+            <a:pPr algn="ctr"/>
+          </a:p>
+        </p:txBody>
+      </p:sp>
+      <p:sp>
+        <p:nvSpPr>
+          <p:cNvPr id="13" name="TextBox 12"/>
+          <p:cNvSpPr txBox="1"/>
+          <p:nvPr/>
+        </p:nvSpPr>
+        <p:spPr>
+          <a:xfrm>
+            <a:off x="700000" y="2100000"/>
+            <a:ext cx="500000" cy="500000"/>
+          </a:xfrm>
+          <a:prstGeom prst="rect">
+            <a:avLst/>
+          </a:prstGeom>
+          <a:noFill/>
+        </p:spPr>
+        <p:txBody>
+          <a:bodyPr wrap="square" anchor="ctr">
+            <a:spAutoFit/>
+          </a:bodyPr>
+          <a:lstStyle/>
+          <a:p>
+            <a:pPr algn="ctr"/>
+            <a:r>
+              <a:rPr sz="1300" b="1">
+                <a:solidFill>
+                  <a:srgbClr val="FFFFFF"/>
+                </a:solidFill>
+                <a:latin typeface="Open Sans"/>
+                <a:ea typeface="Open Sans"/>
+                <a:cs typeface="Open Sans"/>
+              </a:rPr>
+              <a:t>2</a:t>
+            </a:r>
+          </a:p>
+        </p:txBody>
+      </p:sp>
+      <p:sp>
+        <p:nvSpPr>
+          <p:cNvPr id="14" name="Rectangle 13"/>
+          <p:cNvSpPr/>
+          <p:nvPr/>
+        </p:nvSpPr>
+        <p:spPr>
+          <a:xfrm>
+            <a:off x="1400000" y="2100000"/>
+            <a:ext cx="10550000" cy="620000"/>
+          </a:xfrm>
+          <a:prstGeom prst="rect">
+            <a:avLst/>
+          </a:prstGeom>
+          <a:solidFill>
+            <a:srgbClr val="FFFFFF"/>
+          </a:solidFill>
+          <a:ln w="12700">
+            <a:solidFill>
+              <a:srgbClr val="999999"/>
+            </a:solidFill>
+          </a:ln>
+        </p:spPr>
+        <p:style>
+          <a:lnRef idx="1">
+            <a:schemeClr val="accent1"/>
+          </a:lnRef>
+          <a:fillRef idx="3">
+            <a:schemeClr val="accent1"/>
+          </a:fillRef>
+          <a:effectRef idx="2">
+            <a:schemeClr val="accent1"/>
+          </a:effectRef>
+          <a:fontRef idx="minor">
+            <a:schemeClr val="lt1"/>
+          </a:fontRef>
+        </p:style>
+        <p:txBody>
+          <a:bodyPr rtlCol="0" anchor="ctr"/>
+          <a:lstStyle/>
+          <a:p>
+            <a:pPr algn="ctr"/>
+          </a:p>
+        </p:txBody>
+      </p:sp>
+      <p:sp>
+        <p:nvSpPr>
+          <p:cNvPr id="15" name="TextBox 14"/>
+          <p:cNvSpPr txBox="1"/>
+          <p:nvPr/>
+        </p:nvSpPr>
+        <p:spPr>
+          <a:xfrm>
+            <a:off x="1600000" y="2100000"/>
+            <a:ext cx="10150000" cy="620000"/>
+          </a:xfrm>
+          <a:prstGeom prst="rect">
+            <a:avLst/>
+          </a:prstGeom>
+          <a:noFill/>
+        </p:spPr>
+        <p:txBody>
+          <a:bodyPr wrap="square" anchor="ctr">
+            <a:spAutoFit/>
+          </a:bodyPr>
+          <a:lstStyle/>
+          <a:p>
+            <a:pPr algn="l"/>
+            <a:r>
+              <a:rPr sz="1300" b="0">
+                <a:solidFill>
+                  <a:srgbClr val="333333"/>
+                </a:solidFill>
+                <a:latin typeface="Open Sans"/>
+                <a:ea typeface="Open Sans"/>
+                <a:cs typeface="Open Sans"/>
+              </a:rPr>
+              <a:t>Снимите кольца, часы и тесные предметы до нарастания отека.</a:t>
+            </a:r>
+          </a:p>
+        </p:txBody>
+      </p:sp>
+      <p:sp>
+        <p:nvSpPr>
+          <p:cNvPr id="16" name="Oval 15"/>
+          <p:cNvSpPr/>
+          <p:nvPr/>
+        </p:nvSpPr>
+        <p:spPr>
+          <a:xfrm>
+            <a:off x="700000" y="2800000"/>
+            <a:ext cx="500000" cy="500000"/>
+          </a:xfrm>
+          <a:prstGeom prst="ellipse">
+            <a:avLst/>
+          </a:prstGeom>
+          <a:solidFill>
+            <a:srgbClr val="555555"/>
+          </a:solidFill>
+          <a:ln>
+            <a:noFill/>
+          </a:ln>
+        </p:spPr>
+        <p:style>
+          <a:lnRef idx="1">
+            <a:schemeClr val="accent1"/>
+          </a:lnRef>
+          <a:fillRef idx="3">
+            <a:schemeClr val="accent1"/>
+          </a:fillRef>
+          <a:effectRef idx="2">
+            <a:schemeClr val="accent1"/>
+          </a:effectRef>
+          <a:fontRef idx="minor">
+            <a:schemeClr val="lt1"/>
+          </a:fontRef>
+        </p:style>
+        <p:txBody>
+          <a:bodyPr rtlCol="0" anchor="ctr"/>
+          <a:lstStyle/>
+          <a:p>
+            <a:pPr algn="ctr"/>
+          </a:p>
+        </p:txBody>
+      </p:sp>
+      <p:sp>
+        <p:nvSpPr>
+          <p:cNvPr id="17" name="TextBox 16"/>
+          <p:cNvSpPr txBox="1"/>
+          <p:nvPr/>
+        </p:nvSpPr>
+        <p:spPr>
+          <a:xfrm>
+            <a:off x="700000" y="2800000"/>
+            <a:ext cx="500000" cy="500000"/>
+          </a:xfrm>
+          <a:prstGeom prst="rect">
+            <a:avLst/>
+          </a:prstGeom>
+          <a:noFill/>
+        </p:spPr>
+        <p:txBody>
+          <a:bodyPr wrap="square" anchor="ctr">
+            <a:spAutoFit/>
+          </a:bodyPr>
+          <a:lstStyle/>
+          <a:p>
+            <a:pPr algn="ctr"/>
+            <a:r>
+              <a:rPr sz="1300" b="1">
+                <a:solidFill>
+                  <a:srgbClr val="FFFFFF"/>
+                </a:solidFill>
+                <a:latin typeface="Open Sans"/>
+                <a:ea typeface="Open Sans"/>
+                <a:cs typeface="Open Sans"/>
+              </a:rPr>
+              <a:t>3</a:t>
+            </a:r>
+          </a:p>
+        </p:txBody>
+      </p:sp>
+      <p:sp>
+        <p:nvSpPr>
+          <p:cNvPr id="18" name="Rectangle 17"/>
+          <p:cNvSpPr/>
+          <p:nvPr/>
+        </p:nvSpPr>
+        <p:spPr>
+          <a:xfrm>
+            <a:off x="1400000" y="2800000"/>
+            <a:ext cx="10550000" cy="620000"/>
+          </a:xfrm>
+          <a:prstGeom prst="rect">
+            <a:avLst/>
+          </a:prstGeom>
+          <a:solidFill>
+            <a:srgbClr val="FFFFFF"/>
+          </a:solidFill>
+          <a:ln w="12700">
+            <a:solidFill>
+              <a:srgbClr val="999999"/>
+            </a:solidFill>
+          </a:ln>
+        </p:spPr>
+        <p:style>
+          <a:lnRef idx="1">
+            <a:schemeClr val="accent1"/>
+          </a:lnRef>
+          <a:fillRef idx="3">
+            <a:schemeClr val="accent1"/>
+          </a:fillRef>
+          <a:effectRef idx="2">
+            <a:schemeClr val="accent1"/>
+          </a:effectRef>
+          <a:fontRef idx="minor">
+            <a:schemeClr val="lt1"/>
+          </a:fontRef>
+        </p:style>
+        <p:txBody>
+          <a:bodyPr rtlCol="0" anchor="ctr"/>
+          <a:lstStyle/>
+          <a:p>
+            <a:pPr algn="ctr"/>
+          </a:p>
+        </p:txBody>
+      </p:sp>
+      <p:sp>
+        <p:nvSpPr>
+          <p:cNvPr id="19" name="TextBox 18"/>
+          <p:cNvSpPr txBox="1"/>
+          <p:nvPr/>
+        </p:nvSpPr>
+        <p:spPr>
+          <a:xfrm>
+            <a:off x="1600000" y="2800000"/>
+            <a:ext cx="10150000" cy="620000"/>
+          </a:xfrm>
+          <a:prstGeom prst="rect">
+            <a:avLst/>
+          </a:prstGeom>
+          <a:noFill/>
+        </p:spPr>
+        <p:txBody>
+          <a:bodyPr wrap="square" anchor="ctr">
+            <a:spAutoFit/>
+          </a:bodyPr>
+          <a:lstStyle/>
+          <a:p>
+            <a:pPr algn="l"/>
+            <a:r>
+              <a:rPr sz="1300" b="0">
+                <a:solidFill>
+                  <a:srgbClr val="333333"/>
+                </a:solidFill>
+                <a:latin typeface="Open Sans"/>
+                <a:ea typeface="Open Sans"/>
+                <a:cs typeface="Open Sans"/>
+              </a:rPr>
+              <a:t>Оцените цвет, тепло, чувствительность и движение пальцев.</a:t>
+            </a:r>
+          </a:p>
+        </p:txBody>
+      </p:sp>
+      <p:sp>
+        <p:nvSpPr>
+          <p:cNvPr id="20" name="Oval 19"/>
+          <p:cNvSpPr/>
+          <p:nvPr/>
+        </p:nvSpPr>
+        <p:spPr>
+          <a:xfrm>
+            <a:off x="700000" y="3500000"/>
+            <a:ext cx="500000" cy="500000"/>
+          </a:xfrm>
+          <a:prstGeom prst="ellipse">
+            <a:avLst/>
+          </a:prstGeom>
+          <a:solidFill>
+            <a:srgbClr val="555555"/>
+          </a:solidFill>
+          <a:ln>
+            <a:noFill/>
+          </a:ln>
+        </p:spPr>
+        <p:style>
+          <a:lnRef idx="1">
+            <a:schemeClr val="accent1"/>
+          </a:lnRef>
+          <a:fillRef idx="3">
+            <a:schemeClr val="accent1"/>
+          </a:fillRef>
+          <a:effectRef idx="2">
+            <a:schemeClr val="accent1"/>
+          </a:effectRef>
+          <a:fontRef idx="minor">
+            <a:schemeClr val="lt1"/>
+          </a:fontRef>
+        </p:style>
+        <p:txBody>
+          <a:bodyPr rtlCol="0" anchor="ctr"/>
+          <a:lstStyle/>
+          <a:p>
+            <a:pPr algn="ctr"/>
+          </a:p>
+        </p:txBody>
+      </p:sp>
+      <p:sp>
+        <p:nvSpPr>
+          <p:cNvPr id="21" name="TextBox 20"/>
+          <p:cNvSpPr txBox="1"/>
+          <p:nvPr/>
+        </p:nvSpPr>
+        <p:spPr>
+          <a:xfrm>
+            <a:off x="700000" y="3500000"/>
+            <a:ext cx="500000" cy="500000"/>
+          </a:xfrm>
+          <a:prstGeom prst="rect">
+            <a:avLst/>
+          </a:prstGeom>
+          <a:noFill/>
+        </p:spPr>
+        <p:txBody>
+          <a:bodyPr wrap="square" anchor="ctr">
+            <a:spAutoFit/>
+          </a:bodyPr>
+          <a:lstStyle/>
+          <a:p>
+            <a:pPr algn="ctr"/>
+            <a:r>
+              <a:rPr sz="1300" b="1">
+                <a:solidFill>
+                  <a:srgbClr val="FFFFFF"/>
+                </a:solidFill>
+                <a:latin typeface="Open Sans"/>
+                <a:ea typeface="Open Sans"/>
+                <a:cs typeface="Open Sans"/>
+              </a:rPr>
+              <a:t>4</a:t>
+            </a:r>
+          </a:p>
+        </p:txBody>
+      </p:sp>
+      <p:sp>
+        <p:nvSpPr>
+          <p:cNvPr id="22" name="Rectangle 21"/>
+          <p:cNvSpPr/>
+          <p:nvPr/>
+        </p:nvSpPr>
+        <p:spPr>
+          <a:xfrm>
+            <a:off x="1400000" y="3500000"/>
+            <a:ext cx="10550000" cy="620000"/>
+          </a:xfrm>
+          <a:prstGeom prst="rect">
+            <a:avLst/>
+          </a:prstGeom>
+          <a:solidFill>
+            <a:srgbClr val="FFFFFF"/>
+          </a:solidFill>
+          <a:ln w="12700">
+            <a:solidFill>
+              <a:srgbClr val="999999"/>
+            </a:solidFill>
+          </a:ln>
+        </p:spPr>
+        <p:style>
+          <a:lnRef idx="1">
+            <a:schemeClr val="accent1"/>
+          </a:lnRef>
+          <a:fillRef idx="3">
+            <a:schemeClr val="accent1"/>
+          </a:fillRef>
+          <a:effectRef idx="2">
+            <a:schemeClr val="accent1"/>
+          </a:effectRef>
+          <a:fontRef idx="minor">
+            <a:schemeClr val="lt1"/>
+          </a:fontRef>
+        </p:style>
+        <p:txBody>
+          <a:bodyPr rtlCol="0" anchor="ctr"/>
+          <a:lstStyle/>
+          <a:p>
+            <a:pPr algn="ctr"/>
+          </a:p>
+        </p:txBody>
+      </p:sp>
+      <p:sp>
+        <p:nvSpPr>
+          <p:cNvPr id="23" name="TextBox 22"/>
+          <p:cNvSpPr txBox="1"/>
+          <p:nvPr/>
+        </p:nvSpPr>
+        <p:spPr>
+          <a:xfrm>
+            <a:off x="1600000" y="3500000"/>
+            <a:ext cx="10150000" cy="620000"/>
+          </a:xfrm>
+          <a:prstGeom prst="rect">
+            <a:avLst/>
+          </a:prstGeom>
+          <a:noFill/>
+        </p:spPr>
+        <p:txBody>
+          <a:bodyPr wrap="square" anchor="ctr">
+            <a:spAutoFit/>
+          </a:bodyPr>
+          <a:lstStyle/>
+          <a:p>
+            <a:pPr algn="l"/>
+            <a:r>
+              <a:rPr sz="1300" b="0">
+                <a:solidFill>
+                  <a:srgbClr val="333333"/>
+                </a:solidFill>
+                <a:latin typeface="Open Sans"/>
+                <a:ea typeface="Open Sans"/>
+                <a:cs typeface="Open Sans"/>
+              </a:rPr>
+              <a:t>Не исправляйте деформацию и не возвращайте костные отломки в рану.</a:t>
+            </a:r>
+          </a:p>
+        </p:txBody>
+      </p:sp>
+      <p:sp>
+        <p:nvSpPr>
+          <p:cNvPr id="24" name="Oval 23"/>
+          <p:cNvSpPr/>
+          <p:nvPr/>
+        </p:nvSpPr>
+        <p:spPr>
+          <a:xfrm>
+            <a:off x="700000" y="4200000"/>
+            <a:ext cx="500000" cy="500000"/>
+          </a:xfrm>
+          <a:prstGeom prst="ellipse">
+            <a:avLst/>
+          </a:prstGeom>
+          <a:solidFill>
+            <a:srgbClr val="555555"/>
+          </a:solidFill>
+          <a:ln>
+            <a:noFill/>
+          </a:ln>
+        </p:spPr>
+        <p:style>
+          <a:lnRef idx="1">
+            <a:schemeClr val="accent1"/>
+          </a:lnRef>
+          <a:fillRef idx="3">
+            <a:schemeClr val="accent1"/>
+          </a:fillRef>
+          <a:effectRef idx="2">
+            <a:schemeClr val="accent1"/>
+          </a:effectRef>
+          <a:fontRef idx="minor">
+            <a:schemeClr val="lt1"/>
+          </a:fontRef>
+        </p:style>
+        <p:txBody>
+          <a:bodyPr rtlCol="0" anchor="ctr"/>
+          <a:lstStyle/>
+          <a:p>
+            <a:pPr algn="ctr"/>
+          </a:p>
+        </p:txBody>
+      </p:sp>
+      <p:sp>
+        <p:nvSpPr>
+          <p:cNvPr id="25" name="TextBox 24"/>
+          <p:cNvSpPr txBox="1"/>
+          <p:nvPr/>
+        </p:nvSpPr>
+        <p:spPr>
+          <a:xfrm>
+            <a:off x="700000" y="4200000"/>
+            <a:ext cx="500000" cy="500000"/>
+          </a:xfrm>
+          <a:prstGeom prst="rect">
+            <a:avLst/>
+          </a:prstGeom>
+          <a:noFill/>
+        </p:spPr>
+        <p:txBody>
+          <a:bodyPr wrap="square" anchor="ctr">
+            <a:spAutoFit/>
+          </a:bodyPr>
+          <a:lstStyle/>
+          <a:p>
+            <a:pPr algn="ctr"/>
+            <a:r>
+              <a:rPr sz="1300" b="1">
+                <a:solidFill>
+                  <a:srgbClr val="FFFFFF"/>
+                </a:solidFill>
+                <a:latin typeface="Open Sans"/>
+                <a:ea typeface="Open Sans"/>
+                <a:cs typeface="Open Sans"/>
+              </a:rPr>
+              <a:t>5</a:t>
+            </a:r>
+          </a:p>
+        </p:txBody>
+      </p:sp>
+      <p:sp>
+        <p:nvSpPr>
+          <p:cNvPr id="26" name="Rectangle 25"/>
+          <p:cNvSpPr/>
+          <p:nvPr/>
+        </p:nvSpPr>
+        <p:spPr>
+          <a:xfrm>
+            <a:off x="1400000" y="4200000"/>
+            <a:ext cx="10550000" cy="620000"/>
+          </a:xfrm>
+          <a:prstGeom prst="rect">
+            <a:avLst/>
+          </a:prstGeom>
+          <a:solidFill>
+            <a:srgbClr val="FFFFFF"/>
+          </a:solidFill>
+          <a:ln w="12700">
+            <a:solidFill>
+              <a:srgbClr val="999999"/>
+            </a:solidFill>
+          </a:ln>
+        </p:spPr>
+        <p:style>
+          <a:lnRef idx="1">
+            <a:schemeClr val="accent1"/>
+          </a:lnRef>
+          <a:fillRef idx="3">
+            <a:schemeClr val="accent1"/>
+          </a:fillRef>
+          <a:effectRef idx="2">
+            <a:schemeClr val="accent1"/>
+          </a:effectRef>
+          <a:fontRef idx="minor">
+            <a:schemeClr val="lt1"/>
+          </a:fontRef>
+        </p:style>
+        <p:txBody>
+          <a:bodyPr rtlCol="0" anchor="ctr"/>
+          <a:lstStyle/>
+          <a:p>
+            <a:pPr algn="ctr"/>
+          </a:p>
+        </p:txBody>
+      </p:sp>
+      <p:sp>
+        <p:nvSpPr>
+          <p:cNvPr id="27" name="TextBox 26"/>
+          <p:cNvSpPr txBox="1"/>
+          <p:nvPr/>
+        </p:nvSpPr>
+        <p:spPr>
+          <a:xfrm>
+            <a:off x="1600000" y="4200000"/>
+            <a:ext cx="10150000" cy="620000"/>
+          </a:xfrm>
+          <a:prstGeom prst="rect">
+            <a:avLst/>
+          </a:prstGeom>
+          <a:noFill/>
+        </p:spPr>
+        <p:txBody>
+          <a:bodyPr wrap="square" anchor="ctr">
+            <a:spAutoFit/>
+          </a:bodyPr>
+          <a:lstStyle/>
+          <a:p>
+            <a:pPr algn="l"/>
+            <a:r>
+              <a:rPr sz="1300" b="0">
+                <a:solidFill>
+                  <a:srgbClr val="333333"/>
+                </a:solidFill>
+                <a:latin typeface="Open Sans"/>
+                <a:ea typeface="Open Sans"/>
+                <a:cs typeface="Open Sans"/>
+              </a:rPr>
+              <a:t>Обездвижьте суставы выше и ниже предполагаемого перелома в найденном положении.</a:t>
+            </a:r>
+          </a:p>
+        </p:txBody>
+      </p:sp>
+      <p:sp>
+        <p:nvSpPr>
+          <p:cNvPr id="28" name="Oval 27"/>
+          <p:cNvSpPr/>
+          <p:nvPr/>
+        </p:nvSpPr>
+        <p:spPr>
+          <a:xfrm>
+            <a:off x="700000" y="4900000"/>
+            <a:ext cx="500000" cy="500000"/>
+          </a:xfrm>
+          <a:prstGeom prst="ellipse">
+            <a:avLst/>
+          </a:prstGeom>
+          <a:solidFill>
+            <a:srgbClr val="555555"/>
+          </a:solidFill>
+          <a:ln>
+            <a:noFill/>
+          </a:ln>
+        </p:spPr>
+        <p:style>
+          <a:lnRef idx="1">
+            <a:schemeClr val="accent1"/>
+          </a:lnRef>
+          <a:fillRef idx="3">
+            <a:schemeClr val="accent1"/>
+          </a:fillRef>
+          <a:effectRef idx="2">
+            <a:schemeClr val="accent1"/>
+          </a:effectRef>
+          <a:fontRef idx="minor">
+            <a:schemeClr val="lt1"/>
+          </a:fontRef>
+        </p:style>
+        <p:txBody>
+          <a:bodyPr rtlCol="0" anchor="ctr"/>
+          <a:lstStyle/>
+          <a:p>
+            <a:pPr algn="ctr"/>
+          </a:p>
+        </p:txBody>
+      </p:sp>
+      <p:sp>
+        <p:nvSpPr>
+          <p:cNvPr id="29" name="TextBox 28"/>
+          <p:cNvSpPr txBox="1"/>
+          <p:nvPr/>
+        </p:nvSpPr>
+        <p:spPr>
+          <a:xfrm>
+            <a:off x="700000" y="4900000"/>
+            <a:ext cx="500000" cy="500000"/>
+          </a:xfrm>
+          <a:prstGeom prst="rect">
+            <a:avLst/>
+          </a:prstGeom>
+          <a:noFill/>
+        </p:spPr>
+        <p:txBody>
+          <a:bodyPr wrap="square" anchor="ctr">
+            <a:spAutoFit/>
+          </a:bodyPr>
+          <a:lstStyle/>
+          <a:p>
+            <a:pPr algn="ctr"/>
+            <a:r>
+              <a:rPr sz="1300" b="1">
+                <a:solidFill>
+                  <a:srgbClr val="FFFFFF"/>
+                </a:solidFill>
+                <a:latin typeface="Open Sans"/>
+                <a:ea typeface="Open Sans"/>
+                <a:cs typeface="Open Sans"/>
+              </a:rPr>
+              <a:t>6</a:t>
+            </a:r>
+          </a:p>
+        </p:txBody>
+      </p:sp>
+      <p:sp>
+        <p:nvSpPr>
+          <p:cNvPr id="30" name="Rectangle 29"/>
+          <p:cNvSpPr/>
+          <p:nvPr/>
+        </p:nvSpPr>
+        <p:spPr>
+          <a:xfrm>
+            <a:off x="1400000" y="4900000"/>
+            <a:ext cx="10550000" cy="620000"/>
+          </a:xfrm>
+          <a:prstGeom prst="rect">
+            <a:avLst/>
+          </a:prstGeom>
+          <a:solidFill>
+            <a:srgbClr val="FFFFFF"/>
+          </a:solidFill>
+          <a:ln w="12700">
+            <a:solidFill>
+              <a:srgbClr val="999999"/>
+            </a:solidFill>
+          </a:ln>
+        </p:spPr>
+        <p:style>
+          <a:lnRef idx="1">
+            <a:schemeClr val="accent1"/>
+          </a:lnRef>
+          <a:fillRef idx="3">
+            <a:schemeClr val="accent1"/>
+          </a:fillRef>
+          <a:effectRef idx="2">
+            <a:schemeClr val="accent1"/>
+          </a:effectRef>
+          <a:fontRef idx="minor">
+            <a:schemeClr val="lt1"/>
+          </a:fontRef>
+        </p:style>
+        <p:txBody>
+          <a:bodyPr rtlCol="0" anchor="ctr"/>
+          <a:lstStyle/>
+          <a:p>
+            <a:pPr algn="ctr"/>
+          </a:p>
+        </p:txBody>
+      </p:sp>
+      <p:sp>
+        <p:nvSpPr>
+          <p:cNvPr id="31" name="TextBox 30"/>
+          <p:cNvSpPr txBox="1"/>
+          <p:nvPr/>
+        </p:nvSpPr>
+        <p:spPr>
+          <a:xfrm>
+            <a:off x="1600000" y="4900000"/>
+            <a:ext cx="10150000" cy="620000"/>
+          </a:xfrm>
+          <a:prstGeom prst="rect">
+            <a:avLst/>
+          </a:prstGeom>
+          <a:noFill/>
+        </p:spPr>
+        <p:txBody>
+          <a:bodyPr wrap="square" anchor="ctr">
+            <a:spAutoFit/>
+          </a:bodyPr>
+          <a:lstStyle/>
+          <a:p>
+            <a:pPr algn="l"/>
+            <a:r>
+              <a:rPr sz="1300" b="0">
+                <a:solidFill>
+                  <a:srgbClr val="333333"/>
+                </a:solidFill>
+                <a:latin typeface="Open Sans"/>
+                <a:ea typeface="Open Sans"/>
+                <a:cs typeface="Open Sans"/>
+              </a:rPr>
+              <a:t>После фиксации повторно проверьте кровообращение и чувствительность.</a:t>
+            </a:r>
+          </a:p>
+        </p:txBody>
+      </p:sp>
+      <p:sp>
+        <p:nvSpPr>
+          <p:cNvPr id="32" name="Rounded Rectangle 31"/>
+          <p:cNvSpPr/>
+          <p:nvPr/>
+        </p:nvSpPr>
+        <p:spPr>
+          <a:xfrm>
+            <a:off x="700000" y="5800000"/>
+            <a:ext cx="11000000" cy="900000"/>
+          </a:xfrm>
+          <a:prstGeom prst="roundRect">
+            <a:avLst/>
+          </a:prstGeom>
+          <a:solidFill>
+            <a:srgbClr val="F5F0E1"/>
+          </a:solidFill>
+          <a:ln>
+            <a:noFill/>
+          </a:ln>
+        </p:spPr>
+        <p:style>
+          <a:lnRef idx="1">
+            <a:schemeClr val="accent1"/>
+          </a:lnRef>
+          <a:fillRef idx="3">
+            <a:schemeClr val="accent1"/>
+          </a:fillRef>
+          <a:effectRef idx="2">
+            <a:schemeClr val="accent1"/>
+          </a:effectRef>
+          <a:fontRef idx="minor">
+            <a:schemeClr val="lt1"/>
+          </a:fontRef>
+        </p:style>
+        <p:txBody>
+          <a:bodyPr rtlCol="0" anchor="ctr"/>
+          <a:lstStyle/>
+          <a:p>
+            <a:pPr algn="ctr"/>
+          </a:p>
+        </p:txBody>
+      </p:sp>
+      <p:sp>
+        <p:nvSpPr>
+          <p:cNvPr id="33" name="TextBox 32"/>
+          <p:cNvSpPr txBox="1"/>
+          <p:nvPr/>
+        </p:nvSpPr>
+        <p:spPr>
+          <a:xfrm>
+            <a:off x="950000" y="6000000"/>
+            <a:ext cx="10500000" cy="500000"/>
+          </a:xfrm>
+          <a:prstGeom prst="rect">
+            <a:avLst/>
+          </a:prstGeom>
+          <a:noFill/>
+        </p:spPr>
+        <p:txBody>
+          <a:bodyPr wrap="square" anchor="ctr">
+            <a:spAutoFit/>
+          </a:bodyPr>
+          <a:lstStyle/>
+          <a:p>
+            <a:pPr algn="l"/>
+            <a:r>
+              <a:rPr sz="1200" b="0">
+                <a:solidFill>
+                  <a:srgbClr val="333333"/>
+                </a:solidFill>
+                <a:latin typeface="Open Sans"/>
+                <a:ea typeface="Open Sans"/>
+                <a:cs typeface="Open Sans"/>
+              </a:rPr>
+              <a:t>Если после фиксации пальцы побледнели, похолодели или онемели, ослабьте повязку, не нарушая неподвижность.</a:t>
+            </a:r>
+          </a:p>
+        </p:txBody>
+      </p:sp>
+    </p:spTree>
+  </p:cSld>
+  <p:clrMapOvr>
+    <a:masterClrMapping/>
+  </p:clrMapOvr>
+</p:sld>
+</file>
+
+<file path=ppt/slides/slide13.xml><?xml version="1.0" encoding="utf-8"?>
+<p:sld xmlns:a="http://schemas.openxmlformats.org/drawingml/2006/main" xmlns:p="http://schemas.openxmlformats.org/presentationml/2006/main" xmlns:r="http://schemas.openxmlformats.org/officeDocument/2006/relationships">
+  <p:cSld>
+    <p:spTree>
+      <p:nvGrpSpPr>
+        <p:cNvPr id="1" name=""/>
+        <p:cNvGrpSpPr/>
+        <p:nvPr/>
+      </p:nvGrpSpPr>
+      <p:grpSpPr/>
+      <p:sp>
+        <p:nvSpPr>
+          <p:cNvPr id="2" name="Rectangle 1"/>
+          <p:cNvSpPr/>
+          <p:nvPr/>
+        </p:nvSpPr>
+        <p:spPr>
+          <a:xfrm>
+            <a:off x="0" y="0"/>
+            <a:ext cx="12191695" cy="6858000"/>
+          </a:xfrm>
+          <a:prstGeom prst="rect">
+            <a:avLst/>
+          </a:prstGeom>
+          <a:solidFill>
+            <a:srgbClr val="FFFFFF"/>
+          </a:solidFill>
+          <a:ln>
+            <a:noFill/>
+          </a:ln>
+        </p:spPr>
+        <p:style>
+          <a:lnRef idx="1">
+            <a:schemeClr val="accent1"/>
+          </a:lnRef>
+          <a:fillRef idx="3">
+            <a:schemeClr val="accent1"/>
+          </a:fillRef>
+          <a:effectRef idx="2">
+            <a:schemeClr val="accent1"/>
+          </a:effectRef>
+          <a:fontRef idx="minor">
+            <a:schemeClr val="lt1"/>
+          </a:fontRef>
+        </p:style>
+        <p:txBody>
+          <a:bodyPr rtlCol="0" anchor="ctr"/>
+          <a:lstStyle/>
+          <a:p>
+            <a:pPr algn="ctr"/>
+          </a:p>
+        </p:txBody>
+      </p:sp>
+      <p:sp>
+        <p:nvSpPr>
+          <p:cNvPr id="3" name="TextBox 2"/>
+          <p:cNvSpPr txBox="1"/>
+          <p:nvPr/>
+        </p:nvSpPr>
+        <p:spPr>
+          <a:xfrm>
+            <a:off x="700000" y="250000"/>
+            <a:ext cx="11200000" cy="550000"/>
+          </a:xfrm>
+          <a:prstGeom prst="rect">
+            <a:avLst/>
+          </a:prstGeom>
+          <a:noFill/>
+        </p:spPr>
+        <p:txBody>
+          <a:bodyPr wrap="square" anchor="t">
+            <a:spAutoFit/>
+          </a:bodyPr>
+          <a:lstStyle/>
+          <a:p>
+            <a:pPr algn="l"/>
+            <a:r>
+              <a:rPr sz="2200" b="1">
+                <a:solidFill>
+                  <a:srgbClr val="333333"/>
+                </a:solidFill>
+                <a:latin typeface="Open Sans"/>
+                <a:ea typeface="Open Sans"/>
+                <a:cs typeface="Open Sans"/>
+              </a:rPr>
+              <a:t>НОГА: АУТОИММОБИЛИЗАЦИЯ</a:t>
+            </a:r>
+          </a:p>
+        </p:txBody>
+      </p:sp>
+      <p:sp>
+        <p:nvSpPr>
+          <p:cNvPr id="4" name="Rectangle 3"/>
+          <p:cNvSpPr/>
+          <p:nvPr/>
+        </p:nvSpPr>
+        <p:spPr>
+          <a:xfrm>
+            <a:off x="700000" y="850000"/>
+            <a:ext cx="9000000" cy="28000"/>
+          </a:xfrm>
+          <a:prstGeom prst="rect">
+            <a:avLst/>
+          </a:prstGeom>
+          <a:solidFill>
+            <a:srgbClr val="555555"/>
+          </a:solidFill>
+          <a:ln>
+            <a:noFill/>
+          </a:ln>
+        </p:spPr>
+        <p:style>
+          <a:lnRef idx="1">
+            <a:schemeClr val="accent1"/>
+          </a:lnRef>
+          <a:fillRef idx="3">
+            <a:schemeClr val="accent1"/>
+          </a:fillRef>
+          <a:effectRef idx="2">
+            <a:schemeClr val="accent1"/>
+          </a:effectRef>
+          <a:fontRef idx="minor">
+            <a:schemeClr val="lt1"/>
+          </a:fontRef>
+        </p:style>
+        <p:txBody>
+          <a:bodyPr rtlCol="0" anchor="ctr"/>
+          <a:lstStyle/>
+          <a:p>
+            <a:pPr algn="ctr"/>
+          </a:p>
+        </p:txBody>
+      </p:sp>
+      <p:sp>
+        <p:nvSpPr>
+          <p:cNvPr id="5" name="TextBox 4"/>
+          <p:cNvSpPr txBox="1"/>
+          <p:nvPr/>
+        </p:nvSpPr>
+        <p:spPr>
+          <a:xfrm>
+            <a:off x="700000" y="920000"/>
+            <a:ext cx="11000000" cy="350000"/>
+          </a:xfrm>
+          <a:prstGeom prst="rect">
+            <a:avLst/>
+          </a:prstGeom>
+          <a:noFill/>
+        </p:spPr>
+        <p:txBody>
+          <a:bodyPr wrap="square" anchor="t">
+            <a:spAutoFit/>
+          </a:bodyPr>
+          <a:lstStyle/>
+          <a:p>
+            <a:pPr algn="l"/>
+            <a:r>
+              <a:rPr sz="1200" b="0">
+                <a:solidFill>
+                  <a:srgbClr val="666666"/>
+                </a:solidFill>
+                <a:latin typeface="Open Sans"/>
+                <a:ea typeface="Open Sans"/>
+                <a:cs typeface="Open Sans"/>
+              </a:rPr>
+              <a:t>Оказание первой помощи при травмах, ранениях и поражениях, прочих состояниях</a:t>
+            </a:r>
+          </a:p>
+        </p:txBody>
+      </p:sp>
+      <p:sp>
+        <p:nvSpPr>
+          <p:cNvPr id="6" name="Rectangle 5"/>
+          <p:cNvSpPr/>
+          <p:nvPr/>
+        </p:nvSpPr>
+        <p:spPr>
+          <a:xfrm>
+            <a:off x="0" y="2800000"/>
+            <a:ext cx="420000" cy="420000"/>
+          </a:xfrm>
+          <a:prstGeom prst="rect">
+            <a:avLst/>
+          </a:prstGeom>
+          <a:solidFill>
+            <a:srgbClr val="555555"/>
+          </a:solidFill>
+          <a:ln>
+            <a:noFill/>
+          </a:ln>
+        </p:spPr>
+        <p:style>
+          <a:lnRef idx="1">
+            <a:schemeClr val="accent1"/>
+          </a:lnRef>
+          <a:fillRef idx="3">
+            <a:schemeClr val="accent1"/>
+          </a:fillRef>
+          <a:effectRef idx="2">
+            <a:schemeClr val="accent1"/>
+          </a:effectRef>
+          <a:fontRef idx="minor">
+            <a:schemeClr val="lt1"/>
+          </a:fontRef>
+        </p:style>
+        <p:txBody>
+          <a:bodyPr rtlCol="0" anchor="ctr"/>
+          <a:lstStyle/>
+          <a:p>
+            <a:pPr algn="ctr"/>
+          </a:p>
+        </p:txBody>
+      </p:sp>
+      <p:sp>
+        <p:nvSpPr>
+          <p:cNvPr id="7" name="TextBox 6"/>
+          <p:cNvSpPr txBox="1"/>
+          <p:nvPr/>
+        </p:nvSpPr>
+        <p:spPr>
+          <a:xfrm>
+            <a:off x="0" y="2800000"/>
+            <a:ext cx="420000" cy="420000"/>
+          </a:xfrm>
+          <a:prstGeom prst="rect">
+            <a:avLst/>
+          </a:prstGeom>
+          <a:noFill/>
+        </p:spPr>
+        <p:txBody>
+          <a:bodyPr wrap="square" anchor="ctr">
+            <a:spAutoFit/>
+          </a:bodyPr>
+          <a:lstStyle/>
+          <a:p>
+            <a:pPr algn="ctr"/>
+            <a:r>
+              <a:rPr sz="1400" b="1">
+                <a:solidFill>
+                  <a:srgbClr val="FFFFFF"/>
+                </a:solidFill>
+                <a:latin typeface="Open Sans"/>
+                <a:ea typeface="Open Sans"/>
+                <a:cs typeface="Open Sans"/>
+              </a:rPr>
+              <a:t>13</a:t>
+            </a:r>
+          </a:p>
+        </p:txBody>
+      </p:sp>
+      <p:pic>
+        <p:nvPicPr>
+          <p:cNvPr id="8" name="Picture 7" descr="fig71.jpeg"/>
+          <p:cNvPicPr>
+            <a:picLocks noChangeAspect="1"/>
+          </p:cNvPicPr>
+          <p:nvPr/>
+        </p:nvPicPr>
+        <p:blipFill>
+          <a:blip r:embed="rId2"/>
+          <a:stretch>
+            <a:fillRect/>
+          </a:stretch>
+        </p:blipFill>
+        <p:spPr>
+          <a:xfrm>
+            <a:off x="500000" y="2259160"/>
+            <a:ext cx="5200000" cy="2381679"/>
+          </a:xfrm>
+          <a:prstGeom prst="rect">
+            <a:avLst/>
+          </a:prstGeom>
+        </p:spPr>
+      </p:pic>
+      <p:sp>
+        <p:nvSpPr>
+          <p:cNvPr id="9" name="TextBox 8"/>
+          <p:cNvSpPr txBox="1"/>
+          <p:nvPr/>
+        </p:nvSpPr>
+        <p:spPr>
+          <a:xfrm>
+            <a:off x="6000000" y="1450000"/>
+            <a:ext cx="6200000" cy="3800000"/>
+          </a:xfrm>
+          <a:prstGeom prst="rect">
+            <a:avLst/>
+          </a:prstGeom>
+          <a:noFill/>
+        </p:spPr>
+        <p:txBody>
+          <a:bodyPr wrap="square">
+            <a:spAutoFit/>
+          </a:bodyPr>
+          <a:lstStyle/>
+          <a:p>
+            <a:pPr algn="l">
+              <a:spcAft>
+                <a:spcPts val="800"/>
+              </a:spcAft>
+            </a:pPr>
+            <a:r>
+              <a:rPr sz="1300" b="0">
+                <a:solidFill>
+                  <a:srgbClr val="333333"/>
+                </a:solidFill>
+                <a:latin typeface="Open Sans"/>
+                <a:ea typeface="Open Sans"/>
+                <a:cs typeface="Open Sans"/>
+              </a:rPr>
+              <a:t>•  При отсутствии шины используйте здоровую ногу как опору.</a:t>
+            </a:r>
+          </a:p>
+          <a:p>
+            <a:pPr algn="l">
+              <a:spcAft>
+                <a:spcPts val="800"/>
+              </a:spcAft>
+            </a:pPr>
+            <a:r>
+              <a:rPr sz="1300" b="0">
+                <a:solidFill>
+                  <a:srgbClr val="333333"/>
+                </a:solidFill>
+                <a:latin typeface="Open Sans"/>
+                <a:ea typeface="Open Sans"/>
+                <a:cs typeface="Open Sans"/>
+              </a:rPr>
+              <a:t>•  Между ногами разместите мягкую прокладку, особенно в области коленей и лодыжек.</a:t>
+            </a:r>
+          </a:p>
+          <a:p>
+            <a:pPr algn="l">
+              <a:spcAft>
+                <a:spcPts val="800"/>
+              </a:spcAft>
+            </a:pPr>
+            <a:r>
+              <a:rPr sz="1300" b="0">
+                <a:solidFill>
+                  <a:srgbClr val="333333"/>
+                </a:solidFill>
+                <a:latin typeface="Open Sans"/>
+                <a:ea typeface="Open Sans"/>
+                <a:cs typeface="Open Sans"/>
+              </a:rPr>
+              <a:t>•  Соедините ноги широкими повязками выше и ниже места повреждения.</a:t>
+            </a:r>
+          </a:p>
+          <a:p>
+            <a:pPr algn="l">
+              <a:spcAft>
+                <a:spcPts val="800"/>
+              </a:spcAft>
+            </a:pPr>
+            <a:r>
+              <a:rPr sz="1300" b="0">
+                <a:solidFill>
+                  <a:srgbClr val="333333"/>
+                </a:solidFill>
+                <a:latin typeface="Open Sans"/>
+                <a:ea typeface="Open Sans"/>
+                <a:cs typeface="Open Sans"/>
+              </a:rPr>
+              <a:t>•  Узлы располагайте со стороны здоровой ноги, а не над травмой.</a:t>
+            </a:r>
+          </a:p>
+          <a:p>
+            <a:pPr algn="l">
+              <a:spcAft>
+                <a:spcPts val="800"/>
+              </a:spcAft>
+            </a:pPr>
+            <a:r>
+              <a:rPr sz="1300" b="0">
+                <a:solidFill>
+                  <a:srgbClr val="333333"/>
+                </a:solidFill>
+                <a:latin typeface="Open Sans"/>
+                <a:ea typeface="Open Sans"/>
+                <a:cs typeface="Open Sans"/>
+              </a:rPr>
+              <a:t>•  Не затягивайте повязки чрезмерно; контролируйте стопу и пальцы.</a:t>
+            </a:r>
+          </a:p>
+        </p:txBody>
+      </p:sp>
+      <p:sp>
+        <p:nvSpPr>
+          <p:cNvPr id="10" name="Rounded Rectangle 9"/>
+          <p:cNvSpPr/>
+          <p:nvPr/>
+        </p:nvSpPr>
+        <p:spPr>
+          <a:xfrm>
+            <a:off x="6000000" y="5400000"/>
+            <a:ext cx="6200000" cy="1100000"/>
+          </a:xfrm>
+          <a:prstGeom prst="roundRect">
+            <a:avLst/>
+          </a:prstGeom>
+          <a:solidFill>
+            <a:srgbClr val="F5F0E1"/>
+          </a:solidFill>
+          <a:ln>
+            <a:noFill/>
+          </a:ln>
+        </p:spPr>
+        <p:style>
+          <a:lnRef idx="1">
+            <a:schemeClr val="accent1"/>
+          </a:lnRef>
+          <a:fillRef idx="3">
+            <a:schemeClr val="accent1"/>
+          </a:fillRef>
+          <a:effectRef idx="2">
+            <a:schemeClr val="accent1"/>
+          </a:effectRef>
+          <a:fontRef idx="minor">
+            <a:schemeClr val="lt1"/>
+          </a:fontRef>
+        </p:style>
+        <p:txBody>
+          <a:bodyPr rtlCol="0" anchor="ctr"/>
+          <a:lstStyle/>
+          <a:p>
+            <a:pPr algn="ctr"/>
+          </a:p>
+        </p:txBody>
+      </p:sp>
+      <p:sp>
+        <p:nvSpPr>
+          <p:cNvPr id="11" name="TextBox 10"/>
+          <p:cNvSpPr txBox="1"/>
+          <p:nvPr/>
+        </p:nvSpPr>
+        <p:spPr>
+          <a:xfrm>
+            <a:off x="6250000" y="5600000"/>
+            <a:ext cx="5700000" cy="700000"/>
+          </a:xfrm>
+          <a:prstGeom prst="rect">
+            <a:avLst/>
+          </a:prstGeom>
+          <a:noFill/>
+        </p:spPr>
+        <p:txBody>
+          <a:bodyPr wrap="square" anchor="ctr">
+            <a:spAutoFit/>
+          </a:bodyPr>
+          <a:lstStyle/>
+          <a:p>
+            <a:pPr algn="l"/>
+            <a:r>
+              <a:rPr sz="1200" b="0">
+                <a:solidFill>
+                  <a:srgbClr val="333333"/>
+                </a:solidFill>
+                <a:latin typeface="Open Sans"/>
+                <a:ea typeface="Open Sans"/>
+                <a:cs typeface="Open Sans"/>
+              </a:rPr>
+              <a:t>Не выполняйте аутоиммобилизацию, если сближение ног вызывает резкую боль или может сместить поврежденную область.</a:t>
+            </a:r>
+          </a:p>
+        </p:txBody>
+      </p:sp>
+    </p:spTree>
+  </p:cSld>
+  <p:clrMapOvr>
+    <a:masterClrMapping/>
+  </p:clrMapOvr>
+</p:sld>
+</file>
+
+<file path=ppt/slides/slide14.xml><?xml version="1.0" encoding="utf-8"?>
+<p:sld xmlns:a="http://schemas.openxmlformats.org/drawingml/2006/main" xmlns:p="http://schemas.openxmlformats.org/presentationml/2006/main" xmlns:r="http://schemas.openxmlformats.org/officeDocument/2006/relationships">
+  <p:cSld>
+    <p:spTree>
+      <p:nvGrpSpPr>
+        <p:cNvPr id="1" name=""/>
+        <p:cNvGrpSpPr/>
+        <p:nvPr/>
+      </p:nvGrpSpPr>
+      <p:grpSpPr/>
+      <p:sp>
+        <p:nvSpPr>
+          <p:cNvPr id="2" name="Rectangle 1"/>
+          <p:cNvSpPr/>
+          <p:nvPr/>
+        </p:nvSpPr>
+        <p:spPr>
+          <a:xfrm>
+            <a:off x="0" y="0"/>
+            <a:ext cx="12191695" cy="6858000"/>
+          </a:xfrm>
+          <a:prstGeom prst="rect">
+            <a:avLst/>
+          </a:prstGeom>
+          <a:solidFill>
+            <a:srgbClr val="FFFFFF"/>
+          </a:solidFill>
+          <a:ln>
+            <a:noFill/>
+          </a:ln>
+        </p:spPr>
+        <p:style>
+          <a:lnRef idx="1">
+            <a:schemeClr val="accent1"/>
+          </a:lnRef>
+          <a:fillRef idx="3">
+            <a:schemeClr val="accent1"/>
+          </a:fillRef>
+          <a:effectRef idx="2">
+            <a:schemeClr val="accent1"/>
+          </a:effectRef>
+          <a:fontRef idx="minor">
+            <a:schemeClr val="lt1"/>
+          </a:fontRef>
+        </p:style>
+        <p:txBody>
+          <a:bodyPr rtlCol="0" anchor="ctr"/>
+          <a:lstStyle/>
+          <a:p>
+            <a:pPr algn="ctr"/>
+          </a:p>
+        </p:txBody>
+      </p:sp>
+      <p:sp>
+        <p:nvSpPr>
+          <p:cNvPr id="3" name="TextBox 2"/>
+          <p:cNvSpPr txBox="1"/>
+          <p:nvPr/>
+        </p:nvSpPr>
+        <p:spPr>
+          <a:xfrm>
+            <a:off x="700000" y="250000"/>
+            <a:ext cx="11200000" cy="550000"/>
+          </a:xfrm>
+          <a:prstGeom prst="rect">
+            <a:avLst/>
+          </a:prstGeom>
+          <a:noFill/>
+        </p:spPr>
+        <p:txBody>
+          <a:bodyPr wrap="square" anchor="t">
+            <a:spAutoFit/>
+          </a:bodyPr>
+          <a:lstStyle/>
+          <a:p>
+            <a:pPr algn="l"/>
+            <a:r>
+              <a:rPr sz="2200" b="1">
+                <a:solidFill>
+                  <a:srgbClr val="333333"/>
+                </a:solidFill>
+                <a:latin typeface="Open Sans"/>
+                <a:ea typeface="Open Sans"/>
+                <a:cs typeface="Open Sans"/>
+              </a:rPr>
+              <a:t>РУКА: ФИКСАЦИЯ К ТУЛОВИЩУ</a:t>
+            </a:r>
+          </a:p>
+        </p:txBody>
+      </p:sp>
+      <p:sp>
+        <p:nvSpPr>
+          <p:cNvPr id="4" name="Rectangle 3"/>
+          <p:cNvSpPr/>
+          <p:nvPr/>
+        </p:nvSpPr>
+        <p:spPr>
+          <a:xfrm>
+            <a:off x="700000" y="850000"/>
+            <a:ext cx="9000000" cy="28000"/>
+          </a:xfrm>
+          <a:prstGeom prst="rect">
+            <a:avLst/>
+          </a:prstGeom>
+          <a:solidFill>
+            <a:srgbClr val="555555"/>
+          </a:solidFill>
+          <a:ln>
+            <a:noFill/>
+          </a:ln>
+        </p:spPr>
+        <p:style>
+          <a:lnRef idx="1">
+            <a:schemeClr val="accent1"/>
+          </a:lnRef>
+          <a:fillRef idx="3">
+            <a:schemeClr val="accent1"/>
+          </a:fillRef>
+          <a:effectRef idx="2">
+            <a:schemeClr val="accent1"/>
+          </a:effectRef>
+          <a:fontRef idx="minor">
+            <a:schemeClr val="lt1"/>
+          </a:fontRef>
+        </p:style>
+        <p:txBody>
+          <a:bodyPr rtlCol="0" anchor="ctr"/>
+          <a:lstStyle/>
+          <a:p>
+            <a:pPr algn="ctr"/>
+          </a:p>
+        </p:txBody>
+      </p:sp>
+      <p:sp>
+        <p:nvSpPr>
+          <p:cNvPr id="5" name="TextBox 4"/>
+          <p:cNvSpPr txBox="1"/>
+          <p:nvPr/>
+        </p:nvSpPr>
+        <p:spPr>
+          <a:xfrm>
+            <a:off x="700000" y="920000"/>
+            <a:ext cx="11000000" cy="350000"/>
+          </a:xfrm>
+          <a:prstGeom prst="rect">
+            <a:avLst/>
+          </a:prstGeom>
+          <a:noFill/>
+        </p:spPr>
+        <p:txBody>
+          <a:bodyPr wrap="square" anchor="t">
+            <a:spAutoFit/>
+          </a:bodyPr>
+          <a:lstStyle/>
+          <a:p>
+            <a:pPr algn="l"/>
+            <a:r>
+              <a:rPr sz="1200" b="0">
+                <a:solidFill>
+                  <a:srgbClr val="666666"/>
+                </a:solidFill>
+                <a:latin typeface="Open Sans"/>
+                <a:ea typeface="Open Sans"/>
+                <a:cs typeface="Open Sans"/>
+              </a:rPr>
+              <a:t>Оказание первой помощи при травмах, ранениях и поражениях, прочих состояниях</a:t>
+            </a:r>
+          </a:p>
+        </p:txBody>
+      </p:sp>
+      <p:sp>
+        <p:nvSpPr>
+          <p:cNvPr id="6" name="Rectangle 5"/>
+          <p:cNvSpPr/>
+          <p:nvPr/>
+        </p:nvSpPr>
+        <p:spPr>
+          <a:xfrm>
+            <a:off x="0" y="2800000"/>
+            <a:ext cx="420000" cy="420000"/>
+          </a:xfrm>
+          <a:prstGeom prst="rect">
+            <a:avLst/>
+          </a:prstGeom>
+          <a:solidFill>
+            <a:srgbClr val="555555"/>
+          </a:solidFill>
+          <a:ln>
+            <a:noFill/>
+          </a:ln>
+        </p:spPr>
+        <p:style>
+          <a:lnRef idx="1">
+            <a:schemeClr val="accent1"/>
+          </a:lnRef>
+          <a:fillRef idx="3">
+            <a:schemeClr val="accent1"/>
+          </a:fillRef>
+          <a:effectRef idx="2">
+            <a:schemeClr val="accent1"/>
+          </a:effectRef>
+          <a:fontRef idx="minor">
+            <a:schemeClr val="lt1"/>
+          </a:fontRef>
+        </p:style>
+        <p:txBody>
+          <a:bodyPr rtlCol="0" anchor="ctr"/>
+          <a:lstStyle/>
+          <a:p>
+            <a:pPr algn="ctr"/>
+          </a:p>
+        </p:txBody>
+      </p:sp>
+      <p:sp>
+        <p:nvSpPr>
+          <p:cNvPr id="7" name="TextBox 6"/>
+          <p:cNvSpPr txBox="1"/>
+          <p:nvPr/>
+        </p:nvSpPr>
+        <p:spPr>
+          <a:xfrm>
+            <a:off x="0" y="2800000"/>
+            <a:ext cx="420000" cy="420000"/>
+          </a:xfrm>
+          <a:prstGeom prst="rect">
+            <a:avLst/>
+          </a:prstGeom>
+          <a:noFill/>
+        </p:spPr>
+        <p:txBody>
+          <a:bodyPr wrap="square" anchor="ctr">
+            <a:spAutoFit/>
+          </a:bodyPr>
+          <a:lstStyle/>
+          <a:p>
+            <a:pPr algn="ctr"/>
+            <a:r>
+              <a:rPr sz="1400" b="1">
+                <a:solidFill>
+                  <a:srgbClr val="FFFFFF"/>
+                </a:solidFill>
+                <a:latin typeface="Open Sans"/>
+                <a:ea typeface="Open Sans"/>
+                <a:cs typeface="Open Sans"/>
+              </a:rPr>
+              <a:t>14</a:t>
+            </a:r>
+          </a:p>
+        </p:txBody>
+      </p:sp>
+      <p:pic>
+        <p:nvPicPr>
+          <p:cNvPr id="8" name="Picture 7" descr="fig72.jpeg"/>
+          <p:cNvPicPr>
+            <a:picLocks noChangeAspect="1"/>
+          </p:cNvPicPr>
+          <p:nvPr/>
+        </p:nvPicPr>
+        <p:blipFill>
+          <a:blip r:embed="rId2"/>
+          <a:stretch>
+            <a:fillRect/>
+          </a:stretch>
+        </p:blipFill>
+        <p:spPr>
+          <a:xfrm>
+            <a:off x="1100000" y="1450000"/>
+            <a:ext cx="4000000" cy="4000000"/>
+          </a:xfrm>
+          <a:prstGeom prst="rect">
+            <a:avLst/>
+          </a:prstGeom>
+        </p:spPr>
+      </p:pic>
+      <p:sp>
+        <p:nvSpPr>
+          <p:cNvPr id="9" name="TextBox 8"/>
+          <p:cNvSpPr txBox="1"/>
+          <p:nvPr/>
+        </p:nvSpPr>
+        <p:spPr>
+          <a:xfrm>
+            <a:off x="6000000" y="1450000"/>
+            <a:ext cx="6200000" cy="3800000"/>
+          </a:xfrm>
+          <a:prstGeom prst="rect">
+            <a:avLst/>
+          </a:prstGeom>
+          <a:noFill/>
+        </p:spPr>
+        <p:txBody>
+          <a:bodyPr wrap="square">
+            <a:spAutoFit/>
+          </a:bodyPr>
+          <a:lstStyle/>
+          <a:p>
+            <a:pPr algn="l">
+              <a:spcAft>
+                <a:spcPts val="800"/>
+              </a:spcAft>
+            </a:pPr>
+            <a:r>
+              <a:rPr sz="1300" b="0">
+                <a:solidFill>
+                  <a:srgbClr val="333333"/>
+                </a:solidFill>
+                <a:latin typeface="Open Sans"/>
+                <a:ea typeface="Open Sans"/>
+                <a:cs typeface="Open Sans"/>
+              </a:rPr>
+              <a:t>•  Осторожно поддерживайте поврежденную руку в наиболее удобном положении.</a:t>
+            </a:r>
+          </a:p>
+          <a:p>
+            <a:pPr algn="l">
+              <a:spcAft>
+                <a:spcPts val="800"/>
+              </a:spcAft>
+            </a:pPr>
+            <a:r>
+              <a:rPr sz="1300" b="0">
+                <a:solidFill>
+                  <a:srgbClr val="333333"/>
+                </a:solidFill>
+                <a:latin typeface="Open Sans"/>
+                <a:ea typeface="Open Sans"/>
+                <a:cs typeface="Open Sans"/>
+              </a:rPr>
+              <a:t>•  Поместите мягкую прокладку между рукой и туловищем.</a:t>
+            </a:r>
+          </a:p>
+          <a:p>
+            <a:pPr algn="l">
+              <a:spcAft>
+                <a:spcPts val="800"/>
+              </a:spcAft>
+            </a:pPr>
+            <a:r>
+              <a:rPr sz="1300" b="0">
+                <a:solidFill>
+                  <a:srgbClr val="333333"/>
+                </a:solidFill>
+                <a:latin typeface="Open Sans"/>
+                <a:ea typeface="Open Sans"/>
+                <a:cs typeface="Open Sans"/>
+              </a:rPr>
+              <a:t>•  Подвесьте предплечье косынкой или широкой тканью.</a:t>
+            </a:r>
+          </a:p>
+          <a:p>
+            <a:pPr algn="l">
+              <a:spcAft>
+                <a:spcPts val="800"/>
+              </a:spcAft>
+            </a:pPr>
+            <a:r>
+              <a:rPr sz="1300" b="0">
+                <a:solidFill>
+                  <a:srgbClr val="333333"/>
+                </a:solidFill>
+                <a:latin typeface="Open Sans"/>
+                <a:ea typeface="Open Sans"/>
+                <a:cs typeface="Open Sans"/>
+              </a:rPr>
+              <a:t>•  Дополнительно прибинтуйте руку к туловищу, не сдавливая грудную клетку.</a:t>
+            </a:r>
+          </a:p>
+          <a:p>
+            <a:pPr algn="l">
+              <a:spcAft>
+                <a:spcPts val="800"/>
+              </a:spcAft>
+            </a:pPr>
+            <a:r>
+              <a:rPr sz="1300" b="0">
+                <a:solidFill>
+                  <a:srgbClr val="333333"/>
+                </a:solidFill>
+                <a:latin typeface="Open Sans"/>
+                <a:ea typeface="Open Sans"/>
+                <a:cs typeface="Open Sans"/>
+              </a:rPr>
+              <a:t>•  Оставьте пальцы доступными для контроля цвета, тепла и чувствительности.</a:t>
+            </a:r>
+          </a:p>
+        </p:txBody>
+      </p:sp>
+      <p:sp>
+        <p:nvSpPr>
+          <p:cNvPr id="10" name="Rounded Rectangle 9"/>
+          <p:cNvSpPr/>
+          <p:nvPr/>
+        </p:nvSpPr>
+        <p:spPr>
+          <a:xfrm>
+            <a:off x="6000000" y="5400000"/>
+            <a:ext cx="6200000" cy="1100000"/>
+          </a:xfrm>
+          <a:prstGeom prst="roundRect">
+            <a:avLst/>
+          </a:prstGeom>
+          <a:solidFill>
+            <a:srgbClr val="F5F0E1"/>
+          </a:solidFill>
+          <a:ln>
+            <a:noFill/>
+          </a:ln>
+        </p:spPr>
+        <p:style>
+          <a:lnRef idx="1">
+            <a:schemeClr val="accent1"/>
+          </a:lnRef>
+          <a:fillRef idx="3">
+            <a:schemeClr val="accent1"/>
+          </a:fillRef>
+          <a:effectRef idx="2">
+            <a:schemeClr val="accent1"/>
+          </a:effectRef>
+          <a:fontRef idx="minor">
+            <a:schemeClr val="lt1"/>
+          </a:fontRef>
+        </p:style>
+        <p:txBody>
+          <a:bodyPr rtlCol="0" anchor="ctr"/>
+          <a:lstStyle/>
+          <a:p>
+            <a:pPr algn="ctr"/>
+          </a:p>
+        </p:txBody>
+      </p:sp>
+      <p:sp>
+        <p:nvSpPr>
+          <p:cNvPr id="11" name="TextBox 10"/>
+          <p:cNvSpPr txBox="1"/>
+          <p:nvPr/>
+        </p:nvSpPr>
+        <p:spPr>
+          <a:xfrm>
+            <a:off x="6250000" y="5600000"/>
+            <a:ext cx="5700000" cy="700000"/>
+          </a:xfrm>
+          <a:prstGeom prst="rect">
+            <a:avLst/>
+          </a:prstGeom>
+          <a:noFill/>
+        </p:spPr>
+        <p:txBody>
+          <a:bodyPr wrap="square" anchor="ctr">
+            <a:spAutoFit/>
+          </a:bodyPr>
+          <a:lstStyle/>
+          <a:p>
+            <a:pPr algn="l"/>
+            <a:r>
+              <a:rPr sz="1200" b="0">
+                <a:solidFill>
+                  <a:srgbClr val="333333"/>
+                </a:solidFill>
+                <a:latin typeface="Open Sans"/>
+                <a:ea typeface="Open Sans"/>
+                <a:cs typeface="Open Sans"/>
+              </a:rPr>
+              <a:t>Не снимайте одежду с поврежденной руки силой: при необходимости ее разрезают вокруг раны.</a:t>
+            </a:r>
+          </a:p>
+        </p:txBody>
+      </p:sp>
+    </p:spTree>
+  </p:cSld>
+  <p:clrMapOvr>
+    <a:masterClrMapping/>
+  </p:clrMapOvr>
+</p:sld>
+</file>
+
+<file path=ppt/slides/slide15.xml><?xml version="1.0" encoding="utf-8"?>
+<p:sld xmlns:a="http://schemas.openxmlformats.org/drawingml/2006/main" xmlns:p="http://schemas.openxmlformats.org/presentationml/2006/main" xmlns:r="http://schemas.openxmlformats.org/officeDocument/2006/relationships">
+  <p:cSld>
+    <p:spTree>
+      <p:nvGrpSpPr>
+        <p:cNvPr id="1" name=""/>
+        <p:cNvGrpSpPr/>
+        <p:nvPr/>
+      </p:nvGrpSpPr>
+      <p:grpSpPr/>
+      <p:sp>
+        <p:nvSpPr>
+          <p:cNvPr id="2" name="Rectangle 1"/>
+          <p:cNvSpPr/>
+          <p:nvPr/>
+        </p:nvSpPr>
+        <p:spPr>
+          <a:xfrm>
+            <a:off x="0" y="0"/>
+            <a:ext cx="12191695" cy="6858000"/>
+          </a:xfrm>
+          <a:prstGeom prst="rect">
+            <a:avLst/>
+          </a:prstGeom>
+          <a:solidFill>
+            <a:srgbClr val="FFFFFF"/>
+          </a:solidFill>
+          <a:ln>
+            <a:noFill/>
+          </a:ln>
+        </p:spPr>
+        <p:style>
+          <a:lnRef idx="1">
+            <a:schemeClr val="accent1"/>
+          </a:lnRef>
+          <a:fillRef idx="3">
+            <a:schemeClr val="accent1"/>
+          </a:fillRef>
+          <a:effectRef idx="2">
+            <a:schemeClr val="accent1"/>
+          </a:effectRef>
+          <a:fontRef idx="minor">
+            <a:schemeClr val="lt1"/>
+          </a:fontRef>
+        </p:style>
+        <p:txBody>
+          <a:bodyPr rtlCol="0" anchor="ctr"/>
+          <a:lstStyle/>
+          <a:p>
+            <a:pPr algn="ctr"/>
+          </a:p>
+        </p:txBody>
+      </p:sp>
+      <p:sp>
+        <p:nvSpPr>
+          <p:cNvPr id="3" name="TextBox 2"/>
+          <p:cNvSpPr txBox="1"/>
+          <p:nvPr/>
+        </p:nvSpPr>
+        <p:spPr>
+          <a:xfrm>
+            <a:off x="700000" y="250000"/>
+            <a:ext cx="11200000" cy="550000"/>
+          </a:xfrm>
+          <a:prstGeom prst="rect">
+            <a:avLst/>
+          </a:prstGeom>
+          <a:noFill/>
+        </p:spPr>
+        <p:txBody>
+          <a:bodyPr wrap="square" anchor="t">
+            <a:spAutoFit/>
+          </a:bodyPr>
+          <a:lstStyle/>
+          <a:p>
+            <a:pPr algn="l"/>
+            <a:r>
+              <a:rPr sz="2200" b="1">
+                <a:solidFill>
+                  <a:srgbClr val="333333"/>
+                </a:solidFill>
+                <a:latin typeface="Open Sans"/>
+                <a:ea typeface="Open Sans"/>
+                <a:cs typeface="Open Sans"/>
+              </a:rPr>
+              <a:t>ПОЗВОНОЧНИК: ТВЕРДАЯ РОВНАЯ ПОВЕРХНОСТЬ</a:t>
+            </a:r>
+          </a:p>
+        </p:txBody>
+      </p:sp>
+      <p:sp>
+        <p:nvSpPr>
+          <p:cNvPr id="4" name="Rectangle 3"/>
+          <p:cNvSpPr/>
+          <p:nvPr/>
+        </p:nvSpPr>
+        <p:spPr>
+          <a:xfrm>
+            <a:off x="700000" y="850000"/>
+            <a:ext cx="9000000" cy="28000"/>
+          </a:xfrm>
+          <a:prstGeom prst="rect">
+            <a:avLst/>
+          </a:prstGeom>
+          <a:solidFill>
+            <a:srgbClr val="555555"/>
+          </a:solidFill>
+          <a:ln>
+            <a:noFill/>
+          </a:ln>
+        </p:spPr>
+        <p:style>
+          <a:lnRef idx="1">
+            <a:schemeClr val="accent1"/>
+          </a:lnRef>
+          <a:fillRef idx="3">
+            <a:schemeClr val="accent1"/>
+          </a:fillRef>
+          <a:effectRef idx="2">
+            <a:schemeClr val="accent1"/>
+          </a:effectRef>
+          <a:fontRef idx="minor">
+            <a:schemeClr val="lt1"/>
+          </a:fontRef>
+        </p:style>
+        <p:txBody>
+          <a:bodyPr rtlCol="0" anchor="ctr"/>
+          <a:lstStyle/>
+          <a:p>
+            <a:pPr algn="ctr"/>
+          </a:p>
+        </p:txBody>
+      </p:sp>
+      <p:sp>
+        <p:nvSpPr>
+          <p:cNvPr id="5" name="TextBox 4"/>
+          <p:cNvSpPr txBox="1"/>
+          <p:nvPr/>
+        </p:nvSpPr>
+        <p:spPr>
+          <a:xfrm>
+            <a:off x="700000" y="920000"/>
+            <a:ext cx="11000000" cy="350000"/>
+          </a:xfrm>
+          <a:prstGeom prst="rect">
+            <a:avLst/>
+          </a:prstGeom>
+          <a:noFill/>
+        </p:spPr>
+        <p:txBody>
+          <a:bodyPr wrap="square" anchor="t">
+            <a:spAutoFit/>
+          </a:bodyPr>
+          <a:lstStyle/>
+          <a:p>
+            <a:pPr algn="l"/>
+            <a:r>
+              <a:rPr sz="1200" b="0">
+                <a:solidFill>
+                  <a:srgbClr val="666666"/>
+                </a:solidFill>
+                <a:latin typeface="Open Sans"/>
+                <a:ea typeface="Open Sans"/>
+                <a:cs typeface="Open Sans"/>
+              </a:rPr>
+              <a:t>Оказание первой помощи при травмах, ранениях и поражениях, прочих состояниях</a:t>
+            </a:r>
+          </a:p>
+        </p:txBody>
+      </p:sp>
+      <p:sp>
+        <p:nvSpPr>
+          <p:cNvPr id="6" name="Rectangle 5"/>
+          <p:cNvSpPr/>
+          <p:nvPr/>
+        </p:nvSpPr>
+        <p:spPr>
+          <a:xfrm>
+            <a:off x="0" y="2800000"/>
+            <a:ext cx="420000" cy="420000"/>
+          </a:xfrm>
+          <a:prstGeom prst="rect">
+            <a:avLst/>
+          </a:prstGeom>
+          <a:solidFill>
+            <a:srgbClr val="555555"/>
+          </a:solidFill>
+          <a:ln>
+            <a:noFill/>
+          </a:ln>
+        </p:spPr>
+        <p:style>
+          <a:lnRef idx="1">
+            <a:schemeClr val="accent1"/>
+          </a:lnRef>
+          <a:fillRef idx="3">
+            <a:schemeClr val="accent1"/>
+          </a:fillRef>
+          <a:effectRef idx="2">
+            <a:schemeClr val="accent1"/>
+          </a:effectRef>
+          <a:fontRef idx="minor">
+            <a:schemeClr val="lt1"/>
+          </a:fontRef>
+        </p:style>
+        <p:txBody>
+          <a:bodyPr rtlCol="0" anchor="ctr"/>
+          <a:lstStyle/>
+          <a:p>
+            <a:pPr algn="ctr"/>
+          </a:p>
+        </p:txBody>
+      </p:sp>
+      <p:sp>
+        <p:nvSpPr>
+          <p:cNvPr id="7" name="TextBox 6"/>
+          <p:cNvSpPr txBox="1"/>
+          <p:nvPr/>
+        </p:nvSpPr>
+        <p:spPr>
+          <a:xfrm>
+            <a:off x="0" y="2800000"/>
+            <a:ext cx="420000" cy="420000"/>
+          </a:xfrm>
+          <a:prstGeom prst="rect">
+            <a:avLst/>
+          </a:prstGeom>
+          <a:noFill/>
+        </p:spPr>
+        <p:txBody>
+          <a:bodyPr wrap="square" anchor="ctr">
+            <a:spAutoFit/>
+          </a:bodyPr>
+          <a:lstStyle/>
+          <a:p>
+            <a:pPr algn="ctr"/>
+            <a:r>
+              <a:rPr sz="1400" b="1">
+                <a:solidFill>
+                  <a:srgbClr val="FFFFFF"/>
+                </a:solidFill>
+                <a:latin typeface="Open Sans"/>
+                <a:ea typeface="Open Sans"/>
+                <a:cs typeface="Open Sans"/>
+              </a:rPr>
+              <a:t>15</a:t>
+            </a:r>
+          </a:p>
+        </p:txBody>
+      </p:sp>
+      <p:pic>
+        <p:nvPicPr>
+          <p:cNvPr id="8" name="Picture 7" descr="fig73.jpeg"/>
+          <p:cNvPicPr>
+            <a:picLocks noChangeAspect="1"/>
+          </p:cNvPicPr>
+          <p:nvPr/>
+        </p:nvPicPr>
+        <p:blipFill>
+          <a:blip r:embed="rId2"/>
+          <a:stretch>
+            <a:fillRect/>
+          </a:stretch>
+        </p:blipFill>
+        <p:spPr>
+          <a:xfrm>
+            <a:off x="500000" y="1757468"/>
+            <a:ext cx="5200000" cy="3385064"/>
+          </a:xfrm>
+          <a:prstGeom prst="rect">
+            <a:avLst/>
+          </a:prstGeom>
+        </p:spPr>
+      </p:pic>
+      <p:sp>
+        <p:nvSpPr>
+          <p:cNvPr id="9" name="TextBox 8"/>
+          <p:cNvSpPr txBox="1"/>
+          <p:nvPr/>
+        </p:nvSpPr>
+        <p:spPr>
+          <a:xfrm>
+            <a:off x="6000000" y="1450000"/>
+            <a:ext cx="6200000" cy="3800000"/>
+          </a:xfrm>
+          <a:prstGeom prst="rect">
+            <a:avLst/>
+          </a:prstGeom>
+          <a:noFill/>
+        </p:spPr>
+        <p:txBody>
+          <a:bodyPr wrap="square">
+            <a:spAutoFit/>
+          </a:bodyPr>
+          <a:lstStyle/>
+          <a:p>
+            <a:pPr algn="l">
+              <a:spcAft>
+                <a:spcPts val="800"/>
+              </a:spcAft>
+            </a:pPr>
+            <a:r>
+              <a:rPr sz="1300" b="0">
+                <a:solidFill>
+                  <a:srgbClr val="333333"/>
+                </a:solidFill>
+                <a:latin typeface="Open Sans"/>
+                <a:ea typeface="Open Sans"/>
+                <a:cs typeface="Open Sans"/>
+              </a:rPr>
+              <a:t>•  Подозревайте травму после падения с высоты, удара, ныряния или дорожного происшествия.</a:t>
+            </a:r>
+          </a:p>
+          <a:p>
+            <a:pPr algn="l">
+              <a:spcAft>
+                <a:spcPts val="800"/>
+              </a:spcAft>
+            </a:pPr>
+            <a:r>
+              <a:rPr sz="1300" b="0">
+                <a:solidFill>
+                  <a:srgbClr val="333333"/>
+                </a:solidFill>
+                <a:latin typeface="Open Sans"/>
+                <a:ea typeface="Open Sans"/>
+                <a:cs typeface="Open Sans"/>
+              </a:rPr>
+              <a:t>•  Не сгибайте, не усаживайте и не скручивайте пострадавшего.</a:t>
+            </a:r>
+          </a:p>
+          <a:p>
+            <a:pPr algn="l">
+              <a:spcAft>
+                <a:spcPts val="800"/>
+              </a:spcAft>
+            </a:pPr>
+            <a:r>
+              <a:rPr sz="1300" b="0">
+                <a:solidFill>
+                  <a:srgbClr val="333333"/>
+                </a:solidFill>
+                <a:latin typeface="Open Sans"/>
+                <a:ea typeface="Open Sans"/>
+                <a:cs typeface="Open Sans"/>
+              </a:rPr>
+              <a:t>•  Если место безопасно и дыхание нормальное, оставьте его в найденном положении.</a:t>
+            </a:r>
+          </a:p>
+          <a:p>
+            <a:pPr algn="l">
+              <a:spcAft>
+                <a:spcPts val="800"/>
+              </a:spcAft>
+            </a:pPr>
+            <a:r>
+              <a:rPr sz="1300" b="0">
+                <a:solidFill>
+                  <a:srgbClr val="333333"/>
+                </a:solidFill>
+                <a:latin typeface="Open Sans"/>
+                <a:ea typeface="Open Sans"/>
+                <a:cs typeface="Open Sans"/>
+              </a:rPr>
+              <a:t>•  При необходимости переносите на жесткой ровной поверхности с фиксацией головы.</a:t>
+            </a:r>
+          </a:p>
+          <a:p>
+            <a:pPr algn="l">
+              <a:spcAft>
+                <a:spcPts val="800"/>
+              </a:spcAft>
+            </a:pPr>
+            <a:r>
+              <a:rPr sz="1300" b="0">
+                <a:solidFill>
+                  <a:srgbClr val="333333"/>
+                </a:solidFill>
+                <a:latin typeface="Open Sans"/>
+                <a:ea typeface="Open Sans"/>
+                <a:cs typeface="Open Sans"/>
+              </a:rPr>
+              <a:t>•  Один помощник постоянно удерживает голову и руководит согласованными движениями.</a:t>
+            </a:r>
+          </a:p>
+        </p:txBody>
+      </p:sp>
+      <p:sp>
+        <p:nvSpPr>
+          <p:cNvPr id="10" name="Rounded Rectangle 9"/>
+          <p:cNvSpPr/>
+          <p:nvPr/>
+        </p:nvSpPr>
+        <p:spPr>
+          <a:xfrm>
+            <a:off x="6000000" y="5400000"/>
+            <a:ext cx="6200000" cy="1100000"/>
+          </a:xfrm>
+          <a:prstGeom prst="roundRect">
+            <a:avLst/>
+          </a:prstGeom>
+          <a:solidFill>
+            <a:srgbClr val="F5F0E1"/>
+          </a:solidFill>
+          <a:ln>
+            <a:noFill/>
+          </a:ln>
+        </p:spPr>
+        <p:style>
+          <a:lnRef idx="1">
+            <a:schemeClr val="accent1"/>
+          </a:lnRef>
+          <a:fillRef idx="3">
+            <a:schemeClr val="accent1"/>
+          </a:fillRef>
+          <a:effectRef idx="2">
+            <a:schemeClr val="accent1"/>
+          </a:effectRef>
+          <a:fontRef idx="minor">
+            <a:schemeClr val="lt1"/>
+          </a:fontRef>
+        </p:style>
+        <p:txBody>
+          <a:bodyPr rtlCol="0" anchor="ctr"/>
+          <a:lstStyle/>
+          <a:p>
+            <a:pPr algn="ctr"/>
+          </a:p>
+        </p:txBody>
+      </p:sp>
+      <p:sp>
+        <p:nvSpPr>
+          <p:cNvPr id="11" name="TextBox 10"/>
+          <p:cNvSpPr txBox="1"/>
+          <p:nvPr/>
+        </p:nvSpPr>
+        <p:spPr>
+          <a:xfrm>
+            <a:off x="6250000" y="5600000"/>
+            <a:ext cx="5700000" cy="700000"/>
+          </a:xfrm>
+          <a:prstGeom prst="rect">
+            <a:avLst/>
+          </a:prstGeom>
+          <a:noFill/>
+        </p:spPr>
+        <p:txBody>
+          <a:bodyPr wrap="square" anchor="ctr">
+            <a:spAutoFit/>
+          </a:bodyPr>
+          <a:lstStyle/>
+          <a:p>
+            <a:pPr algn="l"/>
+            <a:r>
+              <a:rPr sz="1200" b="0">
+                <a:solidFill>
+                  <a:srgbClr val="333333"/>
+                </a:solidFill>
+                <a:latin typeface="Open Sans"/>
+                <a:ea typeface="Open Sans"/>
+                <a:cs typeface="Open Sans"/>
+              </a:rPr>
+              <a:t>Обеспечение проходимости дыхательных путей имеет приоритет перед сохранением неподвижности позвоночника.</a:t>
+            </a:r>
+          </a:p>
+        </p:txBody>
+      </p:sp>
+    </p:spTree>
+  </p:cSld>
+  <p:clrMapOvr>
+    <a:masterClrMapping/>
+  </p:clrMapOvr>
+</p:sld>
+</file>
+
+<file path=ppt/slides/slide16.xml><?xml version="1.0" encoding="utf-8"?>
+<p:sld xmlns:a="http://schemas.openxmlformats.org/drawingml/2006/main" xmlns:p="http://schemas.openxmlformats.org/presentationml/2006/main" xmlns:r="http://schemas.openxmlformats.org/officeDocument/2006/relationships">
+  <p:cSld>
+    <p:spTree>
+      <p:nvGrpSpPr>
+        <p:cNvPr id="1" name=""/>
+        <p:cNvGrpSpPr/>
+        <p:nvPr/>
+      </p:nvGrpSpPr>
+      <p:grpSpPr/>
+      <p:sp>
+        <p:nvSpPr>
+          <p:cNvPr id="2" name="Rectangle 1"/>
+          <p:cNvSpPr/>
+          <p:nvPr/>
+        </p:nvSpPr>
+        <p:spPr>
+          <a:xfrm>
+            <a:off x="0" y="0"/>
+            <a:ext cx="12191695" cy="6858000"/>
+          </a:xfrm>
+          <a:prstGeom prst="rect">
+            <a:avLst/>
+          </a:prstGeom>
+          <a:solidFill>
+            <a:srgbClr val="FFFFFF"/>
+          </a:solidFill>
+          <a:ln>
+            <a:noFill/>
+          </a:ln>
+        </p:spPr>
+        <p:style>
+          <a:lnRef idx="1">
+            <a:schemeClr val="accent1"/>
+          </a:lnRef>
+          <a:fillRef idx="3">
+            <a:schemeClr val="accent1"/>
+          </a:fillRef>
+          <a:effectRef idx="2">
+            <a:schemeClr val="accent1"/>
+          </a:effectRef>
+          <a:fontRef idx="minor">
+            <a:schemeClr val="lt1"/>
+          </a:fontRef>
+        </p:style>
+        <p:txBody>
+          <a:bodyPr rtlCol="0" anchor="ctr"/>
+          <a:lstStyle/>
+          <a:p>
+            <a:pPr algn="ctr"/>
+          </a:p>
+        </p:txBody>
+      </p:sp>
+      <p:sp>
+        <p:nvSpPr>
+          <p:cNvPr id="3" name="TextBox 2"/>
+          <p:cNvSpPr txBox="1"/>
+          <p:nvPr/>
+        </p:nvSpPr>
+        <p:spPr>
+          <a:xfrm>
+            <a:off x="700000" y="250000"/>
+            <a:ext cx="11200000" cy="550000"/>
+          </a:xfrm>
+          <a:prstGeom prst="rect">
+            <a:avLst/>
+          </a:prstGeom>
+          <a:noFill/>
+        </p:spPr>
+        <p:txBody>
+          <a:bodyPr wrap="square" anchor="t">
+            <a:spAutoFit/>
+          </a:bodyPr>
+          <a:lstStyle/>
+          <a:p>
+            <a:pPr algn="l"/>
+            <a:r>
+              <a:rPr sz="2200" b="1">
+                <a:solidFill>
+                  <a:srgbClr val="333333"/>
+                </a:solidFill>
+                <a:latin typeface="Open Sans"/>
+                <a:ea typeface="Open Sans"/>
+                <a:cs typeface="Open Sans"/>
+              </a:rPr>
+              <a:t>ПЕРЕМЕЩЕНИЕ ПРИ ТРАВМЕ ПОЗВОНОЧНИКА</a:t>
+            </a:r>
+          </a:p>
+        </p:txBody>
+      </p:sp>
+      <p:sp>
+        <p:nvSpPr>
+          <p:cNvPr id="4" name="Rectangle 3"/>
+          <p:cNvSpPr/>
+          <p:nvPr/>
+        </p:nvSpPr>
+        <p:spPr>
+          <a:xfrm>
+            <a:off x="700000" y="850000"/>
+            <a:ext cx="9000000" cy="28000"/>
+          </a:xfrm>
+          <a:prstGeom prst="rect">
+            <a:avLst/>
+          </a:prstGeom>
+          <a:solidFill>
+            <a:srgbClr val="555555"/>
+          </a:solidFill>
+          <a:ln>
+            <a:noFill/>
+          </a:ln>
+        </p:spPr>
+        <p:style>
+          <a:lnRef idx="1">
+            <a:schemeClr val="accent1"/>
+          </a:lnRef>
+          <a:fillRef idx="3">
+            <a:schemeClr val="accent1"/>
+          </a:fillRef>
+          <a:effectRef idx="2">
+            <a:schemeClr val="accent1"/>
+          </a:effectRef>
+          <a:fontRef idx="minor">
+            <a:schemeClr val="lt1"/>
+          </a:fontRef>
+        </p:style>
+        <p:txBody>
+          <a:bodyPr rtlCol="0" anchor="ctr"/>
+          <a:lstStyle/>
+          <a:p>
+            <a:pPr algn="ctr"/>
+          </a:p>
+        </p:txBody>
+      </p:sp>
+      <p:sp>
+        <p:nvSpPr>
+          <p:cNvPr id="5" name="TextBox 4"/>
+          <p:cNvSpPr txBox="1"/>
+          <p:nvPr/>
+        </p:nvSpPr>
+        <p:spPr>
+          <a:xfrm>
+            <a:off x="700000" y="920000"/>
+            <a:ext cx="11000000" cy="350000"/>
+          </a:xfrm>
+          <a:prstGeom prst="rect">
+            <a:avLst/>
+          </a:prstGeom>
+          <a:noFill/>
+        </p:spPr>
+        <p:txBody>
+          <a:bodyPr wrap="square" anchor="t">
+            <a:spAutoFit/>
+          </a:bodyPr>
+          <a:lstStyle/>
+          <a:p>
+            <a:pPr algn="l"/>
+            <a:r>
+              <a:rPr sz="1200" b="0">
+                <a:solidFill>
+                  <a:srgbClr val="666666"/>
+                </a:solidFill>
+                <a:latin typeface="Open Sans"/>
+                <a:ea typeface="Open Sans"/>
+                <a:cs typeface="Open Sans"/>
+              </a:rPr>
+              <a:t>Оказание первой помощи при травмах, ранениях и поражениях, прочих состояниях</a:t>
+            </a:r>
+          </a:p>
+        </p:txBody>
+      </p:sp>
+      <p:sp>
+        <p:nvSpPr>
+          <p:cNvPr id="6" name="Rectangle 5"/>
+          <p:cNvSpPr/>
+          <p:nvPr/>
+        </p:nvSpPr>
+        <p:spPr>
+          <a:xfrm>
+            <a:off x="0" y="2800000"/>
+            <a:ext cx="420000" cy="420000"/>
+          </a:xfrm>
+          <a:prstGeom prst="rect">
+            <a:avLst/>
+          </a:prstGeom>
+          <a:solidFill>
+            <a:srgbClr val="555555"/>
+          </a:solidFill>
+          <a:ln>
+            <a:noFill/>
+          </a:ln>
+        </p:spPr>
+        <p:style>
+          <a:lnRef idx="1">
+            <a:schemeClr val="accent1"/>
+          </a:lnRef>
+          <a:fillRef idx="3">
+            <a:schemeClr val="accent1"/>
+          </a:fillRef>
+          <a:effectRef idx="2">
+            <a:schemeClr val="accent1"/>
+          </a:effectRef>
+          <a:fontRef idx="minor">
+            <a:schemeClr val="lt1"/>
+          </a:fontRef>
+        </p:style>
+        <p:txBody>
+          <a:bodyPr rtlCol="0" anchor="ctr"/>
+          <a:lstStyle/>
+          <a:p>
+            <a:pPr algn="ctr"/>
+          </a:p>
+        </p:txBody>
+      </p:sp>
+      <p:sp>
+        <p:nvSpPr>
+          <p:cNvPr id="7" name="TextBox 6"/>
+          <p:cNvSpPr txBox="1"/>
+          <p:nvPr/>
+        </p:nvSpPr>
+        <p:spPr>
+          <a:xfrm>
+            <a:off x="0" y="2800000"/>
+            <a:ext cx="420000" cy="420000"/>
+          </a:xfrm>
+          <a:prstGeom prst="rect">
+            <a:avLst/>
+          </a:prstGeom>
+          <a:noFill/>
+        </p:spPr>
+        <p:txBody>
+          <a:bodyPr wrap="square" anchor="ctr">
+            <a:spAutoFit/>
+          </a:bodyPr>
+          <a:lstStyle/>
+          <a:p>
+            <a:pPr algn="ctr"/>
+            <a:r>
+              <a:rPr sz="1400" b="1">
+                <a:solidFill>
+                  <a:srgbClr val="FFFFFF"/>
+                </a:solidFill>
+                <a:latin typeface="Open Sans"/>
+                <a:ea typeface="Open Sans"/>
+                <a:cs typeface="Open Sans"/>
+              </a:rPr>
+              <a:t>16</a:t>
+            </a:r>
+          </a:p>
+        </p:txBody>
+      </p:sp>
+      <p:pic>
+        <p:nvPicPr>
+          <p:cNvPr id="8" name="Picture 7" descr="fig74.jpeg"/>
+          <p:cNvPicPr>
+            <a:picLocks noChangeAspect="1"/>
+          </p:cNvPicPr>
+          <p:nvPr/>
+        </p:nvPicPr>
+        <p:blipFill>
+          <a:blip r:embed="rId2"/>
+          <a:stretch>
+            <a:fillRect/>
+          </a:stretch>
+        </p:blipFill>
+        <p:spPr>
+          <a:xfrm>
+            <a:off x="684967" y="1450000"/>
+            <a:ext cx="4830065" cy="4000000"/>
+          </a:xfrm>
+          <a:prstGeom prst="rect">
+            <a:avLst/>
+          </a:prstGeom>
+        </p:spPr>
+      </p:pic>
+      <p:sp>
+        <p:nvSpPr>
+          <p:cNvPr id="9" name="TextBox 8"/>
+          <p:cNvSpPr txBox="1"/>
+          <p:nvPr/>
+        </p:nvSpPr>
+        <p:spPr>
+          <a:xfrm>
+            <a:off x="6000000" y="1450000"/>
+            <a:ext cx="6200000" cy="3800000"/>
+          </a:xfrm>
+          <a:prstGeom prst="rect">
+            <a:avLst/>
+          </a:prstGeom>
+          <a:noFill/>
+        </p:spPr>
+        <p:txBody>
+          <a:bodyPr wrap="square">
+            <a:spAutoFit/>
+          </a:bodyPr>
+          <a:lstStyle/>
+          <a:p>
+            <a:pPr algn="l">
+              <a:spcAft>
+                <a:spcPts val="800"/>
+              </a:spcAft>
+            </a:pPr>
+            <a:r>
+              <a:rPr sz="1300" b="0">
+                <a:solidFill>
+                  <a:srgbClr val="333333"/>
+                </a:solidFill>
+                <a:latin typeface="Open Sans"/>
+                <a:ea typeface="Open Sans"/>
+                <a:cs typeface="Open Sans"/>
+              </a:rPr>
+              <a:t>•  Для подъема и переноса привлекают несколько помощников.</a:t>
+            </a:r>
+          </a:p>
+          <a:p>
+            <a:pPr algn="l">
+              <a:spcAft>
+                <a:spcPts val="800"/>
+              </a:spcAft>
+            </a:pPr>
+            <a:r>
+              <a:rPr sz="1300" b="0">
+                <a:solidFill>
+                  <a:srgbClr val="333333"/>
+                </a:solidFill>
+                <a:latin typeface="Open Sans"/>
+                <a:ea typeface="Open Sans"/>
+                <a:cs typeface="Open Sans"/>
+              </a:rPr>
+              <a:t>•  Заранее распределите места у головы, плеч, таза и ног.</a:t>
+            </a:r>
+          </a:p>
+          <a:p>
+            <a:pPr algn="l">
+              <a:spcAft>
+                <a:spcPts val="800"/>
+              </a:spcAft>
+            </a:pPr>
+            <a:r>
+              <a:rPr sz="1300" b="0">
+                <a:solidFill>
+                  <a:srgbClr val="333333"/>
+                </a:solidFill>
+                <a:latin typeface="Open Sans"/>
+                <a:ea typeface="Open Sans"/>
+                <a:cs typeface="Open Sans"/>
+              </a:rPr>
+              <a:t>•  Помощник у головы фиксирует шею и подает единые команды.</a:t>
+            </a:r>
+          </a:p>
+          <a:p>
+            <a:pPr algn="l">
+              <a:spcAft>
+                <a:spcPts val="800"/>
+              </a:spcAft>
+            </a:pPr>
+            <a:r>
+              <a:rPr sz="1300" b="0">
+                <a:solidFill>
+                  <a:srgbClr val="333333"/>
+                </a:solidFill>
+                <a:latin typeface="Open Sans"/>
+                <a:ea typeface="Open Sans"/>
+                <a:cs typeface="Open Sans"/>
+              </a:rPr>
+              <a:t>•  Поднимайте и поворачивайте тело одновременно, сохраняя его по одной оси.</a:t>
+            </a:r>
+          </a:p>
+          <a:p>
+            <a:pPr algn="l">
+              <a:spcAft>
+                <a:spcPts val="800"/>
+              </a:spcAft>
+            </a:pPr>
+            <a:r>
+              <a:rPr sz="1300" b="0">
+                <a:solidFill>
+                  <a:srgbClr val="333333"/>
+                </a:solidFill>
+                <a:latin typeface="Open Sans"/>
+                <a:ea typeface="Open Sans"/>
+                <a:cs typeface="Open Sans"/>
+              </a:rPr>
+              <a:t>•  После укладки заполните пустоты мягким материалом и продолжайте контроль дыхания.</a:t>
+            </a:r>
+          </a:p>
+        </p:txBody>
+      </p:sp>
+      <p:sp>
+        <p:nvSpPr>
+          <p:cNvPr id="10" name="Rounded Rectangle 9"/>
+          <p:cNvSpPr/>
+          <p:nvPr/>
+        </p:nvSpPr>
+        <p:spPr>
+          <a:xfrm>
+            <a:off x="6000000" y="5400000"/>
+            <a:ext cx="6200000" cy="1100000"/>
+          </a:xfrm>
+          <a:prstGeom prst="roundRect">
+            <a:avLst/>
+          </a:prstGeom>
+          <a:solidFill>
+            <a:srgbClr val="F5F0E1"/>
+          </a:solidFill>
+          <a:ln>
+            <a:noFill/>
+          </a:ln>
+        </p:spPr>
+        <p:style>
+          <a:lnRef idx="1">
+            <a:schemeClr val="accent1"/>
+          </a:lnRef>
+          <a:fillRef idx="3">
+            <a:schemeClr val="accent1"/>
+          </a:fillRef>
+          <a:effectRef idx="2">
+            <a:schemeClr val="accent1"/>
+          </a:effectRef>
+          <a:fontRef idx="minor">
+            <a:schemeClr val="lt1"/>
+          </a:fontRef>
+        </p:style>
+        <p:txBody>
+          <a:bodyPr rtlCol="0" anchor="ctr"/>
+          <a:lstStyle/>
+          <a:p>
+            <a:pPr algn="ctr"/>
+          </a:p>
+        </p:txBody>
+      </p:sp>
+      <p:sp>
+        <p:nvSpPr>
+          <p:cNvPr id="11" name="TextBox 10"/>
+          <p:cNvSpPr txBox="1"/>
+          <p:nvPr/>
+        </p:nvSpPr>
+        <p:spPr>
+          <a:xfrm>
+            <a:off x="6250000" y="5600000"/>
+            <a:ext cx="5700000" cy="700000"/>
+          </a:xfrm>
+          <a:prstGeom prst="rect">
+            <a:avLst/>
+          </a:prstGeom>
+          <a:noFill/>
+        </p:spPr>
+        <p:txBody>
+          <a:bodyPr wrap="square" anchor="ctr">
+            <a:spAutoFit/>
+          </a:bodyPr>
+          <a:lstStyle/>
+          <a:p>
+            <a:pPr algn="l"/>
+            <a:r>
+              <a:rPr sz="1200" b="0">
+                <a:solidFill>
+                  <a:srgbClr val="333333"/>
+                </a:solidFill>
+                <a:latin typeface="Open Sans"/>
+                <a:ea typeface="Open Sans"/>
+                <a:cs typeface="Open Sans"/>
+              </a:rPr>
+              <a:t>Такое перемещение оправдано при непосредственной опасности или по указанию медицинских специалистов.</a:t>
+            </a:r>
+          </a:p>
+        </p:txBody>
+      </p:sp>
+    </p:spTree>
+  </p:cSld>
+  <p:clrMapOvr>
+    <a:masterClrMapping/>
+  </p:clrMapOvr>
+</p:sld>
+</file>
+
+<file path=ppt/slides/slide17.xml><?xml version="1.0" encoding="utf-8"?>
+<p:sld xmlns:a="http://schemas.openxmlformats.org/drawingml/2006/main" xmlns:p="http://schemas.openxmlformats.org/presentationml/2006/main" xmlns:r="http://schemas.openxmlformats.org/officeDocument/2006/relationships">
+  <p:cSld>
+    <p:spTree>
+      <p:nvGrpSpPr>
+        <p:cNvPr id="1" name=""/>
+        <p:cNvGrpSpPr/>
+        <p:nvPr/>
+      </p:nvGrpSpPr>
+      <p:grpSpPr/>
+      <p:sp>
+        <p:nvSpPr>
+          <p:cNvPr id="2" name="Rectangle 1"/>
+          <p:cNvSpPr/>
+          <p:nvPr/>
+        </p:nvSpPr>
+        <p:spPr>
+          <a:xfrm>
+            <a:off x="0" y="0"/>
+            <a:ext cx="12191695" cy="6858000"/>
+          </a:xfrm>
+          <a:prstGeom prst="rect">
+            <a:avLst/>
+          </a:prstGeom>
+          <a:solidFill>
+            <a:srgbClr val="FFFFFF"/>
+          </a:solidFill>
+          <a:ln>
+            <a:noFill/>
+          </a:ln>
+        </p:spPr>
+        <p:style>
+          <a:lnRef idx="1">
+            <a:schemeClr val="accent1"/>
+          </a:lnRef>
+          <a:fillRef idx="3">
+            <a:schemeClr val="accent1"/>
+          </a:fillRef>
+          <a:effectRef idx="2">
+            <a:schemeClr val="accent1"/>
+          </a:effectRef>
+          <a:fontRef idx="minor">
+            <a:schemeClr val="lt1"/>
+          </a:fontRef>
+        </p:style>
+        <p:txBody>
+          <a:bodyPr rtlCol="0" anchor="ctr"/>
+          <a:lstStyle/>
+          <a:p>
+            <a:pPr algn="ctr"/>
+          </a:p>
+        </p:txBody>
+      </p:sp>
+      <p:sp>
+        <p:nvSpPr>
+          <p:cNvPr id="3" name="TextBox 2"/>
+          <p:cNvSpPr txBox="1"/>
+          <p:nvPr/>
+        </p:nvSpPr>
+        <p:spPr>
+          <a:xfrm>
+            <a:off x="700000" y="250000"/>
+            <a:ext cx="11200000" cy="550000"/>
+          </a:xfrm>
+          <a:prstGeom prst="rect">
+            <a:avLst/>
+          </a:prstGeom>
+          <a:noFill/>
+        </p:spPr>
+        <p:txBody>
+          <a:bodyPr wrap="square" anchor="t">
+            <a:spAutoFit/>
+          </a:bodyPr>
+          <a:lstStyle/>
+          <a:p>
+            <a:pPr algn="l"/>
+            <a:r>
+              <a:rPr sz="2200" b="1">
+                <a:solidFill>
+                  <a:srgbClr val="333333"/>
+                </a:solidFill>
+                <a:latin typeface="Open Sans"/>
+                <a:ea typeface="Open Sans"/>
+                <a:cs typeface="Open Sans"/>
+              </a:rPr>
+              <a:t>ГЛАВНОЕ ЗАПОМНИТЬ</a:t>
+            </a:r>
+          </a:p>
+        </p:txBody>
+      </p:sp>
+      <p:sp>
+        <p:nvSpPr>
+          <p:cNvPr id="4" name="Rectangle 3"/>
+          <p:cNvSpPr/>
+          <p:nvPr/>
+        </p:nvSpPr>
+        <p:spPr>
+          <a:xfrm>
+            <a:off x="700000" y="850000"/>
+            <a:ext cx="9000000" cy="28000"/>
+          </a:xfrm>
+          <a:prstGeom prst="rect">
+            <a:avLst/>
+          </a:prstGeom>
+          <a:solidFill>
+            <a:srgbClr val="555555"/>
+          </a:solidFill>
+          <a:ln>
+            <a:noFill/>
+          </a:ln>
+        </p:spPr>
+        <p:style>
+          <a:lnRef idx="1">
+            <a:schemeClr val="accent1"/>
+          </a:lnRef>
+          <a:fillRef idx="3">
+            <a:schemeClr val="accent1"/>
+          </a:fillRef>
+          <a:effectRef idx="2">
+            <a:schemeClr val="accent1"/>
+          </a:effectRef>
+          <a:fontRef idx="minor">
+            <a:schemeClr val="lt1"/>
+          </a:fontRef>
+        </p:style>
+        <p:txBody>
+          <a:bodyPr rtlCol="0" anchor="ctr"/>
+          <a:lstStyle/>
+          <a:p>
+            <a:pPr algn="ctr"/>
+          </a:p>
+        </p:txBody>
+      </p:sp>
+      <p:sp>
+        <p:nvSpPr>
+          <p:cNvPr id="5" name="TextBox 4"/>
+          <p:cNvSpPr txBox="1"/>
+          <p:nvPr/>
+        </p:nvSpPr>
+        <p:spPr>
+          <a:xfrm>
+            <a:off x="700000" y="920000"/>
+            <a:ext cx="11000000" cy="350000"/>
+          </a:xfrm>
+          <a:prstGeom prst="rect">
+            <a:avLst/>
+          </a:prstGeom>
+          <a:noFill/>
+        </p:spPr>
+        <p:txBody>
+          <a:bodyPr wrap="square" anchor="t">
+            <a:spAutoFit/>
+          </a:bodyPr>
+          <a:lstStyle/>
+          <a:p>
+            <a:pPr algn="l"/>
+            <a:r>
+              <a:rPr sz="1200" b="0">
+                <a:solidFill>
+                  <a:srgbClr val="666666"/>
+                </a:solidFill>
+                <a:latin typeface="Open Sans"/>
+                <a:ea typeface="Open Sans"/>
+                <a:cs typeface="Open Sans"/>
+              </a:rPr>
+              <a:t>Оказание первой помощи при травмах, ранениях и поражениях, прочих состояниях</a:t>
+            </a:r>
+          </a:p>
+        </p:txBody>
+      </p:sp>
+      <p:sp>
+        <p:nvSpPr>
+          <p:cNvPr id="6" name="Rectangle 5"/>
+          <p:cNvSpPr/>
+          <p:nvPr/>
+        </p:nvSpPr>
+        <p:spPr>
+          <a:xfrm>
+            <a:off x="0" y="2800000"/>
+            <a:ext cx="420000" cy="420000"/>
+          </a:xfrm>
+          <a:prstGeom prst="rect">
+            <a:avLst/>
+          </a:prstGeom>
+          <a:solidFill>
+            <a:srgbClr val="555555"/>
+          </a:solidFill>
+          <a:ln>
+            <a:noFill/>
+          </a:ln>
+        </p:spPr>
+        <p:style>
+          <a:lnRef idx="1">
+            <a:schemeClr val="accent1"/>
+          </a:lnRef>
+          <a:fillRef idx="3">
+            <a:schemeClr val="accent1"/>
+          </a:fillRef>
+          <a:effectRef idx="2">
+            <a:schemeClr val="accent1"/>
+          </a:effectRef>
+          <a:fontRef idx="minor">
+            <a:schemeClr val="lt1"/>
+          </a:fontRef>
+        </p:style>
+        <p:txBody>
+          <a:bodyPr rtlCol="0" anchor="ctr"/>
+          <a:lstStyle/>
+          <a:p>
+            <a:pPr algn="ctr"/>
+          </a:p>
+        </p:txBody>
+      </p:sp>
+      <p:sp>
+        <p:nvSpPr>
+          <p:cNvPr id="7" name="TextBox 6"/>
+          <p:cNvSpPr txBox="1"/>
+          <p:nvPr/>
+        </p:nvSpPr>
+        <p:spPr>
+          <a:xfrm>
+            <a:off x="0" y="2800000"/>
+            <a:ext cx="420000" cy="420000"/>
+          </a:xfrm>
+          <a:prstGeom prst="rect">
+            <a:avLst/>
+          </a:prstGeom>
+          <a:noFill/>
+        </p:spPr>
+        <p:txBody>
+          <a:bodyPr wrap="square" anchor="ctr">
+            <a:spAutoFit/>
+          </a:bodyPr>
+          <a:lstStyle/>
+          <a:p>
+            <a:pPr algn="ctr"/>
+            <a:r>
+              <a:rPr sz="1400" b="1">
+                <a:solidFill>
+                  <a:srgbClr val="FFFFFF"/>
+                </a:solidFill>
+                <a:latin typeface="Open Sans"/>
+                <a:ea typeface="Open Sans"/>
+                <a:cs typeface="Open Sans"/>
+              </a:rPr>
+              <a:t>17</a:t>
+            </a:r>
+          </a:p>
+        </p:txBody>
+      </p:sp>
+      <p:sp>
+        <p:nvSpPr>
+          <p:cNvPr id="8" name="Rectangle 7"/>
+          <p:cNvSpPr/>
+          <p:nvPr/>
+        </p:nvSpPr>
+        <p:spPr>
+          <a:xfrm>
+            <a:off x="700000" y="1450000"/>
+            <a:ext cx="11000000" cy="850000"/>
+          </a:xfrm>
+          <a:prstGeom prst="rect">
+            <a:avLst/>
+          </a:prstGeom>
+          <a:solidFill>
+            <a:srgbClr val="FFFFFF"/>
+          </a:solidFill>
+          <a:ln w="12700">
+            <a:solidFill>
+              <a:srgbClr val="999999"/>
+            </a:solidFill>
+          </a:ln>
+        </p:spPr>
+        <p:style>
+          <a:lnRef idx="1">
+            <a:schemeClr val="accent1"/>
+          </a:lnRef>
+          <a:fillRef idx="3">
+            <a:schemeClr val="accent1"/>
+          </a:fillRef>
+          <a:effectRef idx="2">
+            <a:schemeClr val="accent1"/>
+          </a:effectRef>
+          <a:fontRef idx="minor">
+            <a:schemeClr val="lt1"/>
+          </a:fontRef>
+        </p:style>
+        <p:txBody>
+          <a:bodyPr rtlCol="0" anchor="ctr"/>
+          <a:lstStyle/>
+          <a:p>
+            <a:pPr algn="ctr"/>
+          </a:p>
+        </p:txBody>
+      </p:sp>
+      <p:sp>
+        <p:nvSpPr>
+          <p:cNvPr id="9" name="Rectangle 8"/>
+          <p:cNvSpPr/>
+          <p:nvPr/>
+        </p:nvSpPr>
+        <p:spPr>
+          <a:xfrm>
+            <a:off x="700000" y="1450000"/>
+            <a:ext cx="90000" cy="850000"/>
+          </a:xfrm>
+          <a:prstGeom prst="rect">
+            <a:avLst/>
+          </a:prstGeom>
+          <a:solidFill>
+            <a:srgbClr val="CC0000"/>
+          </a:solidFill>
+          <a:ln>
+            <a:noFill/>
+          </a:ln>
+        </p:spPr>
+        <p:style>
+          <a:lnRef idx="1">
+            <a:schemeClr val="accent1"/>
+          </a:lnRef>
+          <a:fillRef idx="3">
+            <a:schemeClr val="accent1"/>
+          </a:fillRef>
+          <a:effectRef idx="2">
+            <a:schemeClr val="accent1"/>
+          </a:effectRef>
+          <a:fontRef idx="minor">
+            <a:schemeClr val="lt1"/>
+          </a:fontRef>
+        </p:style>
+        <p:txBody>
+          <a:bodyPr rtlCol="0" anchor="ctr"/>
+          <a:lstStyle/>
+          <a:p>
+            <a:pPr algn="ctr"/>
+          </a:p>
+        </p:txBody>
+      </p:sp>
+      <p:sp>
+        <p:nvSpPr>
+          <p:cNvPr id="10" name="TextBox 9"/>
+          <p:cNvSpPr txBox="1"/>
+          <p:nvPr/>
+        </p:nvSpPr>
+        <p:spPr>
+          <a:xfrm>
+            <a:off x="1000000" y="1530000"/>
+            <a:ext cx="10400000" cy="690000"/>
+          </a:xfrm>
+          <a:prstGeom prst="rect">
+            <a:avLst/>
+          </a:prstGeom>
+          <a:noFill/>
+        </p:spPr>
+        <p:txBody>
+          <a:bodyPr wrap="square" anchor="ctr">
+            <a:spAutoFit/>
+          </a:bodyPr>
+          <a:lstStyle/>
+          <a:p>
+            <a:pPr algn="l"/>
+            <a:r>
+              <a:rPr sz="1300" b="0">
+                <a:solidFill>
+                  <a:srgbClr val="333333"/>
+                </a:solidFill>
+                <a:latin typeface="Open Sans"/>
+                <a:ea typeface="Open Sans"/>
+                <a:cs typeface="Open Sans"/>
+              </a:rPr>
+              <a:t>Сначала устраните угрозу жизни и остановите кровотечение</a:t>
+            </a:r>
+          </a:p>
+        </p:txBody>
+      </p:sp>
+      <p:sp>
+        <p:nvSpPr>
+          <p:cNvPr id="11" name="Rectangle 10"/>
+          <p:cNvSpPr/>
+          <p:nvPr/>
+        </p:nvSpPr>
+        <p:spPr>
+          <a:xfrm>
+            <a:off x="700000" y="2380000"/>
+            <a:ext cx="11000000" cy="850000"/>
+          </a:xfrm>
+          <a:prstGeom prst="rect">
+            <a:avLst/>
+          </a:prstGeom>
+          <a:solidFill>
+            <a:srgbClr val="FFFFFF"/>
+          </a:solidFill>
+          <a:ln w="12700">
+            <a:solidFill>
+              <a:srgbClr val="999999"/>
+            </a:solidFill>
+          </a:ln>
+        </p:spPr>
+        <p:style>
+          <a:lnRef idx="1">
+            <a:schemeClr val="accent1"/>
+          </a:lnRef>
+          <a:fillRef idx="3">
+            <a:schemeClr val="accent1"/>
+          </a:fillRef>
+          <a:effectRef idx="2">
+            <a:schemeClr val="accent1"/>
+          </a:effectRef>
+          <a:fontRef idx="minor">
+            <a:schemeClr val="lt1"/>
+          </a:fontRef>
+        </p:style>
+        <p:txBody>
+          <a:bodyPr rtlCol="0" anchor="ctr"/>
+          <a:lstStyle/>
+          <a:p>
+            <a:pPr algn="ctr"/>
+          </a:p>
+        </p:txBody>
+      </p:sp>
+      <p:sp>
+        <p:nvSpPr>
+          <p:cNvPr id="12" name="Rectangle 11"/>
+          <p:cNvSpPr/>
+          <p:nvPr/>
+        </p:nvSpPr>
+        <p:spPr>
+          <a:xfrm>
+            <a:off x="700000" y="2380000"/>
+            <a:ext cx="90000" cy="850000"/>
+          </a:xfrm>
+          <a:prstGeom prst="rect">
+            <a:avLst/>
+          </a:prstGeom>
+          <a:solidFill>
+            <a:srgbClr val="CC0000"/>
+          </a:solidFill>
+          <a:ln>
+            <a:noFill/>
+          </a:ln>
+        </p:spPr>
+        <p:style>
+          <a:lnRef idx="1">
+            <a:schemeClr val="accent1"/>
+          </a:lnRef>
+          <a:fillRef idx="3">
+            <a:schemeClr val="accent1"/>
+          </a:fillRef>
+          <a:effectRef idx="2">
+            <a:schemeClr val="accent1"/>
+          </a:effectRef>
+          <a:fontRef idx="minor">
+            <a:schemeClr val="lt1"/>
+          </a:fontRef>
+        </p:style>
+        <p:txBody>
+          <a:bodyPr rtlCol="0" anchor="ctr"/>
+          <a:lstStyle/>
+          <a:p>
+            <a:pPr algn="ctr"/>
+          </a:p>
+        </p:txBody>
+      </p:sp>
+      <p:sp>
+        <p:nvSpPr>
+          <p:cNvPr id="13" name="TextBox 12"/>
+          <p:cNvSpPr txBox="1"/>
+          <p:nvPr/>
+        </p:nvSpPr>
+        <p:spPr>
+          <a:xfrm>
+            <a:off x="1000000" y="2460000"/>
+            <a:ext cx="10400000" cy="690000"/>
+          </a:xfrm>
+          <a:prstGeom prst="rect">
+            <a:avLst/>
+          </a:prstGeom>
+          <a:noFill/>
+        </p:spPr>
+        <p:txBody>
+          <a:bodyPr wrap="square" anchor="ctr">
+            <a:spAutoFit/>
+          </a:bodyPr>
+          <a:lstStyle/>
+          <a:p>
+            <a:pPr algn="l"/>
+            <a:r>
+              <a:rPr sz="1300" b="0">
+                <a:solidFill>
+                  <a:srgbClr val="333333"/>
+                </a:solidFill>
+                <a:latin typeface="Open Sans"/>
+                <a:ea typeface="Open Sans"/>
+                <a:cs typeface="Open Sans"/>
+              </a:rPr>
+              <a:t>Голову и шею удерживайте в найденном положении</a:t>
+            </a:r>
+          </a:p>
+        </p:txBody>
+      </p:sp>
+      <p:sp>
+        <p:nvSpPr>
+          <p:cNvPr id="14" name="Rectangle 13"/>
+          <p:cNvSpPr/>
+          <p:nvPr/>
+        </p:nvSpPr>
+        <p:spPr>
+          <a:xfrm>
+            <a:off x="700000" y="3310000"/>
+            <a:ext cx="11000000" cy="850000"/>
+          </a:xfrm>
+          <a:prstGeom prst="rect">
+            <a:avLst/>
+          </a:prstGeom>
+          <a:solidFill>
+            <a:srgbClr val="FFFFFF"/>
+          </a:solidFill>
+          <a:ln w="12700">
+            <a:solidFill>
+              <a:srgbClr val="999999"/>
+            </a:solidFill>
+          </a:ln>
+        </p:spPr>
+        <p:style>
+          <a:lnRef idx="1">
+            <a:schemeClr val="accent1"/>
+          </a:lnRef>
+          <a:fillRef idx="3">
+            <a:schemeClr val="accent1"/>
+          </a:fillRef>
+          <a:effectRef idx="2">
+            <a:schemeClr val="accent1"/>
+          </a:effectRef>
+          <a:fontRef idx="minor">
+            <a:schemeClr val="lt1"/>
+          </a:fontRef>
+        </p:style>
+        <p:txBody>
+          <a:bodyPr rtlCol="0" anchor="ctr"/>
+          <a:lstStyle/>
+          <a:p>
+            <a:pPr algn="ctr"/>
+          </a:p>
+        </p:txBody>
+      </p:sp>
+      <p:sp>
+        <p:nvSpPr>
+          <p:cNvPr id="15" name="Rectangle 14"/>
+          <p:cNvSpPr/>
+          <p:nvPr/>
+        </p:nvSpPr>
+        <p:spPr>
+          <a:xfrm>
+            <a:off x="700000" y="3310000"/>
+            <a:ext cx="90000" cy="850000"/>
+          </a:xfrm>
+          <a:prstGeom prst="rect">
+            <a:avLst/>
+          </a:prstGeom>
+          <a:solidFill>
+            <a:srgbClr val="CC0000"/>
+          </a:solidFill>
+          <a:ln>
+            <a:noFill/>
+          </a:ln>
+        </p:spPr>
+        <p:style>
+          <a:lnRef idx="1">
+            <a:schemeClr val="accent1"/>
+          </a:lnRef>
+          <a:fillRef idx="3">
+            <a:schemeClr val="accent1"/>
+          </a:fillRef>
+          <a:effectRef idx="2">
+            <a:schemeClr val="accent1"/>
+          </a:effectRef>
+          <a:fontRef idx="minor">
+            <a:schemeClr val="lt1"/>
+          </a:fontRef>
+        </p:style>
+        <p:txBody>
+          <a:bodyPr rtlCol="0" anchor="ctr"/>
+          <a:lstStyle/>
+          <a:p>
+            <a:pPr algn="ctr"/>
+          </a:p>
+        </p:txBody>
+      </p:sp>
+      <p:sp>
+        <p:nvSpPr>
+          <p:cNvPr id="16" name="TextBox 15"/>
+          <p:cNvSpPr txBox="1"/>
+          <p:nvPr/>
+        </p:nvSpPr>
+        <p:spPr>
+          <a:xfrm>
+            <a:off x="1000000" y="3390000"/>
+            <a:ext cx="10400000" cy="690000"/>
+          </a:xfrm>
+          <a:prstGeom prst="rect">
+            <a:avLst/>
+          </a:prstGeom>
+          <a:noFill/>
+        </p:spPr>
+        <p:txBody>
+          <a:bodyPr wrap="square" anchor="ctr">
+            <a:spAutoFit/>
+          </a:bodyPr>
+          <a:lstStyle/>
+          <a:p>
+            <a:pPr algn="l"/>
+            <a:r>
+              <a:rPr sz="1300" b="0">
+                <a:solidFill>
+                  <a:srgbClr val="333333"/>
+                </a:solidFill>
+                <a:latin typeface="Open Sans"/>
+                <a:ea typeface="Open Sans"/>
+                <a:cs typeface="Open Sans"/>
+              </a:rPr>
+              <a:t>Инородные тела и выпавшие органы не извлекайте и не вправляйте</a:t>
+            </a:r>
+          </a:p>
+        </p:txBody>
+      </p:sp>
+      <p:sp>
+        <p:nvSpPr>
+          <p:cNvPr id="17" name="Rectangle 16"/>
+          <p:cNvSpPr/>
+          <p:nvPr/>
+        </p:nvSpPr>
+        <p:spPr>
+          <a:xfrm>
+            <a:off x="700000" y="4240000"/>
+            <a:ext cx="11000000" cy="850000"/>
+          </a:xfrm>
+          <a:prstGeom prst="rect">
+            <a:avLst/>
+          </a:prstGeom>
+          <a:solidFill>
+            <a:srgbClr val="FFFFFF"/>
+          </a:solidFill>
+          <a:ln w="12700">
+            <a:solidFill>
+              <a:srgbClr val="999999"/>
+            </a:solidFill>
+          </a:ln>
+        </p:spPr>
+        <p:style>
+          <a:lnRef idx="1">
+            <a:schemeClr val="accent1"/>
+          </a:lnRef>
+          <a:fillRef idx="3">
+            <a:schemeClr val="accent1"/>
+          </a:fillRef>
+          <a:effectRef idx="2">
+            <a:schemeClr val="accent1"/>
+          </a:effectRef>
+          <a:fontRef idx="minor">
+            <a:schemeClr val="lt1"/>
+          </a:fontRef>
+        </p:style>
+        <p:txBody>
+          <a:bodyPr rtlCol="0" anchor="ctr"/>
+          <a:lstStyle/>
+          <a:p>
+            <a:pPr algn="ctr"/>
+          </a:p>
+        </p:txBody>
+      </p:sp>
+      <p:sp>
+        <p:nvSpPr>
+          <p:cNvPr id="18" name="Rectangle 17"/>
+          <p:cNvSpPr/>
+          <p:nvPr/>
+        </p:nvSpPr>
+        <p:spPr>
+          <a:xfrm>
+            <a:off x="700000" y="4240000"/>
+            <a:ext cx="90000" cy="850000"/>
+          </a:xfrm>
+          <a:prstGeom prst="rect">
+            <a:avLst/>
+          </a:prstGeom>
+          <a:solidFill>
+            <a:srgbClr val="CC0000"/>
+          </a:solidFill>
+          <a:ln>
+            <a:noFill/>
+          </a:ln>
+        </p:spPr>
+        <p:style>
+          <a:lnRef idx="1">
+            <a:schemeClr val="accent1"/>
+          </a:lnRef>
+          <a:fillRef idx="3">
+            <a:schemeClr val="accent1"/>
+          </a:fillRef>
+          <a:effectRef idx="2">
+            <a:schemeClr val="accent1"/>
+          </a:effectRef>
+          <a:fontRef idx="minor">
+            <a:schemeClr val="lt1"/>
+          </a:fontRef>
+        </p:style>
+        <p:txBody>
+          <a:bodyPr rtlCol="0" anchor="ctr"/>
+          <a:lstStyle/>
+          <a:p>
+            <a:pPr algn="ctr"/>
+          </a:p>
+        </p:txBody>
+      </p:sp>
+      <p:sp>
+        <p:nvSpPr>
+          <p:cNvPr id="19" name="TextBox 18"/>
+          <p:cNvSpPr txBox="1"/>
+          <p:nvPr/>
+        </p:nvSpPr>
+        <p:spPr>
+          <a:xfrm>
+            <a:off x="1000000" y="4320000"/>
+            <a:ext cx="10400000" cy="690000"/>
+          </a:xfrm>
+          <a:prstGeom prst="rect">
+            <a:avLst/>
+          </a:prstGeom>
+          <a:noFill/>
+        </p:spPr>
+        <p:txBody>
+          <a:bodyPr wrap="square" anchor="ctr">
+            <a:spAutoFit/>
+          </a:bodyPr>
+          <a:lstStyle/>
+          <a:p>
+            <a:pPr algn="l"/>
+            <a:r>
+              <a:rPr sz="1300" b="0">
+                <a:solidFill>
+                  <a:srgbClr val="333333"/>
+                </a:solidFill>
+                <a:latin typeface="Open Sans"/>
+                <a:ea typeface="Open Sans"/>
+                <a:cs typeface="Open Sans"/>
+              </a:rPr>
+              <a:t>Переломы обездвиживайте после остановки кровотечения</a:t>
+            </a:r>
+          </a:p>
+        </p:txBody>
+      </p:sp>
+      <p:sp>
+        <p:nvSpPr>
+          <p:cNvPr id="20" name="Rectangle 19"/>
+          <p:cNvSpPr/>
+          <p:nvPr/>
+        </p:nvSpPr>
+        <p:spPr>
+          <a:xfrm>
+            <a:off x="700000" y="5170000"/>
+            <a:ext cx="11000000" cy="850000"/>
+          </a:xfrm>
+          <a:prstGeom prst="rect">
+            <a:avLst/>
+          </a:prstGeom>
+          <a:solidFill>
+            <a:srgbClr val="FFFFFF"/>
+          </a:solidFill>
+          <a:ln w="12700">
+            <a:solidFill>
+              <a:srgbClr val="999999"/>
+            </a:solidFill>
+          </a:ln>
+        </p:spPr>
+        <p:style>
+          <a:lnRef idx="1">
+            <a:schemeClr val="accent1"/>
+          </a:lnRef>
+          <a:fillRef idx="3">
+            <a:schemeClr val="accent1"/>
+          </a:fillRef>
+          <a:effectRef idx="2">
+            <a:schemeClr val="accent1"/>
+          </a:effectRef>
+          <a:fontRef idx="minor">
+            <a:schemeClr val="lt1"/>
+          </a:fontRef>
+        </p:style>
+        <p:txBody>
+          <a:bodyPr rtlCol="0" anchor="ctr"/>
+          <a:lstStyle/>
+          <a:p>
+            <a:pPr algn="ctr"/>
+          </a:p>
+        </p:txBody>
+      </p:sp>
+      <p:sp>
+        <p:nvSpPr>
+          <p:cNvPr id="21" name="Rectangle 20"/>
+          <p:cNvSpPr/>
+          <p:nvPr/>
+        </p:nvSpPr>
+        <p:spPr>
+          <a:xfrm>
+            <a:off x="700000" y="5170000"/>
+            <a:ext cx="90000" cy="850000"/>
+          </a:xfrm>
+          <a:prstGeom prst="rect">
+            <a:avLst/>
+          </a:prstGeom>
+          <a:solidFill>
+            <a:srgbClr val="CC0000"/>
+          </a:solidFill>
+          <a:ln>
+            <a:noFill/>
+          </a:ln>
+        </p:spPr>
+        <p:style>
+          <a:lnRef idx="1">
+            <a:schemeClr val="accent1"/>
+          </a:lnRef>
+          <a:fillRef idx="3">
+            <a:schemeClr val="accent1"/>
+          </a:fillRef>
+          <a:effectRef idx="2">
+            <a:schemeClr val="accent1"/>
+          </a:effectRef>
+          <a:fontRef idx="minor">
+            <a:schemeClr val="lt1"/>
+          </a:fontRef>
+        </p:style>
+        <p:txBody>
+          <a:bodyPr rtlCol="0" anchor="ctr"/>
+          <a:lstStyle/>
+          <a:p>
+            <a:pPr algn="ctr"/>
+          </a:p>
+        </p:txBody>
+      </p:sp>
+      <p:sp>
+        <p:nvSpPr>
+          <p:cNvPr id="22" name="TextBox 21"/>
+          <p:cNvSpPr txBox="1"/>
+          <p:nvPr/>
+        </p:nvSpPr>
+        <p:spPr>
+          <a:xfrm>
+            <a:off x="1000000" y="5250000"/>
+            <a:ext cx="10400000" cy="690000"/>
+          </a:xfrm>
+          <a:prstGeom prst="rect">
+            <a:avLst/>
+          </a:prstGeom>
+          <a:noFill/>
+        </p:spPr>
+        <p:txBody>
+          <a:bodyPr wrap="square" anchor="ctr">
+            <a:spAutoFit/>
+          </a:bodyPr>
+          <a:lstStyle/>
+          <a:p>
+            <a:pPr algn="l"/>
+            <a:r>
+              <a:rPr sz="1300" b="0">
+                <a:solidFill>
+                  <a:srgbClr val="333333"/>
+                </a:solidFill>
+                <a:latin typeface="Open Sans"/>
+                <a:ea typeface="Open Sans"/>
+                <a:cs typeface="Open Sans"/>
+              </a:rPr>
+              <a:t>Позвоночник перемещают согласованно несколько человек</a:t>
+            </a:r>
+          </a:p>
+        </p:txBody>
+      </p:sp>
+    </p:spTree>
+  </p:cSld>
+  <p:clrMapOvr>
+    <a:masterClrMapping/>
+  </p:clrMapOvr>
+</p:sld>
+</file>
+
+<file path=ppt/slides/slide18.xml><?xml version="1.0" encoding="utf-8"?>
+<p:sld xmlns:a="http://schemas.openxmlformats.org/drawingml/2006/main" xmlns:p="http://schemas.openxmlformats.org/presentationml/2006/main" xmlns:r="http://schemas.openxmlformats.org/officeDocument/2006/relationships">
+  <p:cSld>
+    <p:spTree>
+      <p:nvGrpSpPr>
+        <p:cNvPr id="1" name=""/>
+        <p:cNvGrpSpPr/>
+        <p:nvPr/>
+      </p:nvGrpSpPr>
+      <p:grpSpPr/>
+      <p:sp>
+        <p:nvSpPr>
+          <p:cNvPr id="2" name="Rectangle 1"/>
+          <p:cNvSpPr/>
+          <p:nvPr/>
+        </p:nvSpPr>
+        <p:spPr>
+          <a:xfrm>
+            <a:off x="0" y="0"/>
+            <a:ext cx="12191695" cy="6858000"/>
+          </a:xfrm>
+          <a:prstGeom prst="rect">
+            <a:avLst/>
+          </a:prstGeom>
+          <a:solidFill>
+            <a:srgbClr val="FFFFFF"/>
+          </a:solidFill>
+          <a:ln>
+            <a:noFill/>
+          </a:ln>
+        </p:spPr>
+        <p:style>
+          <a:lnRef idx="1">
+            <a:schemeClr val="accent1"/>
+          </a:lnRef>
+          <a:fillRef idx="3">
+            <a:schemeClr val="accent1"/>
+          </a:fillRef>
+          <a:effectRef idx="2">
+            <a:schemeClr val="accent1"/>
+          </a:effectRef>
+          <a:fontRef idx="minor">
+            <a:schemeClr val="lt1"/>
+          </a:fontRef>
+        </p:style>
+        <p:txBody>
+          <a:bodyPr rtlCol="0" anchor="ctr"/>
+          <a:lstStyle/>
+          <a:p>
+            <a:pPr algn="ctr"/>
+          </a:p>
+        </p:txBody>
+      </p:sp>
+      <p:sp>
+        <p:nvSpPr>
+          <p:cNvPr id="3" name="TextBox 2"/>
+          <p:cNvSpPr txBox="1"/>
+          <p:nvPr/>
+        </p:nvSpPr>
+        <p:spPr>
+          <a:xfrm>
+            <a:off x="700000" y="250000"/>
+            <a:ext cx="11200000" cy="550000"/>
+          </a:xfrm>
+          <a:prstGeom prst="rect">
+            <a:avLst/>
+          </a:prstGeom>
+          <a:noFill/>
+        </p:spPr>
+        <p:txBody>
+          <a:bodyPr wrap="square" anchor="t">
+            <a:spAutoFit/>
+          </a:bodyPr>
+          <a:lstStyle/>
+          <a:p>
+            <a:pPr algn="l"/>
+            <a:r>
+              <a:rPr sz="2200" b="1">
+                <a:solidFill>
+                  <a:srgbClr val="333333"/>
+                </a:solidFill>
+                <a:latin typeface="Open Sans"/>
+                <a:ea typeface="Open Sans"/>
+                <a:cs typeface="Open Sans"/>
+              </a:rPr>
+              <a:t>ПАМЯТКА</a:t>
+            </a:r>
+          </a:p>
+        </p:txBody>
+      </p:sp>
+      <p:sp>
+        <p:nvSpPr>
+          <p:cNvPr id="4" name="Rectangle 3"/>
+          <p:cNvSpPr/>
+          <p:nvPr/>
+        </p:nvSpPr>
+        <p:spPr>
+          <a:xfrm>
+            <a:off x="700000" y="850000"/>
+            <a:ext cx="9000000" cy="28000"/>
+          </a:xfrm>
+          <a:prstGeom prst="rect">
+            <a:avLst/>
+          </a:prstGeom>
+          <a:solidFill>
+            <a:srgbClr val="555555"/>
+          </a:solidFill>
+          <a:ln>
+            <a:noFill/>
+          </a:ln>
+        </p:spPr>
+        <p:style>
+          <a:lnRef idx="1">
+            <a:schemeClr val="accent1"/>
+          </a:lnRef>
+          <a:fillRef idx="3">
+            <a:schemeClr val="accent1"/>
+          </a:fillRef>
+          <a:effectRef idx="2">
+            <a:schemeClr val="accent1"/>
+          </a:effectRef>
+          <a:fontRef idx="minor">
+            <a:schemeClr val="lt1"/>
+          </a:fontRef>
+        </p:style>
+        <p:txBody>
+          <a:bodyPr rtlCol="0" anchor="ctr"/>
+          <a:lstStyle/>
+          <a:p>
+            <a:pPr algn="ctr"/>
+          </a:p>
+        </p:txBody>
+      </p:sp>
+      <p:sp>
+        <p:nvSpPr>
+          <p:cNvPr id="5" name="TextBox 4"/>
+          <p:cNvSpPr txBox="1"/>
+          <p:nvPr/>
+        </p:nvSpPr>
+        <p:spPr>
+          <a:xfrm>
+            <a:off x="700000" y="920000"/>
+            <a:ext cx="11000000" cy="350000"/>
+          </a:xfrm>
+          <a:prstGeom prst="rect">
+            <a:avLst/>
+          </a:prstGeom>
+          <a:noFill/>
+        </p:spPr>
+        <p:txBody>
+          <a:bodyPr wrap="square" anchor="t">
+            <a:spAutoFit/>
+          </a:bodyPr>
+          <a:lstStyle/>
+          <a:p>
+            <a:pPr algn="l"/>
+            <a:r>
+              <a:rPr sz="1200" b="0">
+                <a:solidFill>
+                  <a:srgbClr val="666666"/>
+                </a:solidFill>
+                <a:latin typeface="Open Sans"/>
+                <a:ea typeface="Open Sans"/>
+                <a:cs typeface="Open Sans"/>
+              </a:rPr>
+              <a:t>Оказание первой помощи при травмах, ранениях и поражениях, прочих состояниях</a:t>
+            </a:r>
+          </a:p>
+        </p:txBody>
+      </p:sp>
+      <p:sp>
+        <p:nvSpPr>
+          <p:cNvPr id="6" name="Rectangle 5"/>
+          <p:cNvSpPr/>
+          <p:nvPr/>
+        </p:nvSpPr>
+        <p:spPr>
+          <a:xfrm>
+            <a:off x="0" y="2800000"/>
+            <a:ext cx="420000" cy="420000"/>
+          </a:xfrm>
+          <a:prstGeom prst="rect">
+            <a:avLst/>
+          </a:prstGeom>
+          <a:solidFill>
+            <a:srgbClr val="555555"/>
+          </a:solidFill>
+          <a:ln>
+            <a:noFill/>
+          </a:ln>
+        </p:spPr>
+        <p:style>
+          <a:lnRef idx="1">
+            <a:schemeClr val="accent1"/>
+          </a:lnRef>
+          <a:fillRef idx="3">
+            <a:schemeClr val="accent1"/>
+          </a:fillRef>
+          <a:effectRef idx="2">
+            <a:schemeClr val="accent1"/>
+          </a:effectRef>
+          <a:fontRef idx="minor">
+            <a:schemeClr val="lt1"/>
+          </a:fontRef>
+        </p:style>
+        <p:txBody>
+          <a:bodyPr rtlCol="0" anchor="ctr"/>
+          <a:lstStyle/>
+          <a:p>
+            <a:pPr algn="ctr"/>
+          </a:p>
+        </p:txBody>
+      </p:sp>
+      <p:sp>
+        <p:nvSpPr>
+          <p:cNvPr id="7" name="TextBox 6"/>
+          <p:cNvSpPr txBox="1"/>
+          <p:nvPr/>
+        </p:nvSpPr>
+        <p:spPr>
+          <a:xfrm>
+            <a:off x="0" y="2800000"/>
+            <a:ext cx="420000" cy="420000"/>
+          </a:xfrm>
+          <a:prstGeom prst="rect">
+            <a:avLst/>
+          </a:prstGeom>
+          <a:noFill/>
+        </p:spPr>
+        <p:txBody>
+          <a:bodyPr wrap="square" anchor="ctr">
+            <a:spAutoFit/>
+          </a:bodyPr>
+          <a:lstStyle/>
+          <a:p>
+            <a:pPr algn="ctr"/>
+            <a:r>
+              <a:rPr sz="1400" b="1">
+                <a:solidFill>
+                  <a:srgbClr val="FFFFFF"/>
+                </a:solidFill>
+                <a:latin typeface="Open Sans"/>
+                <a:ea typeface="Open Sans"/>
+                <a:cs typeface="Open Sans"/>
+              </a:rPr>
+              <a:t>18</a:t>
+            </a:r>
+          </a:p>
+        </p:txBody>
+      </p:sp>
+      <p:pic>
+        <p:nvPicPr>
+          <p:cNvPr id="8" name="Picture 7" descr="pamyatka-tema4-travmy-oblastey-16x9.png"/>
+          <p:cNvPicPr>
+            <a:picLocks noChangeAspect="1"/>
+          </p:cNvPicPr>
+          <p:nvPr/>
+        </p:nvPicPr>
+        <p:blipFill>
+          <a:blip r:embed="rId2"/>
+          <a:stretch>
+            <a:fillRect/>
+          </a:stretch>
+        </p:blipFill>
+        <p:spPr>
+          <a:xfrm>
+            <a:off x="2300000" y="1400000"/>
+            <a:ext cx="7800000" cy="5200000"/>
+          </a:xfrm>
+          <a:prstGeom prst="rect">
+            <a:avLst/>
+          </a:prstGeom>
+        </p:spPr>
+      </p:pic>
+    </p:spTree>
+  </p:cSld>
+  <p:clrMapOvr>
+    <a:masterClrMapping/>
+  </p:clrMapOvr>
+</p:sld>
+</file>
+
+<file path=ppt/slides/slide19.xml><?xml version="1.0" encoding="utf-8"?>
+<p:sld xmlns:a="http://schemas.openxmlformats.org/drawingml/2006/main" xmlns:p="http://schemas.openxmlformats.org/presentationml/2006/main" xmlns:r="http://schemas.openxmlformats.org/officeDocument/2006/relationships">
+  <p:cSld>
+    <p:spTree>
+      <p:nvGrpSpPr>
+        <p:cNvPr id="1" name=""/>
+        <p:cNvGrpSpPr/>
+        <p:nvPr/>
+      </p:nvGrpSpPr>
+      <p:grpSpPr/>
+      <p:sp>
+        <p:nvSpPr>
+          <p:cNvPr id="2" name="Rectangle 1"/>
+          <p:cNvSpPr/>
+          <p:nvPr/>
+        </p:nvSpPr>
+        <p:spPr>
+          <a:xfrm>
+            <a:off x="0" y="0"/>
             <a:ext cx="3400000" cy="6858000"/>
           </a:xfrm>
           <a:prstGeom prst="rect">
@@ -4226,7 +9324,7 @@
                 <a:ea typeface="Open Sans"/>
                 <a:cs typeface="Open Sans"/>
               </a:rPr>
-              <a:t>Голова и глаза</a:t>
+              <a:t>Голова, глаза и шея</a:t>
             </a:r>
           </a:p>
         </p:txBody>
@@ -4388,7 +9486,7 @@
                 <a:ea typeface="Open Sans"/>
                 <a:cs typeface="Open Sans"/>
               </a:rPr>
-              <a:t>Шея и позвоночник</a:t>
+              <a:t>Грудная клетка</a:t>
             </a:r>
           </a:p>
         </p:txBody>
@@ -4550,7 +9648,7 @@
                 <a:ea typeface="Open Sans"/>
                 <a:cs typeface="Open Sans"/>
               </a:rPr>
-              <a:t>Грудь</a:t>
+              <a:t>Живот и таз</a:t>
             </a:r>
           </a:p>
         </p:txBody>
@@ -4712,7 +9810,7 @@
                 <a:ea typeface="Open Sans"/>
                 <a:cs typeface="Open Sans"/>
               </a:rPr>
-              <a:t>Живот и таз</a:t>
+              <a:t>Конечности</a:t>
             </a:r>
           </a:p>
         </p:txBody>
@@ -4874,7 +9972,7 @@
                 <a:ea typeface="Open Sans"/>
                 <a:cs typeface="Open Sans"/>
               </a:rPr>
-              <a:t>Конечности</a:t>
+              <a:t>Позвоночник</a:t>
             </a:r>
           </a:p>
         </p:txBody>
@@ -4972,7 +10070,7 @@
                 <a:ea typeface="Open Sans"/>
                 <a:cs typeface="Open Sans"/>
               </a:rPr>
-              <a:t>ГЛАВНЫЙ ПРИНЦИП</a:t>
+              <a:t>ТРАВМА ГОЛОВЫ И ЧЕРЕПНО-МОЗГОВАЯ ТРАВМА</a:t>
             </a:r>
           </a:p>
         </p:txBody>
@@ -5137,16 +10235,40 @@
           </a:p>
         </p:txBody>
       </p:sp>
-      <p:sp>
-        <p:nvSpPr>
-          <p:cNvPr id="8" name="TextBox 7"/>
+      <p:pic>
+        <p:nvPicPr>
+          <p:cNvPr id="8" name="Picture 7" descr="fig62.jpeg"/>
+          <p:cNvPicPr>
+            <a:picLocks noChangeAspect="1"/>
+          </p:cNvPicPr>
+          <p:nvPr/>
+        </p:nvPicPr>
+        <p:blipFill>
+          <a:blip r:embed="rId2"/>
+          <a:stretch>
+            <a:fillRect/>
+          </a:stretch>
+        </p:blipFill>
+        <p:spPr>
+          <a:xfrm>
+            <a:off x="1280479" y="1450000"/>
+            <a:ext cx="3639042" cy="4000000"/>
+          </a:xfrm>
+          <a:prstGeom prst="rect">
+            <a:avLst/>
+          </a:prstGeom>
+        </p:spPr>
+      </p:pic>
+      <p:sp>
+        <p:nvSpPr>
+          <p:cNvPr id="9" name="TextBox 8"/>
           <p:cNvSpPr txBox="1"/>
           <p:nvPr/>
         </p:nvSpPr>
         <p:spPr>
           <a:xfrm>
-            <a:off x="700000" y="1600000"/>
-            <a:ext cx="11000000" cy="4200000"/>
+            <a:off x="6000000" y="1450000"/>
+            <a:ext cx="6200000" cy="3800000"/>
           </a:xfrm>
           <a:prstGeom prst="rect">
             <a:avLst/>
@@ -5154,14 +10276,170 @@
           <a:noFill/>
         </p:spPr>
         <p:txBody>
-          <a:bodyPr wrap="square" anchor="t">
+          <a:bodyPr wrap="square">
             <a:spAutoFit/>
           </a:bodyPr>
           <a:lstStyle/>
           <a:p>
+            <a:pPr algn="l">
+              <a:spcAft>
+                <a:spcPts val="800"/>
+              </a:spcAft>
+            </a:pPr>
+            <a:r>
+              <a:rPr sz="1300" b="0">
+                <a:solidFill>
+                  <a:srgbClr val="333333"/>
+                </a:solidFill>
+                <a:latin typeface="Open Sans"/>
+                <a:ea typeface="Open Sans"/>
+                <a:cs typeface="Open Sans"/>
+              </a:rPr>
+              <a:t>•  Подозревайте черепно-мозговую травму после удара, падения или резкого ускорения.</a:t>
+            </a:r>
+          </a:p>
+          <a:p>
+            <a:pPr algn="l">
+              <a:spcAft>
+                <a:spcPts val="800"/>
+              </a:spcAft>
+            </a:pPr>
+            <a:r>
+              <a:rPr sz="1300" b="0">
+                <a:solidFill>
+                  <a:srgbClr val="333333"/>
+                </a:solidFill>
+                <a:latin typeface="Open Sans"/>
+                <a:ea typeface="Open Sans"/>
+                <a:cs typeface="Open Sans"/>
+              </a:rPr>
+              <a:t>•  Признаки: потеря сознания, спутанность, нарушение памяти, головная боль, тошнота или рвота.</a:t>
+            </a:r>
+          </a:p>
+          <a:p>
+            <a:pPr algn="l">
+              <a:spcAft>
+                <a:spcPts val="800"/>
+              </a:spcAft>
+            </a:pPr>
+            <a:r>
+              <a:rPr sz="1300" b="0">
+                <a:solidFill>
+                  <a:srgbClr val="333333"/>
+                </a:solidFill>
+                <a:latin typeface="Open Sans"/>
+                <a:ea typeface="Open Sans"/>
+                <a:cs typeface="Open Sans"/>
+              </a:rPr>
+              <a:t>•  Возможны судороги, неравные зрачки, кровь или прозрачная жидкость из носа и ушей.</a:t>
+            </a:r>
+          </a:p>
+          <a:p>
+            <a:pPr algn="l">
+              <a:spcAft>
+                <a:spcPts val="800"/>
+              </a:spcAft>
+            </a:pPr>
+            <a:r>
+              <a:rPr sz="1300" b="0">
+                <a:solidFill>
+                  <a:srgbClr val="333333"/>
+                </a:solidFill>
+                <a:latin typeface="Open Sans"/>
+                <a:ea typeface="Open Sans"/>
+                <a:cs typeface="Open Sans"/>
+              </a:rPr>
+              <a:t>•  Остановите наружное кровотечение, не оказывая давления на возможный перелом черепа.</a:t>
+            </a:r>
+          </a:p>
+          <a:p>
+            <a:pPr algn="l">
+              <a:spcAft>
+                <a:spcPts val="800"/>
+              </a:spcAft>
+            </a:pPr>
+            <a:r>
+              <a:rPr sz="1300" b="0">
+                <a:solidFill>
+                  <a:srgbClr val="333333"/>
+                </a:solidFill>
+                <a:latin typeface="Open Sans"/>
+                <a:ea typeface="Open Sans"/>
+                <a:cs typeface="Open Sans"/>
+              </a:rPr>
+              <a:t>•  Наложите повязку, обеспечьте покой и непрерывно контролируйте сознание и дыхание.</a:t>
+            </a:r>
+          </a:p>
+        </p:txBody>
+      </p:sp>
+      <p:sp>
+        <p:nvSpPr>
+          <p:cNvPr id="10" name="Rounded Rectangle 9"/>
+          <p:cNvSpPr/>
+          <p:nvPr/>
+        </p:nvSpPr>
+        <p:spPr>
+          <a:xfrm>
+            <a:off x="6000000" y="5400000"/>
+            <a:ext cx="6200000" cy="1100000"/>
+          </a:xfrm>
+          <a:prstGeom prst="roundRect">
+            <a:avLst/>
+          </a:prstGeom>
+          <a:solidFill>
+            <a:srgbClr val="F5F0E1"/>
+          </a:solidFill>
+          <a:ln>
+            <a:noFill/>
+          </a:ln>
+        </p:spPr>
+        <p:style>
+          <a:lnRef idx="1">
+            <a:schemeClr val="accent1"/>
+          </a:lnRef>
+          <a:fillRef idx="3">
+            <a:schemeClr val="accent1"/>
+          </a:fillRef>
+          <a:effectRef idx="2">
+            <a:schemeClr val="accent1"/>
+          </a:effectRef>
+          <a:fontRef idx="minor">
+            <a:schemeClr val="lt1"/>
+          </a:fontRef>
+        </p:style>
+        <p:txBody>
+          <a:bodyPr rtlCol="0" anchor="ctr"/>
+          <a:lstStyle/>
+          <a:p>
+            <a:pPr algn="ctr"/>
+          </a:p>
+        </p:txBody>
+      </p:sp>
+      <p:sp>
+        <p:nvSpPr>
+          <p:cNvPr id="11" name="TextBox 10"/>
+          <p:cNvSpPr txBox="1"/>
+          <p:nvPr/>
+        </p:nvSpPr>
+        <p:spPr>
+          <a:xfrm>
+            <a:off x="6250000" y="5600000"/>
+            <a:ext cx="5700000" cy="700000"/>
+          </a:xfrm>
+          <a:prstGeom prst="rect">
+            <a:avLst/>
+          </a:prstGeom>
+          <a:noFill/>
+        </p:spPr>
+        <p:txBody>
+          <a:bodyPr wrap="square" anchor="ctr">
+            <a:spAutoFit/>
+          </a:bodyPr>
+          <a:lstStyle/>
+          <a:p>
             <a:pPr algn="l"/>
             <a:r>
-              <a:rPr sz="1600" b="0">
+              <a:rPr sz="1200" b="0">
                 <a:solidFill>
                   <a:srgbClr val="333333"/>
                 </a:solidFill>
@@ -5169,7 +10447,7 @@
                 <a:ea typeface="Open Sans"/>
                 <a:cs typeface="Open Sans"/>
               </a:rPr>
-              <a:t>При травме сначала устраняют угрозу жизни: проверяют дыхание и останавливают сильное кровотечение. Затем защищают рану и предупреждают лишние движения.</a:t>
+              <a:t>При ухудшении сознания и сохраненном дыхании обеспечьте проходимость дыхательных путей с минимальным движением шеи.</a:t>
             </a:r>
           </a:p>
         </p:txBody>
@@ -5267,7 +10545,7 @@
                 <a:ea typeface="Open Sans"/>
                 <a:cs typeface="Open Sans"/>
               </a:rPr>
-              <a:t>ТРАВМЫ ГОЛОВЫ И ГЛАЗ</a:t>
+              <a:t>ПОВРЕЖДЕНИЕ ГЛАЗА</a:t>
             </a:r>
           </a:p>
         </p:txBody>
@@ -5441,81 +10719,7 @@
         <p:spPr>
           <a:xfrm>
             <a:off x="700000" y="1450000"/>
-            <a:ext cx="5400000" cy="400000"/>
-          </a:xfrm>
-          <a:prstGeom prst="rect">
-            <a:avLst/>
-          </a:prstGeom>
-          <a:noFill/>
-        </p:spPr>
-        <p:txBody>
-          <a:bodyPr wrap="square" anchor="t">
-            <a:spAutoFit/>
-          </a:bodyPr>
-          <a:lstStyle/>
-          <a:p>
-            <a:pPr algn="l"/>
-            <a:r>
-              <a:rPr sz="1400" b="1">
-                <a:solidFill>
-                  <a:srgbClr val="333333"/>
-                </a:solidFill>
-                <a:latin typeface="Open Sans"/>
-                <a:ea typeface="Open Sans"/>
-                <a:cs typeface="Open Sans"/>
-              </a:rPr>
-              <a:t>Голова</a:t>
-            </a:r>
-          </a:p>
-        </p:txBody>
-      </p:sp>
-      <p:sp>
-        <p:nvSpPr>
-          <p:cNvPr id="9" name="TextBox 8"/>
-          <p:cNvSpPr txBox="1"/>
-          <p:nvPr/>
-        </p:nvSpPr>
-        <p:spPr>
-          <a:xfrm>
-            <a:off x="6600000" y="1450000"/>
-            <a:ext cx="5400000" cy="400000"/>
-          </a:xfrm>
-          <a:prstGeom prst="rect">
-            <a:avLst/>
-          </a:prstGeom>
-          <a:noFill/>
-        </p:spPr>
-        <p:txBody>
-          <a:bodyPr wrap="square" anchor="t">
-            <a:spAutoFit/>
-          </a:bodyPr>
-          <a:lstStyle/>
-          <a:p>
-            <a:pPr algn="l"/>
-            <a:r>
-              <a:rPr sz="1400" b="1">
-                <a:solidFill>
-                  <a:srgbClr val="333333"/>
-                </a:solidFill>
-                <a:latin typeface="Open Sans"/>
-                <a:ea typeface="Open Sans"/>
-                <a:cs typeface="Open Sans"/>
-              </a:rPr>
-              <a:t>Глаза</a:t>
-            </a:r>
-          </a:p>
-        </p:txBody>
-      </p:sp>
-      <p:sp>
-        <p:nvSpPr>
-          <p:cNvPr id="10" name="TextBox 9"/>
-          <p:cNvSpPr txBox="1"/>
-          <p:nvPr/>
-        </p:nvSpPr>
-        <p:spPr>
-          <a:xfrm>
-            <a:off x="700000" y="1950000"/>
-            <a:ext cx="5400000" cy="4000000"/>
+            <a:ext cx="11000000" cy="4000000"/>
           </a:xfrm>
           <a:prstGeom prst="rect">
             <a:avLst/>
@@ -5534,15 +10738,15 @@
               </a:spcAft>
             </a:pPr>
             <a:r>
-              <a:rPr sz="1300" b="0">
-                <a:solidFill>
-                  <a:srgbClr val="333333"/>
-                </a:solidFill>
-                <a:latin typeface="Open Sans"/>
-                <a:ea typeface="Open Sans"/>
-                <a:cs typeface="Open Sans"/>
-              </a:rPr>
-              <a:t>•  подозревайте черепно-мозговую травму при потере сознания, тошноте, рвоте или спутанности</a:t>
+              <a:rPr sz="1400" b="1">
+                <a:solidFill>
+                  <a:srgbClr val="CC0000"/>
+                </a:solidFill>
+                <a:latin typeface="Open Sans"/>
+                <a:ea typeface="Open Sans"/>
+                <a:cs typeface="Open Sans"/>
+              </a:rPr>
+              <a:t>•  Не надавливайте на глаз и не пытайтесь исследовать глубокую рану.</a:t>
             </a:r>
           </a:p>
           <a:p>
@@ -5552,15 +10756,15 @@
               </a:spcAft>
             </a:pPr>
             <a:r>
-              <a:rPr sz="1300" b="0">
-                <a:solidFill>
-                  <a:srgbClr val="333333"/>
-                </a:solidFill>
-                <a:latin typeface="Open Sans"/>
-                <a:ea typeface="Open Sans"/>
-                <a:cs typeface="Open Sans"/>
-              </a:rPr>
-              <a:t>•  остановите кровотечение</a:t>
+              <a:rPr sz="1400" b="1">
+                <a:solidFill>
+                  <a:srgbClr val="CC0000"/>
+                </a:solidFill>
+                <a:latin typeface="Open Sans"/>
+                <a:ea typeface="Open Sans"/>
+                <a:cs typeface="Open Sans"/>
+              </a:rPr>
+              <a:t>•  Не извлекайте внедрившийся предмет; зафиксируйте его без давления.</a:t>
             </a:r>
           </a:p>
           <a:p>
@@ -5570,7 +10774,7 @@
               </a:spcAft>
             </a:pPr>
             <a:r>
-              <a:rPr sz="1300" b="0">
+              <a:rPr sz="1400" b="0">
                 <a:solidFill>
                   <a:srgbClr val="333333"/>
                 </a:solidFill>
@@ -5578,7 +10782,7 @@
                 <a:ea typeface="Open Sans"/>
                 <a:cs typeface="Open Sans"/>
               </a:rPr>
-              <a:t>•  при возможном повреждении черепа наложите круговую повязку без давления на повреждение</a:t>
+              <a:t>•  При химическом веществе немедленно и длительно промывайте глаз водой.</a:t>
             </a:r>
           </a:p>
           <a:p>
@@ -5588,40 +10792,17 @@
               </a:spcAft>
             </a:pPr>
             <a:r>
-              <a:rPr sz="1300" b="0">
-                <a:solidFill>
-                  <a:srgbClr val="333333"/>
-                </a:solidFill>
-                <a:latin typeface="Open Sans"/>
-                <a:ea typeface="Open Sans"/>
-                <a:cs typeface="Open Sans"/>
-              </a:rPr>
-              <a:t>•  контролируйте сознание и дыхание</a:t>
-            </a:r>
-          </a:p>
-        </p:txBody>
-      </p:sp>
-      <p:sp>
-        <p:nvSpPr>
-          <p:cNvPr id="11" name="TextBox 10"/>
-          <p:cNvSpPr txBox="1"/>
-          <p:nvPr/>
-        </p:nvSpPr>
-        <p:spPr>
-          <a:xfrm>
-            <a:off x="6600000" y="1950000"/>
-            <a:ext cx="5400000" cy="4000000"/>
-          </a:xfrm>
-          <a:prstGeom prst="rect">
-            <a:avLst/>
-          </a:prstGeom>
-          <a:noFill/>
-        </p:spPr>
-        <p:txBody>
-          <a:bodyPr wrap="square">
-            <a:spAutoFit/>
-          </a:bodyPr>
-          <a:lstStyle/>
+              <a:rPr sz="1400" b="1">
+                <a:solidFill>
+                  <a:srgbClr val="CC0000"/>
+                </a:solidFill>
+                <a:latin typeface="Open Sans"/>
+                <a:ea typeface="Open Sans"/>
+                <a:cs typeface="Open Sans"/>
+              </a:rPr>
+              <a:t>•  При механической травме наложите свободную повязку одновременно на оба глаза.</a:t>
+            </a:r>
+          </a:p>
           <a:p>
             <a:pPr algn="l">
               <a:spcAft>
@@ -5629,7 +10810,7 @@
               </a:spcAft>
             </a:pPr>
             <a:r>
-              <a:rPr sz="1300" b="0">
+              <a:rPr sz="1400" b="0">
                 <a:solidFill>
                   <a:srgbClr val="333333"/>
                 </a:solidFill>
@@ -5637,17 +10818,79 @@
                 <a:ea typeface="Open Sans"/>
                 <a:cs typeface="Open Sans"/>
               </a:rPr>
-              <a:t>•  не давите на глаз</a:t>
-            </a:r>
-          </a:p>
-          <a:p>
-            <a:pPr algn="l">
-              <a:spcAft>
-                <a:spcPts val="800"/>
-              </a:spcAft>
-            </a:pPr>
-            <a:r>
-              <a:rPr sz="1300" b="0">
+              <a:t>•  Объясните пострадавшему, что двигаться следует только с сопровождением.</a:t>
+            </a:r>
+          </a:p>
+        </p:txBody>
+      </p:sp>
+      <p:sp>
+        <p:nvSpPr>
+          <p:cNvPr id="9" name="Rounded Rectangle 8"/>
+          <p:cNvSpPr/>
+          <p:nvPr/>
+        </p:nvSpPr>
+        <p:spPr>
+          <a:xfrm>
+            <a:off x="700000" y="5600000"/>
+            <a:ext cx="11000000" cy="1000000"/>
+          </a:xfrm>
+          <a:prstGeom prst="roundRect">
+            <a:avLst/>
+          </a:prstGeom>
+          <a:solidFill>
+            <a:srgbClr val="F5F0E1"/>
+          </a:solidFill>
+          <a:ln>
+            <a:noFill/>
+          </a:ln>
+        </p:spPr>
+        <p:style>
+          <a:lnRef idx="1">
+            <a:schemeClr val="accent1"/>
+          </a:lnRef>
+          <a:fillRef idx="3">
+            <a:schemeClr val="accent1"/>
+          </a:fillRef>
+          <a:effectRef idx="2">
+            <a:schemeClr val="accent1"/>
+          </a:effectRef>
+          <a:fontRef idx="minor">
+            <a:schemeClr val="lt1"/>
+          </a:fontRef>
+        </p:style>
+        <p:txBody>
+          <a:bodyPr rtlCol="0" anchor="ctr"/>
+          <a:lstStyle/>
+          <a:p>
+            <a:pPr algn="ctr"/>
+          </a:p>
+        </p:txBody>
+      </p:sp>
+      <p:sp>
+        <p:nvSpPr>
+          <p:cNvPr id="10" name="TextBox 9"/>
+          <p:cNvSpPr txBox="1"/>
+          <p:nvPr/>
+        </p:nvSpPr>
+        <p:spPr>
+          <a:xfrm>
+            <a:off x="950000" y="5800000"/>
+            <a:ext cx="10500000" cy="600000"/>
+          </a:xfrm>
+          <a:prstGeom prst="rect">
+            <a:avLst/>
+          </a:prstGeom>
+          <a:noFill/>
+        </p:spPr>
+        <p:txBody>
+          <a:bodyPr wrap="square" anchor="ctr">
+            <a:spAutoFit/>
+          </a:bodyPr>
+          <a:lstStyle/>
+          <a:p>
+            <a:pPr algn="l"/>
+            <a:r>
+              <a:rPr sz="1200" b="0">
                 <a:solidFill>
                   <a:srgbClr val="333333"/>
                 </a:solidFill>
@@ -5655,43 +10898,7 @@
                 <a:ea typeface="Open Sans"/>
                 <a:cs typeface="Open Sans"/>
               </a:rPr>
-              <a:t>•  не извлекайте инородное тело</a:t>
-            </a:r>
-          </a:p>
-          <a:p>
-            <a:pPr algn="l">
-              <a:spcAft>
-                <a:spcPts val="800"/>
-              </a:spcAft>
-            </a:pPr>
-            <a:r>
-              <a:rPr sz="1300" b="0">
-                <a:solidFill>
-                  <a:srgbClr val="333333"/>
-                </a:solidFill>
-                <a:latin typeface="Open Sans"/>
-                <a:ea typeface="Open Sans"/>
-                <a:cs typeface="Open Sans"/>
-              </a:rPr>
-              <a:t>•  закройте повязкой оба глаза</a:t>
-            </a:r>
-          </a:p>
-          <a:p>
-            <a:pPr algn="l">
-              <a:spcAft>
-                <a:spcPts val="800"/>
-              </a:spcAft>
-            </a:pPr>
-            <a:r>
-              <a:rPr sz="1300" b="0">
-                <a:solidFill>
-                  <a:srgbClr val="333333"/>
-                </a:solidFill>
-                <a:latin typeface="Open Sans"/>
-                <a:ea typeface="Open Sans"/>
-                <a:cs typeface="Open Sans"/>
-              </a:rPr>
-              <a:t>•  успокаивайте и сопровождайте пострадавшего</a:t>
+              <a:t>Движения неповрежденного глаза вызывают движения травмированного, поэтому закрывают оба глаза.</a:t>
             </a:r>
           </a:p>
         </p:txBody>
@@ -5789,7 +10996,7 @@
                 <a:ea typeface="Open Sans"/>
                 <a:cs typeface="Open Sans"/>
               </a:rPr>
-              <a:t>ШЕЯ И ПОЗВОНОЧНИК</a:t>
+              <a:t>РАНЫ ШЕИ: СОСУДЫ И ШЕЙНЫЙ ОТДЕЛ</a:t>
             </a:r>
           </a:p>
         </p:txBody>
@@ -5954,43 +11161,30 @@
           </a:p>
         </p:txBody>
       </p:sp>
-      <p:sp>
-        <p:nvSpPr>
-          <p:cNvPr id="8" name="TextBox 7"/>
-          <p:cNvSpPr txBox="1"/>
-          <p:nvPr/>
-        </p:nvSpPr>
-        <p:spPr>
-          <a:xfrm>
-            <a:off x="700000" y="1450000"/>
-            <a:ext cx="5400000" cy="400000"/>
-          </a:xfrm>
-          <a:prstGeom prst="rect">
-            <a:avLst/>
-          </a:prstGeom>
-          <a:noFill/>
-        </p:spPr>
-        <p:txBody>
-          <a:bodyPr wrap="square" anchor="t">
-            <a:spAutoFit/>
-          </a:bodyPr>
-          <a:lstStyle/>
-          <a:p>
-            <a:pPr algn="l"/>
-            <a:r>
-              <a:rPr sz="1400" b="1">
-                <a:solidFill>
-                  <a:srgbClr val="333333"/>
-                </a:solidFill>
-                <a:latin typeface="Open Sans"/>
-                <a:ea typeface="Open Sans"/>
-                <a:cs typeface="Open Sans"/>
-              </a:rPr>
-              <a:t>Шея</a:t>
-            </a:r>
-          </a:p>
-        </p:txBody>
-      </p:sp>
+      <p:pic>
+        <p:nvPicPr>
+          <p:cNvPr id="8" name="Picture 7" descr="fig63.jpeg"/>
+          <p:cNvPicPr>
+            <a:picLocks noChangeAspect="1"/>
+          </p:cNvPicPr>
+          <p:nvPr/>
+        </p:nvPicPr>
+        <p:blipFill>
+          <a:blip r:embed="rId2"/>
+          <a:stretch>
+            <a:fillRect/>
+          </a:stretch>
+        </p:blipFill>
+        <p:spPr>
+          <a:xfrm>
+            <a:off x="1015493" y="1450000"/>
+            <a:ext cx="4169014" cy="4000000"/>
+          </a:xfrm>
+          <a:prstGeom prst="rect">
+            <a:avLst/>
+          </a:prstGeom>
+        </p:spPr>
+      </p:pic>
       <p:sp>
         <p:nvSpPr>
           <p:cNvPr id="9" name="TextBox 8"/>
@@ -5999,45 +11193,8 @@
         </p:nvSpPr>
         <p:spPr>
           <a:xfrm>
-            <a:off x="6600000" y="1450000"/>
-            <a:ext cx="5400000" cy="400000"/>
-          </a:xfrm>
-          <a:prstGeom prst="rect">
-            <a:avLst/>
-          </a:prstGeom>
-          <a:noFill/>
-        </p:spPr>
-        <p:txBody>
-          <a:bodyPr wrap="square" anchor="t">
-            <a:spAutoFit/>
-          </a:bodyPr>
-          <a:lstStyle/>
-          <a:p>
-            <a:pPr algn="l"/>
-            <a:r>
-              <a:rPr sz="1400" b="1">
-                <a:solidFill>
-                  <a:srgbClr val="333333"/>
-                </a:solidFill>
-                <a:latin typeface="Open Sans"/>
-                <a:ea typeface="Open Sans"/>
-                <a:cs typeface="Open Sans"/>
-              </a:rPr>
-              <a:t>Позвоночник</a:t>
-            </a:r>
-          </a:p>
-        </p:txBody>
-      </p:sp>
-      <p:sp>
-        <p:nvSpPr>
-          <p:cNvPr id="10" name="TextBox 9"/>
-          <p:cNvSpPr txBox="1"/>
-          <p:nvPr/>
-        </p:nvSpPr>
-        <p:spPr>
-          <a:xfrm>
-            <a:off x="700000" y="1950000"/>
-            <a:ext cx="5400000" cy="4000000"/>
+            <a:off x="6000000" y="1450000"/>
+            <a:ext cx="6200000" cy="3800000"/>
           </a:xfrm>
           <a:prstGeom prst="rect">
             <a:avLst/>
@@ -6064,7 +11221,7 @@
                 <a:ea typeface="Open Sans"/>
                 <a:cs typeface="Open Sans"/>
               </a:rPr>
-              <a:t>•  учитывайте риск повреждения сосудов</a:t>
+              <a:t>•  При кровотечении из сосудов шеи прижмите рану пальцами через салфетку.</a:t>
             </a:r>
           </a:p>
           <a:p>
@@ -6082,7 +11239,7 @@
                 <a:ea typeface="Open Sans"/>
                 <a:cs typeface="Open Sans"/>
               </a:rPr>
-              <a:t>•  подозревайте травму шейного отдела позвоночника</a:t>
+              <a:t>•  Повязку накладывайте так, чтобы не сдавить дыхательные пути и сосуды с другой стороны.</a:t>
             </a:r>
           </a:p>
           <a:p>
@@ -6100,7 +11257,7 @@
                 <a:ea typeface="Open Sans"/>
                 <a:cs typeface="Open Sans"/>
               </a:rPr>
-              <a:t>•  удерживайте голову руками</a:t>
+              <a:t>•  Не удаляйте инородное тело; обложите и зафиксируйте его вокруг.</a:t>
             </a:r>
           </a:p>
           <a:p>
@@ -6118,32 +11275,9 @@
                 <a:ea typeface="Open Sans"/>
                 <a:cs typeface="Open Sans"/>
               </a:rPr>
-              <a:t>•  при необходимости используйте импровизированный воротник</a:t>
-            </a:r>
-          </a:p>
-        </p:txBody>
-      </p:sp>
-      <p:sp>
-        <p:nvSpPr>
-          <p:cNvPr id="11" name="TextBox 10"/>
-          <p:cNvSpPr txBox="1"/>
-          <p:nvPr/>
-        </p:nvSpPr>
-        <p:spPr>
-          <a:xfrm>
-            <a:off x="6600000" y="1950000"/>
-            <a:ext cx="5400000" cy="4000000"/>
-          </a:xfrm>
-          <a:prstGeom prst="rect">
-            <a:avLst/>
-          </a:prstGeom>
-          <a:noFill/>
-        </p:spPr>
-        <p:txBody>
-          <a:bodyPr wrap="square">
-            <a:spAutoFit/>
-          </a:bodyPr>
-          <a:lstStyle/>
+              <a:t>•  Одновременно предполагайте повреждение шейного отдела позвоночника.</a:t>
+            </a:r>
+          </a:p>
           <a:p>
             <a:pPr algn="l">
               <a:spcAft>
@@ -6159,17 +11293,79 @@
                 <a:ea typeface="Open Sans"/>
                 <a:cs typeface="Open Sans"/>
               </a:rPr>
-              <a:t>•  не сгибайте и не скручивайте тело</a:t>
-            </a:r>
-          </a:p>
-          <a:p>
-            <a:pPr algn="l">
-              <a:spcAft>
-                <a:spcPts val="800"/>
-              </a:spcAft>
-            </a:pPr>
-            <a:r>
-              <a:rPr sz="1300" b="0">
+              <a:t>•  Удерживайте голову руками в том положении, в котором она найдена.</a:t>
+            </a:r>
+          </a:p>
+        </p:txBody>
+      </p:sp>
+      <p:sp>
+        <p:nvSpPr>
+          <p:cNvPr id="10" name="Rounded Rectangle 9"/>
+          <p:cNvSpPr/>
+          <p:nvPr/>
+        </p:nvSpPr>
+        <p:spPr>
+          <a:xfrm>
+            <a:off x="6000000" y="5400000"/>
+            <a:ext cx="6200000" cy="1100000"/>
+          </a:xfrm>
+          <a:prstGeom prst="roundRect">
+            <a:avLst/>
+          </a:prstGeom>
+          <a:solidFill>
+            <a:srgbClr val="F5F0E1"/>
+          </a:solidFill>
+          <a:ln>
+            <a:noFill/>
+          </a:ln>
+        </p:spPr>
+        <p:style>
+          <a:lnRef idx="1">
+            <a:schemeClr val="accent1"/>
+          </a:lnRef>
+          <a:fillRef idx="3">
+            <a:schemeClr val="accent1"/>
+          </a:fillRef>
+          <a:effectRef idx="2">
+            <a:schemeClr val="accent1"/>
+          </a:effectRef>
+          <a:fontRef idx="minor">
+            <a:schemeClr val="lt1"/>
+          </a:fontRef>
+        </p:style>
+        <p:txBody>
+          <a:bodyPr rtlCol="0" anchor="ctr"/>
+          <a:lstStyle/>
+          <a:p>
+            <a:pPr algn="ctr"/>
+          </a:p>
+        </p:txBody>
+      </p:sp>
+      <p:sp>
+        <p:nvSpPr>
+          <p:cNvPr id="11" name="TextBox 10"/>
+          <p:cNvSpPr txBox="1"/>
+          <p:nvPr/>
+        </p:nvSpPr>
+        <p:spPr>
+          <a:xfrm>
+            <a:off x="6250000" y="5600000"/>
+            <a:ext cx="5700000" cy="700000"/>
+          </a:xfrm>
+          <a:prstGeom prst="rect">
+            <a:avLst/>
+          </a:prstGeom>
+          <a:noFill/>
+        </p:spPr>
+        <p:txBody>
+          <a:bodyPr wrap="square" anchor="ctr">
+            <a:spAutoFit/>
+          </a:bodyPr>
+          <a:lstStyle/>
+          <a:p>
+            <a:pPr algn="l"/>
+            <a:r>
+              <a:rPr sz="1200" b="0">
                 <a:solidFill>
                   <a:srgbClr val="333333"/>
                 </a:solidFill>
@@ -6177,61 +11373,7 @@
                 <a:ea typeface="Open Sans"/>
                 <a:cs typeface="Open Sans"/>
               </a:rPr>
-              <a:t>•  перемещайте только при необходимости</a:t>
-            </a:r>
-          </a:p>
-          <a:p>
-            <a:pPr algn="l">
-              <a:spcAft>
-                <a:spcPts val="800"/>
-              </a:spcAft>
-            </a:pPr>
-            <a:r>
-              <a:rPr sz="1300" b="0">
-                <a:solidFill>
-                  <a:srgbClr val="333333"/>
-                </a:solidFill>
-                <a:latin typeface="Open Sans"/>
-                <a:ea typeface="Open Sans"/>
-                <a:cs typeface="Open Sans"/>
-              </a:rPr>
-              <a:t>•  укладывайте на твердую ровную поверхность</a:t>
-            </a:r>
-          </a:p>
-          <a:p>
-            <a:pPr algn="l">
-              <a:spcAft>
-                <a:spcPts val="800"/>
-              </a:spcAft>
-            </a:pPr>
-            <a:r>
-              <a:rPr sz="1300" b="0">
-                <a:solidFill>
-                  <a:srgbClr val="333333"/>
-                </a:solidFill>
-                <a:latin typeface="Open Sans"/>
-                <a:ea typeface="Open Sans"/>
-                <a:cs typeface="Open Sans"/>
-              </a:rPr>
-              <a:t>•  перемещайте силами нескольких человек</a:t>
-            </a:r>
-          </a:p>
-          <a:p>
-            <a:pPr algn="l">
-              <a:spcAft>
-                <a:spcPts val="800"/>
-              </a:spcAft>
-            </a:pPr>
-            <a:r>
-              <a:rPr sz="1300" b="0">
-                <a:solidFill>
-                  <a:srgbClr val="333333"/>
-                </a:solidFill>
-                <a:latin typeface="Open Sans"/>
-                <a:ea typeface="Open Sans"/>
-                <a:cs typeface="Open Sans"/>
-              </a:rPr>
-              <a:t>•  фиксируйте шею</a:t>
+              <a:t>Фиксацию сохраняют до передачи специалистам или до вынужденного безопасного перемещения.</a:t>
             </a:r>
           </a:p>
         </p:txBody>
@@ -6329,7 +11471,7 @@
                 <a:ea typeface="Open Sans"/>
                 <a:cs typeface="Open Sans"/>
               </a:rPr>
-              <a:t>ТРАВМА ГРУДИ</a:t>
+              <a:t>ФИКСАЦИЯ ШЕИ ПРЕДПЛЕЧЬЯМИ</a:t>
             </a:r>
           </a:p>
         </p:txBody>
@@ -6494,16 +11636,40 @@
           </a:p>
         </p:txBody>
       </p:sp>
-      <p:sp>
-        <p:nvSpPr>
-          <p:cNvPr id="8" name="TextBox 7"/>
+      <p:pic>
+        <p:nvPicPr>
+          <p:cNvPr id="8" name="Picture 7" descr="fig64.jpeg"/>
+          <p:cNvPicPr>
+            <a:picLocks noChangeAspect="1"/>
+          </p:cNvPicPr>
+          <p:nvPr/>
+        </p:nvPicPr>
+        <p:blipFill>
+          <a:blip r:embed="rId2"/>
+          <a:stretch>
+            <a:fillRect/>
+          </a:stretch>
+        </p:blipFill>
+        <p:spPr>
+          <a:xfrm>
+            <a:off x="745455" y="1450000"/>
+            <a:ext cx="4709090" cy="3999999"/>
+          </a:xfrm>
+          <a:prstGeom prst="rect">
+            <a:avLst/>
+          </a:prstGeom>
+        </p:spPr>
+      </p:pic>
+      <p:sp>
+        <p:nvSpPr>
+          <p:cNvPr id="9" name="TextBox 8"/>
           <p:cNvSpPr txBox="1"/>
           <p:nvPr/>
         </p:nvSpPr>
         <p:spPr>
           <a:xfrm>
-            <a:off x="700000" y="1500000"/>
-            <a:ext cx="11000000" cy="4200000"/>
+            <a:off x="6000000" y="1450000"/>
+            <a:ext cx="6200000" cy="3800000"/>
           </a:xfrm>
           <a:prstGeom prst="rect">
             <a:avLst/>
@@ -6522,7 +11688,7 @@
               </a:spcAft>
             </a:pPr>
             <a:r>
-              <a:rPr sz="1400" b="0">
+              <a:rPr sz="1300" b="0">
                 <a:solidFill>
                   <a:srgbClr val="333333"/>
                 </a:solidFill>
@@ -6530,7 +11696,7 @@
                 <a:ea typeface="Open Sans"/>
                 <a:cs typeface="Open Sans"/>
               </a:rPr>
-              <a:t>•  При ране груди наложите герметичную повязку</a:t>
+              <a:t>•  Помощник располагается устойчиво и фиксирует голову с двух сторон предплечьями.</a:t>
             </a:r>
           </a:p>
           <a:p>
@@ -6540,15 +11706,15 @@
               </a:spcAft>
             </a:pPr>
             <a:r>
-              <a:rPr sz="1400" b="1">
-                <a:solidFill>
-                  <a:srgbClr val="CC0000"/>
-                </a:solidFill>
-                <a:latin typeface="Open Sans"/>
-                <a:ea typeface="Open Sans"/>
-                <a:cs typeface="Open Sans"/>
-              </a:rPr>
-              <a:t>•  Закрепите ее с трех сторон — свободный край действует как клапан</a:t>
+              <a:rPr sz="1300" b="0">
+                <a:solidFill>
+                  <a:srgbClr val="333333"/>
+                </a:solidFill>
+                <a:latin typeface="Open Sans"/>
+                <a:ea typeface="Open Sans"/>
+                <a:cs typeface="Open Sans"/>
+              </a:rPr>
+              <a:t>•  Не тяните голову и не пытайтесь придать ей «правильное» положение.</a:t>
             </a:r>
           </a:p>
           <a:p>
@@ -6558,7 +11724,7 @@
               </a:spcAft>
             </a:pPr>
             <a:r>
-              <a:rPr sz="1400" b="0">
+              <a:rPr sz="1300" b="0">
                 <a:solidFill>
                   <a:srgbClr val="333333"/>
                 </a:solidFill>
@@ -6566,7 +11732,7 @@
                 <a:ea typeface="Open Sans"/>
                 <a:cs typeface="Open Sans"/>
               </a:rPr>
-              <a:t>•  При травме ребер придайте полусидячее положение</a:t>
+              <a:t>•  Поддерживайте голову, шею и туловище по одной оси.</a:t>
             </a:r>
           </a:p>
           <a:p>
@@ -6576,15 +11742,15 @@
               </a:spcAft>
             </a:pPr>
             <a:r>
-              <a:rPr sz="1400" b="1">
-                <a:solidFill>
-                  <a:srgbClr val="CC0000"/>
-                </a:solidFill>
-                <a:latin typeface="Open Sans"/>
-                <a:ea typeface="Open Sans"/>
-                <a:cs typeface="Open Sans"/>
-              </a:rPr>
-              <a:t>•  Не извлекайте инородный предмет</a:t>
+              <a:rPr sz="1300" b="0">
+                <a:solidFill>
+                  <a:srgbClr val="333333"/>
+                </a:solidFill>
+                <a:latin typeface="Open Sans"/>
+                <a:ea typeface="Open Sans"/>
+                <a:cs typeface="Open Sans"/>
+              </a:rPr>
+              <a:t>•  Если пострадавший в сознании, попросите его не двигать головой.</a:t>
             </a:r>
           </a:p>
           <a:p>
@@ -6594,7 +11760,7 @@
               </a:spcAft>
             </a:pPr>
             <a:r>
-              <a:rPr sz="1400" b="0">
+              <a:rPr sz="1300" b="0">
                 <a:solidFill>
                   <a:srgbClr val="333333"/>
                 </a:solidFill>
@@ -6602,7 +11768,87 @@
                 <a:ea typeface="Open Sans"/>
                 <a:cs typeface="Open Sans"/>
               </a:rPr>
-              <a:t>•  Контролируйте дыхание до прибытия скорой помощи</a:t>
+              <a:t>•  Регулярно проверяйте дыхание и не допускайте сдавления шеи.</a:t>
+            </a:r>
+          </a:p>
+        </p:txBody>
+      </p:sp>
+      <p:sp>
+        <p:nvSpPr>
+          <p:cNvPr id="10" name="Rounded Rectangle 9"/>
+          <p:cNvSpPr/>
+          <p:nvPr/>
+        </p:nvSpPr>
+        <p:spPr>
+          <a:xfrm>
+            <a:off x="6000000" y="5400000"/>
+            <a:ext cx="6200000" cy="1100000"/>
+          </a:xfrm>
+          <a:prstGeom prst="roundRect">
+            <a:avLst/>
+          </a:prstGeom>
+          <a:solidFill>
+            <a:srgbClr val="F5F0E1"/>
+          </a:solidFill>
+          <a:ln>
+            <a:noFill/>
+          </a:ln>
+        </p:spPr>
+        <p:style>
+          <a:lnRef idx="1">
+            <a:schemeClr val="accent1"/>
+          </a:lnRef>
+          <a:fillRef idx="3">
+            <a:schemeClr val="accent1"/>
+          </a:fillRef>
+          <a:effectRef idx="2">
+            <a:schemeClr val="accent1"/>
+          </a:effectRef>
+          <a:fontRef idx="minor">
+            <a:schemeClr val="lt1"/>
+          </a:fontRef>
+        </p:style>
+        <p:txBody>
+          <a:bodyPr rtlCol="0" anchor="ctr"/>
+          <a:lstStyle/>
+          <a:p>
+            <a:pPr algn="ctr"/>
+          </a:p>
+        </p:txBody>
+      </p:sp>
+      <p:sp>
+        <p:nvSpPr>
+          <p:cNvPr id="11" name="TextBox 10"/>
+          <p:cNvSpPr txBox="1"/>
+          <p:nvPr/>
+        </p:nvSpPr>
+        <p:spPr>
+          <a:xfrm>
+            <a:off x="6250000" y="5600000"/>
+            <a:ext cx="5700000" cy="700000"/>
+          </a:xfrm>
+          <a:prstGeom prst="rect">
+            <a:avLst/>
+          </a:prstGeom>
+          <a:noFill/>
+        </p:spPr>
+        <p:txBody>
+          <a:bodyPr wrap="square" anchor="ctr">
+            <a:spAutoFit/>
+          </a:bodyPr>
+          <a:lstStyle/>
+          <a:p>
+            <a:pPr algn="l"/>
+            <a:r>
+              <a:rPr sz="1200" b="0">
+                <a:solidFill>
+                  <a:srgbClr val="333333"/>
+                </a:solidFill>
+                <a:latin typeface="Open Sans"/>
+                <a:ea typeface="Open Sans"/>
+                <a:cs typeface="Open Sans"/>
+              </a:rPr>
+              <a:t>Импровизированная фиксация не должна задерживать восстановление дыхательных путей или сердечно-легочную реанимацию.</a:t>
             </a:r>
           </a:p>
         </p:txBody>
@@ -6700,7 +11946,7 @@
                 <a:ea typeface="Open Sans"/>
                 <a:cs typeface="Open Sans"/>
               </a:rPr>
-              <a:t>ТРАВМЫ ЖИВОТА И ТАЗА</a:t>
+              <a:t>ОТКРЫТАЯ РАНА ГРУДИ: ГЕРМЕТИЗАЦИЯ</a:t>
             </a:r>
           </a:p>
         </p:txBody>
@@ -6865,43 +12111,30 @@
           </a:p>
         </p:txBody>
       </p:sp>
-      <p:sp>
-        <p:nvSpPr>
-          <p:cNvPr id="8" name="TextBox 7"/>
-          <p:cNvSpPr txBox="1"/>
-          <p:nvPr/>
-        </p:nvSpPr>
-        <p:spPr>
-          <a:xfrm>
-            <a:off x="700000" y="1450000"/>
-            <a:ext cx="5400000" cy="400000"/>
-          </a:xfrm>
-          <a:prstGeom prst="rect">
-            <a:avLst/>
-          </a:prstGeom>
-          <a:noFill/>
-        </p:spPr>
-        <p:txBody>
-          <a:bodyPr wrap="square" anchor="t">
-            <a:spAutoFit/>
-          </a:bodyPr>
-          <a:lstStyle/>
-          <a:p>
-            <a:pPr algn="l"/>
-            <a:r>
-              <a:rPr sz="1400" b="1">
-                <a:solidFill>
-                  <a:srgbClr val="333333"/>
-                </a:solidFill>
-                <a:latin typeface="Open Sans"/>
-                <a:ea typeface="Open Sans"/>
-                <a:cs typeface="Open Sans"/>
-              </a:rPr>
-              <a:t>Закрытая травма</a:t>
-            </a:r>
-          </a:p>
-        </p:txBody>
-      </p:sp>
+      <p:pic>
+        <p:nvPicPr>
+          <p:cNvPr id="8" name="Picture 7" descr="fig67.jpeg"/>
+          <p:cNvPicPr>
+            <a:picLocks noChangeAspect="1"/>
+          </p:cNvPicPr>
+          <p:nvPr/>
+        </p:nvPicPr>
+        <p:blipFill>
+          <a:blip r:embed="rId2"/>
+          <a:stretch>
+            <a:fillRect/>
+          </a:stretch>
+        </p:blipFill>
+        <p:spPr>
+          <a:xfrm>
+            <a:off x="500000" y="1759506"/>
+            <a:ext cx="5200000" cy="3380988"/>
+          </a:xfrm>
+          <a:prstGeom prst="rect">
+            <a:avLst/>
+          </a:prstGeom>
+        </p:spPr>
+      </p:pic>
       <p:sp>
         <p:nvSpPr>
           <p:cNvPr id="9" name="TextBox 8"/>
@@ -6910,45 +12143,8 @@
         </p:nvSpPr>
         <p:spPr>
           <a:xfrm>
-            <a:off x="6600000" y="1450000"/>
-            <a:ext cx="5400000" cy="400000"/>
-          </a:xfrm>
-          <a:prstGeom prst="rect">
-            <a:avLst/>
-          </a:prstGeom>
-          <a:noFill/>
-        </p:spPr>
-        <p:txBody>
-          <a:bodyPr wrap="square" anchor="t">
-            <a:spAutoFit/>
-          </a:bodyPr>
-          <a:lstStyle/>
-          <a:p>
-            <a:pPr algn="l"/>
-            <a:r>
-              <a:rPr sz="1400" b="1">
-                <a:solidFill>
-                  <a:srgbClr val="333333"/>
-                </a:solidFill>
-                <a:latin typeface="Open Sans"/>
-                <a:ea typeface="Open Sans"/>
-                <a:cs typeface="Open Sans"/>
-              </a:rPr>
-              <a:t>Открытая травма</a:t>
-            </a:r>
-          </a:p>
-        </p:txBody>
-      </p:sp>
-      <p:sp>
-        <p:nvSpPr>
-          <p:cNvPr id="10" name="TextBox 9"/>
-          <p:cNvSpPr txBox="1"/>
-          <p:nvPr/>
-        </p:nvSpPr>
-        <p:spPr>
-          <a:xfrm>
-            <a:off x="700000" y="1950000"/>
-            <a:ext cx="5400000" cy="4000000"/>
+            <a:off x="6000000" y="1450000"/>
+            <a:ext cx="6200000" cy="3800000"/>
           </a:xfrm>
           <a:prstGeom prst="rect">
             <a:avLst/>
@@ -6975,7 +12171,7 @@
                 <a:ea typeface="Open Sans"/>
                 <a:cs typeface="Open Sans"/>
               </a:rPr>
-              <a:t>•  синяки и ссадины могут указывать на внутреннее повреждение</a:t>
+              <a:t>•  Признаки: рана, боль, затрудненное дыхание, подсасывание воздуха или пенистая кровь.</a:t>
             </a:r>
           </a:p>
           <a:p>
@@ -6993,7 +12189,7 @@
                 <a:ea typeface="Open Sans"/>
                 <a:cs typeface="Open Sans"/>
               </a:rPr>
-              <a:t>•  обеспечьте покой</a:t>
+              <a:t>•  Закройте рану воздухонепроницаемым материалом как можно быстрее.</a:t>
             </a:r>
           </a:p>
           <a:p>
@@ -7011,7 +12207,7 @@
                 <a:ea typeface="Open Sans"/>
                 <a:cs typeface="Open Sans"/>
               </a:rPr>
-              <a:t>•  наблюдайте за сознанием и дыханием</a:t>
+              <a:t>•  Закрепите материал по трем сторонам, оставив нижний край свободным.</a:t>
             </a:r>
           </a:p>
           <a:p>
@@ -7029,32 +12225,9 @@
                 <a:ea typeface="Open Sans"/>
                 <a:cs typeface="Open Sans"/>
               </a:rPr>
-              <a:t>•  не давайте еду и питье</a:t>
-            </a:r>
-          </a:p>
-        </p:txBody>
-      </p:sp>
-      <p:sp>
-        <p:nvSpPr>
-          <p:cNvPr id="11" name="TextBox 10"/>
-          <p:cNvSpPr txBox="1"/>
-          <p:nvPr/>
-        </p:nvSpPr>
-        <p:spPr>
-          <a:xfrm>
-            <a:off x="6600000" y="1950000"/>
-            <a:ext cx="5400000" cy="4000000"/>
-          </a:xfrm>
-          <a:prstGeom prst="rect">
-            <a:avLst/>
-          </a:prstGeom>
-          <a:noFill/>
-        </p:spPr>
-        <p:txBody>
-          <a:bodyPr wrap="square">
-            <a:spAutoFit/>
-          </a:bodyPr>
-          <a:lstStyle/>
+              <a:t>•  Свободный край позволяет воздуху выходить и ограничивает его поступление внутрь.</a:t>
+            </a:r>
+          </a:p>
           <a:p>
             <a:pPr algn="l">
               <a:spcAft>
@@ -7070,17 +12243,79 @@
                 <a:ea typeface="Open Sans"/>
                 <a:cs typeface="Open Sans"/>
               </a:rPr>
-              <a:t>•  не вправляйте выпавшие органы</a:t>
-            </a:r>
-          </a:p>
-          <a:p>
-            <a:pPr algn="l">
-              <a:spcAft>
-                <a:spcPts val="800"/>
-              </a:spcAft>
-            </a:pPr>
-            <a:r>
-              <a:rPr sz="1300" b="0">
+              <a:t>•  Не извлекайте предмет из раны; герметизируйте вокруг него без давления.</a:t>
+            </a:r>
+          </a:p>
+        </p:txBody>
+      </p:sp>
+      <p:sp>
+        <p:nvSpPr>
+          <p:cNvPr id="10" name="Rounded Rectangle 9"/>
+          <p:cNvSpPr/>
+          <p:nvPr/>
+        </p:nvSpPr>
+        <p:spPr>
+          <a:xfrm>
+            <a:off x="6000000" y="5400000"/>
+            <a:ext cx="6200000" cy="1100000"/>
+          </a:xfrm>
+          <a:prstGeom prst="roundRect">
+            <a:avLst/>
+          </a:prstGeom>
+          <a:solidFill>
+            <a:srgbClr val="F5F0E1"/>
+          </a:solidFill>
+          <a:ln>
+            <a:noFill/>
+          </a:ln>
+        </p:spPr>
+        <p:style>
+          <a:lnRef idx="1">
+            <a:schemeClr val="accent1"/>
+          </a:lnRef>
+          <a:fillRef idx="3">
+            <a:schemeClr val="accent1"/>
+          </a:fillRef>
+          <a:effectRef idx="2">
+            <a:schemeClr val="accent1"/>
+          </a:effectRef>
+          <a:fontRef idx="minor">
+            <a:schemeClr val="lt1"/>
+          </a:fontRef>
+        </p:style>
+        <p:txBody>
+          <a:bodyPr rtlCol="0" anchor="ctr"/>
+          <a:lstStyle/>
+          <a:p>
+            <a:pPr algn="ctr"/>
+          </a:p>
+        </p:txBody>
+      </p:sp>
+      <p:sp>
+        <p:nvSpPr>
+          <p:cNvPr id="11" name="TextBox 10"/>
+          <p:cNvSpPr txBox="1"/>
+          <p:nvPr/>
+        </p:nvSpPr>
+        <p:spPr>
+          <a:xfrm>
+            <a:off x="6250000" y="5600000"/>
+            <a:ext cx="5700000" cy="700000"/>
+          </a:xfrm>
+          <a:prstGeom prst="rect">
+            <a:avLst/>
+          </a:prstGeom>
+          <a:noFill/>
+        </p:spPr>
+        <p:txBody>
+          <a:bodyPr wrap="square" anchor="ctr">
+            <a:spAutoFit/>
+          </a:bodyPr>
+          <a:lstStyle/>
+          <a:p>
+            <a:pPr algn="l"/>
+            <a:r>
+              <a:rPr sz="1200" b="0">
                 <a:solidFill>
                   <a:srgbClr val="333333"/>
                 </a:solidFill>
@@ -7088,43 +12323,7 @@
                 <a:ea typeface="Open Sans"/>
                 <a:cs typeface="Open Sans"/>
               </a:rPr>
-              <a:t>•  не накладывайте на них давящую повязку</a:t>
-            </a:r>
-          </a:p>
-          <a:p>
-            <a:pPr algn="l">
-              <a:spcAft>
-                <a:spcPts val="800"/>
-              </a:spcAft>
-            </a:pPr>
-            <a:r>
-              <a:rPr sz="1300" b="0">
-                <a:solidFill>
-                  <a:srgbClr val="333333"/>
-                </a:solidFill>
-                <a:latin typeface="Open Sans"/>
-                <a:ea typeface="Open Sans"/>
-                <a:cs typeface="Open Sans"/>
-              </a:rPr>
-              <a:t>•  накройте влажной стерильной салфеткой</a:t>
-            </a:r>
-          </a:p>
-          <a:p>
-            <a:pPr algn="l">
-              <a:spcAft>
-                <a:spcPts val="800"/>
-              </a:spcAft>
-            </a:pPr>
-            <a:r>
-              <a:rPr sz="1300" b="0">
-                <a:solidFill>
-                  <a:srgbClr val="333333"/>
-                </a:solidFill>
-                <a:latin typeface="Open Sans"/>
-                <a:ea typeface="Open Sans"/>
-                <a:cs typeface="Open Sans"/>
-              </a:rPr>
-              <a:t>•  защитите салфетку от высыхания</a:t>
+              <a:t>При нарастании одышки контролируйте повязку и выполняйте указания диспетчера скорой помощи.</a:t>
             </a:r>
           </a:p>
         </p:txBody>
@@ -7222,7 +12421,7 @@
                 <a:ea typeface="Open Sans"/>
                 <a:cs typeface="Open Sans"/>
               </a:rPr>
-              <a:t>ТРАВМА КОНЕЧНОСТИ</a:t>
+              <a:t>ПОВЯЗКА ПРИ РАНЕНИИ ГРУДНОЙ КЛЕТКИ</a:t>
             </a:r>
           </a:p>
         </p:txBody>
@@ -7387,22 +12586,159 @@
           </a:p>
         </p:txBody>
       </p:sp>
-      <p:sp>
-        <p:nvSpPr>
-          <p:cNvPr id="8" name="Oval 7"/>
+      <p:pic>
+        <p:nvPicPr>
+          <p:cNvPr id="8" name="Picture 7" descr="fig68.jpeg"/>
+          <p:cNvPicPr>
+            <a:picLocks noChangeAspect="1"/>
+          </p:cNvPicPr>
+          <p:nvPr/>
+        </p:nvPicPr>
+        <p:blipFill>
+          <a:blip r:embed="rId2"/>
+          <a:stretch>
+            <a:fillRect/>
+          </a:stretch>
+        </p:blipFill>
+        <p:spPr>
+          <a:xfrm>
+            <a:off x="1443949" y="1450000"/>
+            <a:ext cx="3312101" cy="4000000"/>
+          </a:xfrm>
+          <a:prstGeom prst="rect">
+            <a:avLst/>
+          </a:prstGeom>
+        </p:spPr>
+      </p:pic>
+      <p:sp>
+        <p:nvSpPr>
+          <p:cNvPr id="9" name="TextBox 8"/>
+          <p:cNvSpPr txBox="1"/>
+          <p:nvPr/>
+        </p:nvSpPr>
+        <p:spPr>
+          <a:xfrm>
+            <a:off x="6000000" y="1450000"/>
+            <a:ext cx="6200000" cy="3800000"/>
+          </a:xfrm>
+          <a:prstGeom prst="rect">
+            <a:avLst/>
+          </a:prstGeom>
+          <a:noFill/>
+        </p:spPr>
+        <p:txBody>
+          <a:bodyPr wrap="square">
+            <a:spAutoFit/>
+          </a:bodyPr>
+          <a:lstStyle/>
+          <a:p>
+            <a:pPr algn="l">
+              <a:spcAft>
+                <a:spcPts val="800"/>
+              </a:spcAft>
+            </a:pPr>
+            <a:r>
+              <a:rPr sz="1300" b="0">
+                <a:solidFill>
+                  <a:srgbClr val="333333"/>
+                </a:solidFill>
+                <a:latin typeface="Open Sans"/>
+                <a:ea typeface="Open Sans"/>
+                <a:cs typeface="Open Sans"/>
+              </a:rPr>
+              <a:t>•  Кожу вокруг раны по возможности быстро осушите для надежной фиксации.</a:t>
+            </a:r>
+          </a:p>
+          <a:p>
+            <a:pPr algn="l">
+              <a:spcAft>
+                <a:spcPts val="800"/>
+              </a:spcAft>
+            </a:pPr>
+            <a:r>
+              <a:rPr sz="1300" b="0">
+                <a:solidFill>
+                  <a:srgbClr val="333333"/>
+                </a:solidFill>
+                <a:latin typeface="Open Sans"/>
+                <a:ea typeface="Open Sans"/>
+                <a:cs typeface="Open Sans"/>
+              </a:rPr>
+              <a:t>•  Пленка или другой герметичный материал должен перекрывать края раны.</a:t>
+            </a:r>
+          </a:p>
+          <a:p>
+            <a:pPr algn="l">
+              <a:spcAft>
+                <a:spcPts val="800"/>
+              </a:spcAft>
+            </a:pPr>
+            <a:r>
+              <a:rPr sz="1300" b="0">
+                <a:solidFill>
+                  <a:srgbClr val="333333"/>
+                </a:solidFill>
+                <a:latin typeface="Open Sans"/>
+                <a:ea typeface="Open Sans"/>
+                <a:cs typeface="Open Sans"/>
+              </a:rPr>
+              <a:t>•  Фиксируйте пластырем с трех сторон, не стягивая всю грудную клетку.</a:t>
+            </a:r>
+          </a:p>
+          <a:p>
+            <a:pPr algn="l">
+              <a:spcAft>
+                <a:spcPts val="800"/>
+              </a:spcAft>
+            </a:pPr>
+            <a:r>
+              <a:rPr sz="1300" b="0">
+                <a:solidFill>
+                  <a:srgbClr val="333333"/>
+                </a:solidFill>
+                <a:latin typeface="Open Sans"/>
+                <a:ea typeface="Open Sans"/>
+                <a:cs typeface="Open Sans"/>
+              </a:rPr>
+              <a:t>•  Следите, чтобы повязка не смещалась и не закрывала вторую рану.</a:t>
+            </a:r>
+          </a:p>
+          <a:p>
+            <a:pPr algn="l">
+              <a:spcAft>
+                <a:spcPts val="800"/>
+              </a:spcAft>
+            </a:pPr>
+            <a:r>
+              <a:rPr sz="1300" b="0">
+                <a:solidFill>
+                  <a:srgbClr val="333333"/>
+                </a:solidFill>
+                <a:latin typeface="Open Sans"/>
+                <a:ea typeface="Open Sans"/>
+                <a:cs typeface="Open Sans"/>
+              </a:rPr>
+              <a:t>•  Постоянно наблюдайте за дыханием, сознанием и цветом кожи.</a:t>
+            </a:r>
+          </a:p>
+        </p:txBody>
+      </p:sp>
+      <p:sp>
+        <p:nvSpPr>
+          <p:cNvPr id="10" name="Rounded Rectangle 9"/>
           <p:cNvSpPr/>
           <p:nvPr/>
         </p:nvSpPr>
         <p:spPr>
           <a:xfrm>
-            <a:off x="700000" y="1450000"/>
-            <a:ext cx="550000" cy="550000"/>
-          </a:xfrm>
-          <a:prstGeom prst="ellipse">
+            <a:off x="6000000" y="5400000"/>
+            <a:ext cx="6200000" cy="1100000"/>
+          </a:xfrm>
+          <a:prstGeom prst="roundRect">
             <a:avLst/>
           </a:prstGeom>
           <a:solidFill>
-            <a:srgbClr val="CC0000"/>
+            <a:srgbClr val="F5F0E1"/>
           </a:solidFill>
           <a:ln>
             <a:noFill/>
@@ -7432,14 +12768,14 @@
       </p:sp>
       <p:sp>
         <p:nvSpPr>
-          <p:cNvPr id="9" name="TextBox 8"/>
+          <p:cNvPr id="11" name="TextBox 10"/>
           <p:cNvSpPr txBox="1"/>
           <p:nvPr/>
         </p:nvSpPr>
         <p:spPr>
           <a:xfrm>
-            <a:off x="700000" y="1450000"/>
-            <a:ext cx="550000" cy="550000"/>
+            <a:off x="6250000" y="5600000"/>
+            <a:ext cx="5700000" cy="700000"/>
           </a:xfrm>
           <a:prstGeom prst="rect">
             <a:avLst/>
@@ -7452,91 +12788,9 @@
           </a:bodyPr>
           <a:lstStyle/>
           <a:p>
-            <a:pPr algn="ctr"/>
-            <a:r>
-              <a:rPr sz="1400" b="1">
-                <a:solidFill>
-                  <a:srgbClr val="FFFFFF"/>
-                </a:solidFill>
-                <a:latin typeface="Open Sans"/>
-                <a:ea typeface="Open Sans"/>
-                <a:cs typeface="Open Sans"/>
-              </a:rPr>
-              <a:t>1</a:t>
-            </a:r>
-          </a:p>
-        </p:txBody>
-      </p:sp>
-      <p:sp>
-        <p:nvSpPr>
-          <p:cNvPr id="10" name="Rectangle 9"/>
-          <p:cNvSpPr/>
-          <p:nvPr/>
-        </p:nvSpPr>
-        <p:spPr>
-          <a:xfrm>
-            <a:off x="1450000" y="1450000"/>
-            <a:ext cx="10500000" cy="550000"/>
-          </a:xfrm>
-          <a:prstGeom prst="rect">
-            <a:avLst/>
-          </a:prstGeom>
-          <a:solidFill>
-            <a:srgbClr val="FFFFFF"/>
-          </a:solidFill>
-          <a:ln w="12700">
-            <a:solidFill>
-              <a:srgbClr val="999999"/>
-            </a:solidFill>
-          </a:ln>
-        </p:spPr>
-        <p:style>
-          <a:lnRef idx="1">
-            <a:schemeClr val="accent1"/>
-          </a:lnRef>
-          <a:fillRef idx="3">
-            <a:schemeClr val="accent1"/>
-          </a:fillRef>
-          <a:effectRef idx="2">
-            <a:schemeClr val="accent1"/>
-          </a:effectRef>
-          <a:fontRef idx="minor">
-            <a:schemeClr val="lt1"/>
-          </a:fontRef>
-        </p:style>
-        <p:txBody>
-          <a:bodyPr rtlCol="0" anchor="ctr"/>
-          <a:lstStyle/>
-          <a:p>
-            <a:pPr algn="ctr"/>
-          </a:p>
-        </p:txBody>
-      </p:sp>
-      <p:sp>
-        <p:nvSpPr>
-          <p:cNvPr id="11" name="TextBox 10"/>
-          <p:cNvSpPr txBox="1"/>
-          <p:nvPr/>
-        </p:nvSpPr>
-        <p:spPr>
-          <a:xfrm>
-            <a:off x="1650000" y="1450000"/>
-            <a:ext cx="10100000" cy="550000"/>
-          </a:xfrm>
-          <a:prstGeom prst="rect">
-            <a:avLst/>
-          </a:prstGeom>
-          <a:noFill/>
-        </p:spPr>
-        <p:txBody>
-          <a:bodyPr wrap="square" anchor="ctr">
-            <a:spAutoFit/>
-          </a:bodyPr>
-          <a:lstStyle/>
-          <a:p>
             <a:pPr algn="l"/>
             <a:r>
-              <a:rPr sz="1300" b="0">
+              <a:rPr sz="1200" b="0">
                 <a:solidFill>
                   <a:srgbClr val="333333"/>
                 </a:solidFill>
@@ -7544,817 +12798,7 @@
                 <a:ea typeface="Open Sans"/>
                 <a:cs typeface="Open Sans"/>
               </a:rPr>
-              <a:t>Остановите сильное кровотечение.</a:t>
-            </a:r>
-          </a:p>
-        </p:txBody>
-      </p:sp>
-      <p:sp>
-        <p:nvSpPr>
-          <p:cNvPr id="12" name="Oval 11"/>
-          <p:cNvSpPr/>
-          <p:nvPr/>
-        </p:nvSpPr>
-        <p:spPr>
-          <a:xfrm>
-            <a:off x="700000" y="2320000"/>
-            <a:ext cx="550000" cy="550000"/>
-          </a:xfrm>
-          <a:prstGeom prst="ellipse">
-            <a:avLst/>
-          </a:prstGeom>
-          <a:solidFill>
-            <a:srgbClr val="555555"/>
-          </a:solidFill>
-          <a:ln>
-            <a:noFill/>
-          </a:ln>
-        </p:spPr>
-        <p:style>
-          <a:lnRef idx="1">
-            <a:schemeClr val="accent1"/>
-          </a:lnRef>
-          <a:fillRef idx="3">
-            <a:schemeClr val="accent1"/>
-          </a:fillRef>
-          <a:effectRef idx="2">
-            <a:schemeClr val="accent1"/>
-          </a:effectRef>
-          <a:fontRef idx="minor">
-            <a:schemeClr val="lt1"/>
-          </a:fontRef>
-        </p:style>
-        <p:txBody>
-          <a:bodyPr rtlCol="0" anchor="ctr"/>
-          <a:lstStyle/>
-          <a:p>
-            <a:pPr algn="ctr"/>
-          </a:p>
-        </p:txBody>
-      </p:sp>
-      <p:sp>
-        <p:nvSpPr>
-          <p:cNvPr id="13" name="TextBox 12"/>
-          <p:cNvSpPr txBox="1"/>
-          <p:nvPr/>
-        </p:nvSpPr>
-        <p:spPr>
-          <a:xfrm>
-            <a:off x="700000" y="2320000"/>
-            <a:ext cx="550000" cy="550000"/>
-          </a:xfrm>
-          <a:prstGeom prst="rect">
-            <a:avLst/>
-          </a:prstGeom>
-          <a:noFill/>
-        </p:spPr>
-        <p:txBody>
-          <a:bodyPr wrap="square" anchor="ctr">
-            <a:spAutoFit/>
-          </a:bodyPr>
-          <a:lstStyle/>
-          <a:p>
-            <a:pPr algn="ctr"/>
-            <a:r>
-              <a:rPr sz="1400" b="1">
-                <a:solidFill>
-                  <a:srgbClr val="FFFFFF"/>
-                </a:solidFill>
-                <a:latin typeface="Open Sans"/>
-                <a:ea typeface="Open Sans"/>
-                <a:cs typeface="Open Sans"/>
-              </a:rPr>
-              <a:t>2</a:t>
-            </a:r>
-          </a:p>
-        </p:txBody>
-      </p:sp>
-      <p:sp>
-        <p:nvSpPr>
-          <p:cNvPr id="14" name="Rectangle 13"/>
-          <p:cNvSpPr/>
-          <p:nvPr/>
-        </p:nvSpPr>
-        <p:spPr>
-          <a:xfrm>
-            <a:off x="1450000" y="2320000"/>
-            <a:ext cx="10500000" cy="550000"/>
-          </a:xfrm>
-          <a:prstGeom prst="rect">
-            <a:avLst/>
-          </a:prstGeom>
-          <a:solidFill>
-            <a:srgbClr val="FFFFFF"/>
-          </a:solidFill>
-          <a:ln w="12700">
-            <a:solidFill>
-              <a:srgbClr val="999999"/>
-            </a:solidFill>
-          </a:ln>
-        </p:spPr>
-        <p:style>
-          <a:lnRef idx="1">
-            <a:schemeClr val="accent1"/>
-          </a:lnRef>
-          <a:fillRef idx="3">
-            <a:schemeClr val="accent1"/>
-          </a:fillRef>
-          <a:effectRef idx="2">
-            <a:schemeClr val="accent1"/>
-          </a:effectRef>
-          <a:fontRef idx="minor">
-            <a:schemeClr val="lt1"/>
-          </a:fontRef>
-        </p:style>
-        <p:txBody>
-          <a:bodyPr rtlCol="0" anchor="ctr"/>
-          <a:lstStyle/>
-          <a:p>
-            <a:pPr algn="ctr"/>
-          </a:p>
-        </p:txBody>
-      </p:sp>
-      <p:sp>
-        <p:nvSpPr>
-          <p:cNvPr id="15" name="TextBox 14"/>
-          <p:cNvSpPr txBox="1"/>
-          <p:nvPr/>
-        </p:nvSpPr>
-        <p:spPr>
-          <a:xfrm>
-            <a:off x="1650000" y="2320000"/>
-            <a:ext cx="10100000" cy="550000"/>
-          </a:xfrm>
-          <a:prstGeom prst="rect">
-            <a:avLst/>
-          </a:prstGeom>
-          <a:noFill/>
-        </p:spPr>
-        <p:txBody>
-          <a:bodyPr wrap="square" anchor="ctr">
-            <a:spAutoFit/>
-          </a:bodyPr>
-          <a:lstStyle/>
-          <a:p>
-            <a:pPr algn="l"/>
-            <a:r>
-              <a:rPr sz="1300" b="0">
-                <a:solidFill>
-                  <a:srgbClr val="333333"/>
-                </a:solidFill>
-                <a:latin typeface="Open Sans"/>
-                <a:ea typeface="Open Sans"/>
-                <a:cs typeface="Open Sans"/>
-              </a:rPr>
-              <a:t>Закройте рану повязкой.</a:t>
-            </a:r>
-          </a:p>
-        </p:txBody>
-      </p:sp>
-      <p:sp>
-        <p:nvSpPr>
-          <p:cNvPr id="16" name="Oval 15"/>
-          <p:cNvSpPr/>
-          <p:nvPr/>
-        </p:nvSpPr>
-        <p:spPr>
-          <a:xfrm>
-            <a:off x="700000" y="3190000"/>
-            <a:ext cx="550000" cy="550000"/>
-          </a:xfrm>
-          <a:prstGeom prst="ellipse">
-            <a:avLst/>
-          </a:prstGeom>
-          <a:solidFill>
-            <a:srgbClr val="555555"/>
-          </a:solidFill>
-          <a:ln>
-            <a:noFill/>
-          </a:ln>
-        </p:spPr>
-        <p:style>
-          <a:lnRef idx="1">
-            <a:schemeClr val="accent1"/>
-          </a:lnRef>
-          <a:fillRef idx="3">
-            <a:schemeClr val="accent1"/>
-          </a:fillRef>
-          <a:effectRef idx="2">
-            <a:schemeClr val="accent1"/>
-          </a:effectRef>
-          <a:fontRef idx="minor">
-            <a:schemeClr val="lt1"/>
-          </a:fontRef>
-        </p:style>
-        <p:txBody>
-          <a:bodyPr rtlCol="0" anchor="ctr"/>
-          <a:lstStyle/>
-          <a:p>
-            <a:pPr algn="ctr"/>
-          </a:p>
-        </p:txBody>
-      </p:sp>
-      <p:sp>
-        <p:nvSpPr>
-          <p:cNvPr id="17" name="TextBox 16"/>
-          <p:cNvSpPr txBox="1"/>
-          <p:nvPr/>
-        </p:nvSpPr>
-        <p:spPr>
-          <a:xfrm>
-            <a:off x="700000" y="3190000"/>
-            <a:ext cx="550000" cy="550000"/>
-          </a:xfrm>
-          <a:prstGeom prst="rect">
-            <a:avLst/>
-          </a:prstGeom>
-          <a:noFill/>
-        </p:spPr>
-        <p:txBody>
-          <a:bodyPr wrap="square" anchor="ctr">
-            <a:spAutoFit/>
-          </a:bodyPr>
-          <a:lstStyle/>
-          <a:p>
-            <a:pPr algn="ctr"/>
-            <a:r>
-              <a:rPr sz="1400" b="1">
-                <a:solidFill>
-                  <a:srgbClr val="FFFFFF"/>
-                </a:solidFill>
-                <a:latin typeface="Open Sans"/>
-                <a:ea typeface="Open Sans"/>
-                <a:cs typeface="Open Sans"/>
-              </a:rPr>
-              <a:t>3</a:t>
-            </a:r>
-          </a:p>
-        </p:txBody>
-      </p:sp>
-      <p:sp>
-        <p:nvSpPr>
-          <p:cNvPr id="18" name="Rectangle 17"/>
-          <p:cNvSpPr/>
-          <p:nvPr/>
-        </p:nvSpPr>
-        <p:spPr>
-          <a:xfrm>
-            <a:off x="1450000" y="3190000"/>
-            <a:ext cx="10500000" cy="550000"/>
-          </a:xfrm>
-          <a:prstGeom prst="rect">
-            <a:avLst/>
-          </a:prstGeom>
-          <a:solidFill>
-            <a:srgbClr val="FFFFFF"/>
-          </a:solidFill>
-          <a:ln w="12700">
-            <a:solidFill>
-              <a:srgbClr val="999999"/>
-            </a:solidFill>
-          </a:ln>
-        </p:spPr>
-        <p:style>
-          <a:lnRef idx="1">
-            <a:schemeClr val="accent1"/>
-          </a:lnRef>
-          <a:fillRef idx="3">
-            <a:schemeClr val="accent1"/>
-          </a:fillRef>
-          <a:effectRef idx="2">
-            <a:schemeClr val="accent1"/>
-          </a:effectRef>
-          <a:fontRef idx="minor">
-            <a:schemeClr val="lt1"/>
-          </a:fontRef>
-        </p:style>
-        <p:txBody>
-          <a:bodyPr rtlCol="0" anchor="ctr"/>
-          <a:lstStyle/>
-          <a:p>
-            <a:pPr algn="ctr"/>
-          </a:p>
-        </p:txBody>
-      </p:sp>
-      <p:sp>
-        <p:nvSpPr>
-          <p:cNvPr id="19" name="TextBox 18"/>
-          <p:cNvSpPr txBox="1"/>
-          <p:nvPr/>
-        </p:nvSpPr>
-        <p:spPr>
-          <a:xfrm>
-            <a:off x="1650000" y="3190000"/>
-            <a:ext cx="10100000" cy="550000"/>
-          </a:xfrm>
-          <a:prstGeom prst="rect">
-            <a:avLst/>
-          </a:prstGeom>
-          <a:noFill/>
-        </p:spPr>
-        <p:txBody>
-          <a:bodyPr wrap="square" anchor="ctr">
-            <a:spAutoFit/>
-          </a:bodyPr>
-          <a:lstStyle/>
-          <a:p>
-            <a:pPr algn="l"/>
-            <a:r>
-              <a:rPr sz="1300" b="0">
-                <a:solidFill>
-                  <a:srgbClr val="333333"/>
-                </a:solidFill>
-                <a:latin typeface="Open Sans"/>
-                <a:ea typeface="Open Sans"/>
-                <a:cs typeface="Open Sans"/>
-              </a:rPr>
-              <a:t>Не исправляйте деформацию.</a:t>
-            </a:r>
-          </a:p>
-        </p:txBody>
-      </p:sp>
-      <p:sp>
-        <p:nvSpPr>
-          <p:cNvPr id="20" name="Oval 19"/>
-          <p:cNvSpPr/>
-          <p:nvPr/>
-        </p:nvSpPr>
-        <p:spPr>
-          <a:xfrm>
-            <a:off x="700000" y="4060000"/>
-            <a:ext cx="550000" cy="550000"/>
-          </a:xfrm>
-          <a:prstGeom prst="ellipse">
-            <a:avLst/>
-          </a:prstGeom>
-          <a:solidFill>
-            <a:srgbClr val="555555"/>
-          </a:solidFill>
-          <a:ln>
-            <a:noFill/>
-          </a:ln>
-        </p:spPr>
-        <p:style>
-          <a:lnRef idx="1">
-            <a:schemeClr val="accent1"/>
-          </a:lnRef>
-          <a:fillRef idx="3">
-            <a:schemeClr val="accent1"/>
-          </a:fillRef>
-          <a:effectRef idx="2">
-            <a:schemeClr val="accent1"/>
-          </a:effectRef>
-          <a:fontRef idx="minor">
-            <a:schemeClr val="lt1"/>
-          </a:fontRef>
-        </p:style>
-        <p:txBody>
-          <a:bodyPr rtlCol="0" anchor="ctr"/>
-          <a:lstStyle/>
-          <a:p>
-            <a:pPr algn="ctr"/>
-          </a:p>
-        </p:txBody>
-      </p:sp>
-      <p:sp>
-        <p:nvSpPr>
-          <p:cNvPr id="21" name="TextBox 20"/>
-          <p:cNvSpPr txBox="1"/>
-          <p:nvPr/>
-        </p:nvSpPr>
-        <p:spPr>
-          <a:xfrm>
-            <a:off x="700000" y="4060000"/>
-            <a:ext cx="550000" cy="550000"/>
-          </a:xfrm>
-          <a:prstGeom prst="rect">
-            <a:avLst/>
-          </a:prstGeom>
-          <a:noFill/>
-        </p:spPr>
-        <p:txBody>
-          <a:bodyPr wrap="square" anchor="ctr">
-            <a:spAutoFit/>
-          </a:bodyPr>
-          <a:lstStyle/>
-          <a:p>
-            <a:pPr algn="ctr"/>
-            <a:r>
-              <a:rPr sz="1400" b="1">
-                <a:solidFill>
-                  <a:srgbClr val="FFFFFF"/>
-                </a:solidFill>
-                <a:latin typeface="Open Sans"/>
-                <a:ea typeface="Open Sans"/>
-                <a:cs typeface="Open Sans"/>
-              </a:rPr>
-              <a:t>4</a:t>
-            </a:r>
-          </a:p>
-        </p:txBody>
-      </p:sp>
-      <p:sp>
-        <p:nvSpPr>
-          <p:cNvPr id="22" name="Rectangle 21"/>
-          <p:cNvSpPr/>
-          <p:nvPr/>
-        </p:nvSpPr>
-        <p:spPr>
-          <a:xfrm>
-            <a:off x="1450000" y="4060000"/>
-            <a:ext cx="10500000" cy="550000"/>
-          </a:xfrm>
-          <a:prstGeom prst="rect">
-            <a:avLst/>
-          </a:prstGeom>
-          <a:solidFill>
-            <a:srgbClr val="FFFFFF"/>
-          </a:solidFill>
-          <a:ln w="12700">
-            <a:solidFill>
-              <a:srgbClr val="999999"/>
-            </a:solidFill>
-          </a:ln>
-        </p:spPr>
-        <p:style>
-          <a:lnRef idx="1">
-            <a:schemeClr val="accent1"/>
-          </a:lnRef>
-          <a:fillRef idx="3">
-            <a:schemeClr val="accent1"/>
-          </a:fillRef>
-          <a:effectRef idx="2">
-            <a:schemeClr val="accent1"/>
-          </a:effectRef>
-          <a:fontRef idx="minor">
-            <a:schemeClr val="lt1"/>
-          </a:fontRef>
-        </p:style>
-        <p:txBody>
-          <a:bodyPr rtlCol="0" anchor="ctr"/>
-          <a:lstStyle/>
-          <a:p>
-            <a:pPr algn="ctr"/>
-          </a:p>
-        </p:txBody>
-      </p:sp>
-      <p:sp>
-        <p:nvSpPr>
-          <p:cNvPr id="23" name="TextBox 22"/>
-          <p:cNvSpPr txBox="1"/>
-          <p:nvPr/>
-        </p:nvSpPr>
-        <p:spPr>
-          <a:xfrm>
-            <a:off x="1650000" y="4060000"/>
-            <a:ext cx="10100000" cy="550000"/>
-          </a:xfrm>
-          <a:prstGeom prst="rect">
-            <a:avLst/>
-          </a:prstGeom>
-          <a:noFill/>
-        </p:spPr>
-        <p:txBody>
-          <a:bodyPr wrap="square" anchor="ctr">
-            <a:spAutoFit/>
-          </a:bodyPr>
-          <a:lstStyle/>
-          <a:p>
-            <a:pPr algn="l"/>
-            <a:r>
-              <a:rPr sz="1300" b="0">
-                <a:solidFill>
-                  <a:srgbClr val="333333"/>
-                </a:solidFill>
-                <a:latin typeface="Open Sans"/>
-                <a:ea typeface="Open Sans"/>
-                <a:cs typeface="Open Sans"/>
-              </a:rPr>
-              <a:t>Обездвижьте поврежденную часть.</a:t>
-            </a:r>
-          </a:p>
-        </p:txBody>
-      </p:sp>
-      <p:sp>
-        <p:nvSpPr>
-          <p:cNvPr id="24" name="Oval 23"/>
-          <p:cNvSpPr/>
-          <p:nvPr/>
-        </p:nvSpPr>
-        <p:spPr>
-          <a:xfrm>
-            <a:off x="700000" y="4930000"/>
-            <a:ext cx="550000" cy="550000"/>
-          </a:xfrm>
-          <a:prstGeom prst="ellipse">
-            <a:avLst/>
-          </a:prstGeom>
-          <a:solidFill>
-            <a:srgbClr val="555555"/>
-          </a:solidFill>
-          <a:ln>
-            <a:noFill/>
-          </a:ln>
-        </p:spPr>
-        <p:style>
-          <a:lnRef idx="1">
-            <a:schemeClr val="accent1"/>
-          </a:lnRef>
-          <a:fillRef idx="3">
-            <a:schemeClr val="accent1"/>
-          </a:fillRef>
-          <a:effectRef idx="2">
-            <a:schemeClr val="accent1"/>
-          </a:effectRef>
-          <a:fontRef idx="minor">
-            <a:schemeClr val="lt1"/>
-          </a:fontRef>
-        </p:style>
-        <p:txBody>
-          <a:bodyPr rtlCol="0" anchor="ctr"/>
-          <a:lstStyle/>
-          <a:p>
-            <a:pPr algn="ctr"/>
-          </a:p>
-        </p:txBody>
-      </p:sp>
-      <p:sp>
-        <p:nvSpPr>
-          <p:cNvPr id="25" name="TextBox 24"/>
-          <p:cNvSpPr txBox="1"/>
-          <p:nvPr/>
-        </p:nvSpPr>
-        <p:spPr>
-          <a:xfrm>
-            <a:off x="700000" y="4930000"/>
-            <a:ext cx="550000" cy="550000"/>
-          </a:xfrm>
-          <a:prstGeom prst="rect">
-            <a:avLst/>
-          </a:prstGeom>
-          <a:noFill/>
-        </p:spPr>
-        <p:txBody>
-          <a:bodyPr wrap="square" anchor="ctr">
-            <a:spAutoFit/>
-          </a:bodyPr>
-          <a:lstStyle/>
-          <a:p>
-            <a:pPr algn="ctr"/>
-            <a:r>
-              <a:rPr sz="1400" b="1">
-                <a:solidFill>
-                  <a:srgbClr val="FFFFFF"/>
-                </a:solidFill>
-                <a:latin typeface="Open Sans"/>
-                <a:ea typeface="Open Sans"/>
-                <a:cs typeface="Open Sans"/>
-              </a:rPr>
-              <a:t>5</a:t>
-            </a:r>
-          </a:p>
-        </p:txBody>
-      </p:sp>
-      <p:sp>
-        <p:nvSpPr>
-          <p:cNvPr id="26" name="Rectangle 25"/>
-          <p:cNvSpPr/>
-          <p:nvPr/>
-        </p:nvSpPr>
-        <p:spPr>
-          <a:xfrm>
-            <a:off x="1450000" y="4930000"/>
-            <a:ext cx="10500000" cy="550000"/>
-          </a:xfrm>
-          <a:prstGeom prst="rect">
-            <a:avLst/>
-          </a:prstGeom>
-          <a:solidFill>
-            <a:srgbClr val="FFFFFF"/>
-          </a:solidFill>
-          <a:ln w="12700">
-            <a:solidFill>
-              <a:srgbClr val="999999"/>
-            </a:solidFill>
-          </a:ln>
-        </p:spPr>
-        <p:style>
-          <a:lnRef idx="1">
-            <a:schemeClr val="accent1"/>
-          </a:lnRef>
-          <a:fillRef idx="3">
-            <a:schemeClr val="accent1"/>
-          </a:fillRef>
-          <a:effectRef idx="2">
-            <a:schemeClr val="accent1"/>
-          </a:effectRef>
-          <a:fontRef idx="minor">
-            <a:schemeClr val="lt1"/>
-          </a:fontRef>
-        </p:style>
-        <p:txBody>
-          <a:bodyPr rtlCol="0" anchor="ctr"/>
-          <a:lstStyle/>
-          <a:p>
-            <a:pPr algn="ctr"/>
-          </a:p>
-        </p:txBody>
-      </p:sp>
-      <p:sp>
-        <p:nvSpPr>
-          <p:cNvPr id="27" name="TextBox 26"/>
-          <p:cNvSpPr txBox="1"/>
-          <p:nvPr/>
-        </p:nvSpPr>
-        <p:spPr>
-          <a:xfrm>
-            <a:off x="1650000" y="4930000"/>
-            <a:ext cx="10100000" cy="550000"/>
-          </a:xfrm>
-          <a:prstGeom prst="rect">
-            <a:avLst/>
-          </a:prstGeom>
-          <a:noFill/>
-        </p:spPr>
-        <p:txBody>
-          <a:bodyPr wrap="square" anchor="ctr">
-            <a:spAutoFit/>
-          </a:bodyPr>
-          <a:lstStyle/>
-          <a:p>
-            <a:pPr algn="l"/>
-            <a:r>
-              <a:rPr sz="1300" b="0">
-                <a:solidFill>
-                  <a:srgbClr val="333333"/>
-                </a:solidFill>
-                <a:latin typeface="Open Sans"/>
-                <a:ea typeface="Open Sans"/>
-                <a:cs typeface="Open Sans"/>
-              </a:rPr>
-              <a:t>При отсутствии шины прибинтуйте руку к туловищу, ногу — к здоровой ноге.</a:t>
-            </a:r>
-          </a:p>
-        </p:txBody>
-      </p:sp>
-      <p:sp>
-        <p:nvSpPr>
-          <p:cNvPr id="28" name="Oval 27"/>
-          <p:cNvSpPr/>
-          <p:nvPr/>
-        </p:nvSpPr>
-        <p:spPr>
-          <a:xfrm>
-            <a:off x="700000" y="5800000"/>
-            <a:ext cx="550000" cy="550000"/>
-          </a:xfrm>
-          <a:prstGeom prst="ellipse">
-            <a:avLst/>
-          </a:prstGeom>
-          <a:solidFill>
-            <a:srgbClr val="555555"/>
-          </a:solidFill>
-          <a:ln>
-            <a:noFill/>
-          </a:ln>
-        </p:spPr>
-        <p:style>
-          <a:lnRef idx="1">
-            <a:schemeClr val="accent1"/>
-          </a:lnRef>
-          <a:fillRef idx="3">
-            <a:schemeClr val="accent1"/>
-          </a:fillRef>
-          <a:effectRef idx="2">
-            <a:schemeClr val="accent1"/>
-          </a:effectRef>
-          <a:fontRef idx="minor">
-            <a:schemeClr val="lt1"/>
-          </a:fontRef>
-        </p:style>
-        <p:txBody>
-          <a:bodyPr rtlCol="0" anchor="ctr"/>
-          <a:lstStyle/>
-          <a:p>
-            <a:pPr algn="ctr"/>
-          </a:p>
-        </p:txBody>
-      </p:sp>
-      <p:sp>
-        <p:nvSpPr>
-          <p:cNvPr id="29" name="TextBox 28"/>
-          <p:cNvSpPr txBox="1"/>
-          <p:nvPr/>
-        </p:nvSpPr>
-        <p:spPr>
-          <a:xfrm>
-            <a:off x="700000" y="5800000"/>
-            <a:ext cx="550000" cy="550000"/>
-          </a:xfrm>
-          <a:prstGeom prst="rect">
-            <a:avLst/>
-          </a:prstGeom>
-          <a:noFill/>
-        </p:spPr>
-        <p:txBody>
-          <a:bodyPr wrap="square" anchor="ctr">
-            <a:spAutoFit/>
-          </a:bodyPr>
-          <a:lstStyle/>
-          <a:p>
-            <a:pPr algn="ctr"/>
-            <a:r>
-              <a:rPr sz="1400" b="1">
-                <a:solidFill>
-                  <a:srgbClr val="FFFFFF"/>
-                </a:solidFill>
-                <a:latin typeface="Open Sans"/>
-                <a:ea typeface="Open Sans"/>
-                <a:cs typeface="Open Sans"/>
-              </a:rPr>
-              <a:t>6</a:t>
-            </a:r>
-          </a:p>
-        </p:txBody>
-      </p:sp>
-      <p:sp>
-        <p:nvSpPr>
-          <p:cNvPr id="30" name="Rectangle 29"/>
-          <p:cNvSpPr/>
-          <p:nvPr/>
-        </p:nvSpPr>
-        <p:spPr>
-          <a:xfrm>
-            <a:off x="1450000" y="5800000"/>
-            <a:ext cx="10500000" cy="550000"/>
-          </a:xfrm>
-          <a:prstGeom prst="rect">
-            <a:avLst/>
-          </a:prstGeom>
-          <a:solidFill>
-            <a:srgbClr val="FFFFFF"/>
-          </a:solidFill>
-          <a:ln w="12700">
-            <a:solidFill>
-              <a:srgbClr val="999999"/>
-            </a:solidFill>
-          </a:ln>
-        </p:spPr>
-        <p:style>
-          <a:lnRef idx="1">
-            <a:schemeClr val="accent1"/>
-          </a:lnRef>
-          <a:fillRef idx="3">
-            <a:schemeClr val="accent1"/>
-          </a:fillRef>
-          <a:effectRef idx="2">
-            <a:schemeClr val="accent1"/>
-          </a:effectRef>
-          <a:fontRef idx="minor">
-            <a:schemeClr val="lt1"/>
-          </a:fontRef>
-        </p:style>
-        <p:txBody>
-          <a:bodyPr rtlCol="0" anchor="ctr"/>
-          <a:lstStyle/>
-          <a:p>
-            <a:pPr algn="ctr"/>
-          </a:p>
-        </p:txBody>
-      </p:sp>
-      <p:sp>
-        <p:nvSpPr>
-          <p:cNvPr id="31" name="TextBox 30"/>
-          <p:cNvSpPr txBox="1"/>
-          <p:nvPr/>
-        </p:nvSpPr>
-        <p:spPr>
-          <a:xfrm>
-            <a:off x="1650000" y="5800000"/>
-            <a:ext cx="10100000" cy="550000"/>
-          </a:xfrm>
-          <a:prstGeom prst="rect">
-            <a:avLst/>
-          </a:prstGeom>
-          <a:noFill/>
-        </p:spPr>
-        <p:txBody>
-          <a:bodyPr wrap="square" anchor="ctr">
-            <a:spAutoFit/>
-          </a:bodyPr>
-          <a:lstStyle/>
-          <a:p>
-            <a:pPr algn="l"/>
-            <a:r>
-              <a:rPr sz="1300" b="0">
-                <a:solidFill>
-                  <a:srgbClr val="333333"/>
-                </a:solidFill>
-                <a:latin typeface="Open Sans"/>
-                <a:ea typeface="Open Sans"/>
-                <a:cs typeface="Open Sans"/>
-              </a:rPr>
-              <a:t>После фиксации проверьте цвет, тепло и чувствительность пальцев.</a:t>
+              <a:t>Осмотрите доступную поверхность груди: входная и выходная раны могут находиться с разных сторон.</a:t>
             </a:r>
           </a:p>
         </p:txBody>
@@ -8452,7 +12896,7 @@
                 <a:ea typeface="Open Sans"/>
                 <a:cs typeface="Open Sans"/>
               </a:rPr>
-              <a:t>ГЛАВНОЕ ЗАПОМНИТЬ</a:t>
+              <a:t>ТРАВМА РЕБЕР: ПОЛОЖЕНИЕ ПОЛУСИДЯ</a:t>
             </a:r>
           </a:p>
         </p:txBody>
@@ -8617,27 +13061,162 @@
           </a:p>
         </p:txBody>
       </p:sp>
-      <p:sp>
-        <p:nvSpPr>
-          <p:cNvPr id="8" name="Rectangle 7"/>
+      <p:pic>
+        <p:nvPicPr>
+          <p:cNvPr id="8" name="Picture 7" descr="fig69.jpeg"/>
+          <p:cNvPicPr>
+            <a:picLocks noChangeAspect="1"/>
+          </p:cNvPicPr>
+          <p:nvPr/>
+        </p:nvPicPr>
+        <p:blipFill>
+          <a:blip r:embed="rId2"/>
+          <a:stretch>
+            <a:fillRect/>
+          </a:stretch>
+        </p:blipFill>
+        <p:spPr>
+          <a:xfrm>
+            <a:off x="1619355" y="1450000"/>
+            <a:ext cx="2961290" cy="4000000"/>
+          </a:xfrm>
+          <a:prstGeom prst="rect">
+            <a:avLst/>
+          </a:prstGeom>
+        </p:spPr>
+      </p:pic>
+      <p:sp>
+        <p:nvSpPr>
+          <p:cNvPr id="9" name="TextBox 8"/>
+          <p:cNvSpPr txBox="1"/>
+          <p:nvPr/>
+        </p:nvSpPr>
+        <p:spPr>
+          <a:xfrm>
+            <a:off x="6000000" y="1450000"/>
+            <a:ext cx="6200000" cy="3800000"/>
+          </a:xfrm>
+          <a:prstGeom prst="rect">
+            <a:avLst/>
+          </a:prstGeom>
+          <a:noFill/>
+        </p:spPr>
+        <p:txBody>
+          <a:bodyPr wrap="square">
+            <a:spAutoFit/>
+          </a:bodyPr>
+          <a:lstStyle/>
+          <a:p>
+            <a:pPr algn="l">
+              <a:spcAft>
+                <a:spcPts val="800"/>
+              </a:spcAft>
+            </a:pPr>
+            <a:r>
+              <a:rPr sz="1300" b="0">
+                <a:solidFill>
+                  <a:srgbClr val="333333"/>
+                </a:solidFill>
+                <a:latin typeface="Open Sans"/>
+                <a:ea typeface="Open Sans"/>
+                <a:cs typeface="Open Sans"/>
+              </a:rPr>
+              <a:t>•  Помогите пострадавшему занять полусидячее положение с опорой.</a:t>
+            </a:r>
+          </a:p>
+          <a:p>
+            <a:pPr algn="l">
+              <a:spcAft>
+                <a:spcPts val="800"/>
+              </a:spcAft>
+            </a:pPr>
+            <a:r>
+              <a:rPr sz="1300" b="0">
+                <a:solidFill>
+                  <a:srgbClr val="333333"/>
+                </a:solidFill>
+                <a:latin typeface="Open Sans"/>
+                <a:ea typeface="Open Sans"/>
+                <a:cs typeface="Open Sans"/>
+              </a:rPr>
+              <a:t>•  По возможности наклоните его в сторону повреждения.</a:t>
+            </a:r>
+          </a:p>
+          <a:p>
+            <a:pPr algn="l">
+              <a:spcAft>
+                <a:spcPts val="800"/>
+              </a:spcAft>
+            </a:pPr>
+            <a:r>
+              <a:rPr sz="1300" b="0">
+                <a:solidFill>
+                  <a:srgbClr val="333333"/>
+                </a:solidFill>
+                <a:latin typeface="Open Sans"/>
+                <a:ea typeface="Open Sans"/>
+                <a:cs typeface="Open Sans"/>
+              </a:rPr>
+              <a:t>•  Разрешите придерживать болезненное место рукой или мягким материалом.</a:t>
+            </a:r>
+          </a:p>
+          <a:p>
+            <a:pPr algn="l">
+              <a:spcAft>
+                <a:spcPts val="800"/>
+              </a:spcAft>
+            </a:pPr>
+            <a:r>
+              <a:rPr sz="1300" b="0">
+                <a:solidFill>
+                  <a:srgbClr val="333333"/>
+                </a:solidFill>
+                <a:latin typeface="Open Sans"/>
+                <a:ea typeface="Open Sans"/>
+                <a:cs typeface="Open Sans"/>
+              </a:rPr>
+              <a:t>•  Не стягивайте грудную клетку тугой круговой повязкой.</a:t>
+            </a:r>
+          </a:p>
+          <a:p>
+            <a:pPr algn="l">
+              <a:spcAft>
+                <a:spcPts val="800"/>
+              </a:spcAft>
+            </a:pPr>
+            <a:r>
+              <a:rPr sz="1300" b="0">
+                <a:solidFill>
+                  <a:srgbClr val="333333"/>
+                </a:solidFill>
+                <a:latin typeface="Open Sans"/>
+                <a:ea typeface="Open Sans"/>
+                <a:cs typeface="Open Sans"/>
+              </a:rPr>
+              <a:t>•  Контролируйте дыхание: его затруднение может указывать на повреждение органов груди.</a:t>
+            </a:r>
+          </a:p>
+        </p:txBody>
+      </p:sp>
+      <p:sp>
+        <p:nvSpPr>
+          <p:cNvPr id="10" name="Rounded Rectangle 9"/>
           <p:cNvSpPr/>
           <p:nvPr/>
         </p:nvSpPr>
         <p:spPr>
           <a:xfrm>
-            <a:off x="700000" y="1450000"/>
-            <a:ext cx="11000000" cy="833333"/>
-          </a:xfrm>
-          <a:prstGeom prst="rect">
+            <a:off x="6000000" y="5400000"/>
+            <a:ext cx="6200000" cy="1100000"/>
+          </a:xfrm>
+          <a:prstGeom prst="roundRect">
             <a:avLst/>
           </a:prstGeom>
           <a:solidFill>
-            <a:srgbClr val="FFFFFF"/>
+            <a:srgbClr val="F5F0E1"/>
           </a:solidFill>
-          <a:ln w="12700">
-            <a:solidFill>
-              <a:srgbClr val="999999"/>
-            </a:solidFill>
+          <a:ln>
+            <a:noFill/>
           </a:ln>
         </p:spPr>
         <p:style>
@@ -8664,57 +13243,14 @@
       </p:sp>
       <p:sp>
         <p:nvSpPr>
-          <p:cNvPr id="9" name="Rectangle 8"/>
-          <p:cNvSpPr/>
-          <p:nvPr/>
-        </p:nvSpPr>
-        <p:spPr>
-          <a:xfrm>
-            <a:off x="700000" y="1450000"/>
-            <a:ext cx="90000" cy="833333"/>
-          </a:xfrm>
-          <a:prstGeom prst="rect">
-            <a:avLst/>
-          </a:prstGeom>
-          <a:solidFill>
-            <a:srgbClr val="CC0000"/>
-          </a:solidFill>
-          <a:ln>
-            <a:noFill/>
-          </a:ln>
-        </p:spPr>
-        <p:style>
-          <a:lnRef idx="1">
-            <a:schemeClr val="accent1"/>
-          </a:lnRef>
-          <a:fillRef idx="3">
-            <a:schemeClr val="accent1"/>
-          </a:fillRef>
-          <a:effectRef idx="2">
-            <a:schemeClr val="accent1"/>
-          </a:effectRef>
-          <a:fontRef idx="minor">
-            <a:schemeClr val="lt1"/>
-          </a:fontRef>
-        </p:style>
-        <p:txBody>
-          <a:bodyPr rtlCol="0" anchor="ctr"/>
-          <a:lstStyle/>
-          <a:p>
-            <a:pPr algn="ctr"/>
-          </a:p>
-        </p:txBody>
-      </p:sp>
-      <p:sp>
-        <p:nvSpPr>
-          <p:cNvPr id="10" name="TextBox 9"/>
+          <p:cNvPr id="11" name="TextBox 10"/>
           <p:cNvSpPr txBox="1"/>
           <p:nvPr/>
         </p:nvSpPr>
         <p:spPr>
           <a:xfrm>
-            <a:off x="1000000" y="1550000"/>
-            <a:ext cx="10400000" cy="633333"/>
+            <a:off x="6250000" y="5600000"/>
+            <a:ext cx="5700000" cy="700000"/>
           </a:xfrm>
           <a:prstGeom prst="rect">
             <a:avLst/>
@@ -8729,7 +13265,7 @@
           <a:p>
             <a:pPr algn="l"/>
             <a:r>
-              <a:rPr sz="1300" b="0">
+              <a:rPr sz="1200" b="0">
                 <a:solidFill>
                   <a:srgbClr val="333333"/>
                 </a:solidFill>
@@ -8737,632 +13273,7 @@
                 <a:ea typeface="Open Sans"/>
                 <a:cs typeface="Open Sans"/>
               </a:rPr>
-              <a:t>Сначала остановите кровотечение</a:t>
-            </a:r>
-          </a:p>
-        </p:txBody>
-      </p:sp>
-      <p:sp>
-        <p:nvSpPr>
-          <p:cNvPr id="11" name="Rectangle 10"/>
-          <p:cNvSpPr/>
-          <p:nvPr/>
-        </p:nvSpPr>
-        <p:spPr>
-          <a:xfrm>
-            <a:off x="700000" y="2383333"/>
-            <a:ext cx="11000000" cy="833333"/>
-          </a:xfrm>
-          <a:prstGeom prst="rect">
-            <a:avLst/>
-          </a:prstGeom>
-          <a:solidFill>
-            <a:srgbClr val="FFFFFF"/>
-          </a:solidFill>
-          <a:ln w="12700">
-            <a:solidFill>
-              <a:srgbClr val="999999"/>
-            </a:solidFill>
-          </a:ln>
-        </p:spPr>
-        <p:style>
-          <a:lnRef idx="1">
-            <a:schemeClr val="accent1"/>
-          </a:lnRef>
-          <a:fillRef idx="3">
-            <a:schemeClr val="accent1"/>
-          </a:fillRef>
-          <a:effectRef idx="2">
-            <a:schemeClr val="accent1"/>
-          </a:effectRef>
-          <a:fontRef idx="minor">
-            <a:schemeClr val="lt1"/>
-          </a:fontRef>
-        </p:style>
-        <p:txBody>
-          <a:bodyPr rtlCol="0" anchor="ctr"/>
-          <a:lstStyle/>
-          <a:p>
-            <a:pPr algn="ctr"/>
-          </a:p>
-        </p:txBody>
-      </p:sp>
-      <p:sp>
-        <p:nvSpPr>
-          <p:cNvPr id="12" name="Rectangle 11"/>
-          <p:cNvSpPr/>
-          <p:nvPr/>
-        </p:nvSpPr>
-        <p:spPr>
-          <a:xfrm>
-            <a:off x="700000" y="2383333"/>
-            <a:ext cx="90000" cy="833333"/>
-          </a:xfrm>
-          <a:prstGeom prst="rect">
-            <a:avLst/>
-          </a:prstGeom>
-          <a:solidFill>
-            <a:srgbClr val="CC0000"/>
-          </a:solidFill>
-          <a:ln>
-            <a:noFill/>
-          </a:ln>
-        </p:spPr>
-        <p:style>
-          <a:lnRef idx="1">
-            <a:schemeClr val="accent1"/>
-          </a:lnRef>
-          <a:fillRef idx="3">
-            <a:schemeClr val="accent1"/>
-          </a:fillRef>
-          <a:effectRef idx="2">
-            <a:schemeClr val="accent1"/>
-          </a:effectRef>
-          <a:fontRef idx="minor">
-            <a:schemeClr val="lt1"/>
-          </a:fontRef>
-        </p:style>
-        <p:txBody>
-          <a:bodyPr rtlCol="0" anchor="ctr"/>
-          <a:lstStyle/>
-          <a:p>
-            <a:pPr algn="ctr"/>
-          </a:p>
-        </p:txBody>
-      </p:sp>
-      <p:sp>
-        <p:nvSpPr>
-          <p:cNvPr id="13" name="TextBox 12"/>
-          <p:cNvSpPr txBox="1"/>
-          <p:nvPr/>
-        </p:nvSpPr>
-        <p:spPr>
-          <a:xfrm>
-            <a:off x="1000000" y="2483333"/>
-            <a:ext cx="10400000" cy="633333"/>
-          </a:xfrm>
-          <a:prstGeom prst="rect">
-            <a:avLst/>
-          </a:prstGeom>
-          <a:noFill/>
-        </p:spPr>
-        <p:txBody>
-          <a:bodyPr wrap="square" anchor="ctr">
-            <a:spAutoFit/>
-          </a:bodyPr>
-          <a:lstStyle/>
-          <a:p>
-            <a:pPr algn="l"/>
-            <a:r>
-              <a:rPr sz="1300" b="0">
-                <a:solidFill>
-                  <a:srgbClr val="333333"/>
-                </a:solidFill>
-                <a:latin typeface="Open Sans"/>
-                <a:ea typeface="Open Sans"/>
-                <a:cs typeface="Open Sans"/>
-              </a:rPr>
-              <a:t>Голову и шею удерживайте руками</a:t>
-            </a:r>
-          </a:p>
-        </p:txBody>
-      </p:sp>
-      <p:sp>
-        <p:nvSpPr>
-          <p:cNvPr id="14" name="Rectangle 13"/>
-          <p:cNvSpPr/>
-          <p:nvPr/>
-        </p:nvSpPr>
-        <p:spPr>
-          <a:xfrm>
-            <a:off x="700000" y="3316666"/>
-            <a:ext cx="11000000" cy="833333"/>
-          </a:xfrm>
-          <a:prstGeom prst="rect">
-            <a:avLst/>
-          </a:prstGeom>
-          <a:solidFill>
-            <a:srgbClr val="FFFFFF"/>
-          </a:solidFill>
-          <a:ln w="12700">
-            <a:solidFill>
-              <a:srgbClr val="999999"/>
-            </a:solidFill>
-          </a:ln>
-        </p:spPr>
-        <p:style>
-          <a:lnRef idx="1">
-            <a:schemeClr val="accent1"/>
-          </a:lnRef>
-          <a:fillRef idx="3">
-            <a:schemeClr val="accent1"/>
-          </a:fillRef>
-          <a:effectRef idx="2">
-            <a:schemeClr val="accent1"/>
-          </a:effectRef>
-          <a:fontRef idx="minor">
-            <a:schemeClr val="lt1"/>
-          </a:fontRef>
-        </p:style>
-        <p:txBody>
-          <a:bodyPr rtlCol="0" anchor="ctr"/>
-          <a:lstStyle/>
-          <a:p>
-            <a:pPr algn="ctr"/>
-          </a:p>
-        </p:txBody>
-      </p:sp>
-      <p:sp>
-        <p:nvSpPr>
-          <p:cNvPr id="15" name="Rectangle 14"/>
-          <p:cNvSpPr/>
-          <p:nvPr/>
-        </p:nvSpPr>
-        <p:spPr>
-          <a:xfrm>
-            <a:off x="700000" y="3316666"/>
-            <a:ext cx="90000" cy="833333"/>
-          </a:xfrm>
-          <a:prstGeom prst="rect">
-            <a:avLst/>
-          </a:prstGeom>
-          <a:solidFill>
-            <a:srgbClr val="CC0000"/>
-          </a:solidFill>
-          <a:ln>
-            <a:noFill/>
-          </a:ln>
-        </p:spPr>
-        <p:style>
-          <a:lnRef idx="1">
-            <a:schemeClr val="accent1"/>
-          </a:lnRef>
-          <a:fillRef idx="3">
-            <a:schemeClr val="accent1"/>
-          </a:fillRef>
-          <a:effectRef idx="2">
-            <a:schemeClr val="accent1"/>
-          </a:effectRef>
-          <a:fontRef idx="minor">
-            <a:schemeClr val="lt1"/>
-          </a:fontRef>
-        </p:style>
-        <p:txBody>
-          <a:bodyPr rtlCol="0" anchor="ctr"/>
-          <a:lstStyle/>
-          <a:p>
-            <a:pPr algn="ctr"/>
-          </a:p>
-        </p:txBody>
-      </p:sp>
-      <p:sp>
-        <p:nvSpPr>
-          <p:cNvPr id="16" name="TextBox 15"/>
-          <p:cNvSpPr txBox="1"/>
-          <p:nvPr/>
-        </p:nvSpPr>
-        <p:spPr>
-          <a:xfrm>
-            <a:off x="1000000" y="3416666"/>
-            <a:ext cx="10400000" cy="633333"/>
-          </a:xfrm>
-          <a:prstGeom prst="rect">
-            <a:avLst/>
-          </a:prstGeom>
-          <a:noFill/>
-        </p:spPr>
-        <p:txBody>
-          <a:bodyPr wrap="square" anchor="ctr">
-            <a:spAutoFit/>
-          </a:bodyPr>
-          <a:lstStyle/>
-          <a:p>
-            <a:pPr algn="l"/>
-            <a:r>
-              <a:rPr sz="1300" b="0">
-                <a:solidFill>
-                  <a:srgbClr val="333333"/>
-                </a:solidFill>
-                <a:latin typeface="Open Sans"/>
-                <a:ea typeface="Open Sans"/>
-                <a:cs typeface="Open Sans"/>
-              </a:rPr>
-              <a:t>Инородные тела не извлекайте</a:t>
-            </a:r>
-          </a:p>
-        </p:txBody>
-      </p:sp>
-      <p:sp>
-        <p:nvSpPr>
-          <p:cNvPr id="17" name="Rectangle 16"/>
-          <p:cNvSpPr/>
-          <p:nvPr/>
-        </p:nvSpPr>
-        <p:spPr>
-          <a:xfrm>
-            <a:off x="700000" y="4249999"/>
-            <a:ext cx="11000000" cy="833333"/>
-          </a:xfrm>
-          <a:prstGeom prst="rect">
-            <a:avLst/>
-          </a:prstGeom>
-          <a:solidFill>
-            <a:srgbClr val="FFFFFF"/>
-          </a:solidFill>
-          <a:ln w="12700">
-            <a:solidFill>
-              <a:srgbClr val="999999"/>
-            </a:solidFill>
-          </a:ln>
-        </p:spPr>
-        <p:style>
-          <a:lnRef idx="1">
-            <a:schemeClr val="accent1"/>
-          </a:lnRef>
-          <a:fillRef idx="3">
-            <a:schemeClr val="accent1"/>
-          </a:fillRef>
-          <a:effectRef idx="2">
-            <a:schemeClr val="accent1"/>
-          </a:effectRef>
-          <a:fontRef idx="minor">
-            <a:schemeClr val="lt1"/>
-          </a:fontRef>
-        </p:style>
-        <p:txBody>
-          <a:bodyPr rtlCol="0" anchor="ctr"/>
-          <a:lstStyle/>
-          <a:p>
-            <a:pPr algn="ctr"/>
-          </a:p>
-        </p:txBody>
-      </p:sp>
-      <p:sp>
-        <p:nvSpPr>
-          <p:cNvPr id="18" name="Rectangle 17"/>
-          <p:cNvSpPr/>
-          <p:nvPr/>
-        </p:nvSpPr>
-        <p:spPr>
-          <a:xfrm>
-            <a:off x="700000" y="4249999"/>
-            <a:ext cx="90000" cy="833333"/>
-          </a:xfrm>
-          <a:prstGeom prst="rect">
-            <a:avLst/>
-          </a:prstGeom>
-          <a:solidFill>
-            <a:srgbClr val="CC0000"/>
-          </a:solidFill>
-          <a:ln>
-            <a:noFill/>
-          </a:ln>
-        </p:spPr>
-        <p:style>
-          <a:lnRef idx="1">
-            <a:schemeClr val="accent1"/>
-          </a:lnRef>
-          <a:fillRef idx="3">
-            <a:schemeClr val="accent1"/>
-          </a:fillRef>
-          <a:effectRef idx="2">
-            <a:schemeClr val="accent1"/>
-          </a:effectRef>
-          <a:fontRef idx="minor">
-            <a:schemeClr val="lt1"/>
-          </a:fontRef>
-        </p:style>
-        <p:txBody>
-          <a:bodyPr rtlCol="0" anchor="ctr"/>
-          <a:lstStyle/>
-          <a:p>
-            <a:pPr algn="ctr"/>
-          </a:p>
-        </p:txBody>
-      </p:sp>
-      <p:sp>
-        <p:nvSpPr>
-          <p:cNvPr id="19" name="TextBox 18"/>
-          <p:cNvSpPr txBox="1"/>
-          <p:nvPr/>
-        </p:nvSpPr>
-        <p:spPr>
-          <a:xfrm>
-            <a:off x="1000000" y="4349999"/>
-            <a:ext cx="10400000" cy="633333"/>
-          </a:xfrm>
-          <a:prstGeom prst="rect">
-            <a:avLst/>
-          </a:prstGeom>
-          <a:noFill/>
-        </p:spPr>
-        <p:txBody>
-          <a:bodyPr wrap="square" anchor="ctr">
-            <a:spAutoFit/>
-          </a:bodyPr>
-          <a:lstStyle/>
-          <a:p>
-            <a:pPr algn="l"/>
-            <a:r>
-              <a:rPr sz="1300" b="0">
-                <a:solidFill>
-                  <a:srgbClr val="333333"/>
-                </a:solidFill>
-                <a:latin typeface="Open Sans"/>
-                <a:ea typeface="Open Sans"/>
-                <a:cs typeface="Open Sans"/>
-              </a:rPr>
-              <a:t>Выпавшие органы не вправляйте</a:t>
-            </a:r>
-          </a:p>
-        </p:txBody>
-      </p:sp>
-      <p:sp>
-        <p:nvSpPr>
-          <p:cNvPr id="20" name="Rectangle 19"/>
-          <p:cNvSpPr/>
-          <p:nvPr/>
-        </p:nvSpPr>
-        <p:spPr>
-          <a:xfrm>
-            <a:off x="700000" y="5183332"/>
-            <a:ext cx="11000000" cy="833333"/>
-          </a:xfrm>
-          <a:prstGeom prst="rect">
-            <a:avLst/>
-          </a:prstGeom>
-          <a:solidFill>
-            <a:srgbClr val="FFFFFF"/>
-          </a:solidFill>
-          <a:ln w="12700">
-            <a:solidFill>
-              <a:srgbClr val="999999"/>
-            </a:solidFill>
-          </a:ln>
-        </p:spPr>
-        <p:style>
-          <a:lnRef idx="1">
-            <a:schemeClr val="accent1"/>
-          </a:lnRef>
-          <a:fillRef idx="3">
-            <a:schemeClr val="accent1"/>
-          </a:fillRef>
-          <a:effectRef idx="2">
-            <a:schemeClr val="accent1"/>
-          </a:effectRef>
-          <a:fontRef idx="minor">
-            <a:schemeClr val="lt1"/>
-          </a:fontRef>
-        </p:style>
-        <p:txBody>
-          <a:bodyPr rtlCol="0" anchor="ctr"/>
-          <a:lstStyle/>
-          <a:p>
-            <a:pPr algn="ctr"/>
-          </a:p>
-        </p:txBody>
-      </p:sp>
-      <p:sp>
-        <p:nvSpPr>
-          <p:cNvPr id="21" name="Rectangle 20"/>
-          <p:cNvSpPr/>
-          <p:nvPr/>
-        </p:nvSpPr>
-        <p:spPr>
-          <a:xfrm>
-            <a:off x="700000" y="5183332"/>
-            <a:ext cx="90000" cy="833333"/>
-          </a:xfrm>
-          <a:prstGeom prst="rect">
-            <a:avLst/>
-          </a:prstGeom>
-          <a:solidFill>
-            <a:srgbClr val="CC0000"/>
-          </a:solidFill>
-          <a:ln>
-            <a:noFill/>
-          </a:ln>
-        </p:spPr>
-        <p:style>
-          <a:lnRef idx="1">
-            <a:schemeClr val="accent1"/>
-          </a:lnRef>
-          <a:fillRef idx="3">
-            <a:schemeClr val="accent1"/>
-          </a:fillRef>
-          <a:effectRef idx="2">
-            <a:schemeClr val="accent1"/>
-          </a:effectRef>
-          <a:fontRef idx="minor">
-            <a:schemeClr val="lt1"/>
-          </a:fontRef>
-        </p:style>
-        <p:txBody>
-          <a:bodyPr rtlCol="0" anchor="ctr"/>
-          <a:lstStyle/>
-          <a:p>
-            <a:pPr algn="ctr"/>
-          </a:p>
-        </p:txBody>
-      </p:sp>
-      <p:sp>
-        <p:nvSpPr>
-          <p:cNvPr id="22" name="TextBox 21"/>
-          <p:cNvSpPr txBox="1"/>
-          <p:nvPr/>
-        </p:nvSpPr>
-        <p:spPr>
-          <a:xfrm>
-            <a:off x="1000000" y="5283332"/>
-            <a:ext cx="10400000" cy="633333"/>
-          </a:xfrm>
-          <a:prstGeom prst="rect">
-            <a:avLst/>
-          </a:prstGeom>
-          <a:noFill/>
-        </p:spPr>
-        <p:txBody>
-          <a:bodyPr wrap="square" anchor="ctr">
-            <a:spAutoFit/>
-          </a:bodyPr>
-          <a:lstStyle/>
-          <a:p>
-            <a:pPr algn="l"/>
-            <a:r>
-              <a:rPr sz="1300" b="0">
-                <a:solidFill>
-                  <a:srgbClr val="333333"/>
-                </a:solidFill>
-                <a:latin typeface="Open Sans"/>
-                <a:ea typeface="Open Sans"/>
-                <a:cs typeface="Open Sans"/>
-              </a:rPr>
-              <a:t>Поврежденную часть обездвижьте</a:t>
-            </a:r>
-          </a:p>
-        </p:txBody>
-      </p:sp>
-      <p:sp>
-        <p:nvSpPr>
-          <p:cNvPr id="23" name="Rectangle 22"/>
-          <p:cNvSpPr/>
-          <p:nvPr/>
-        </p:nvSpPr>
-        <p:spPr>
-          <a:xfrm>
-            <a:off x="700000" y="6116665"/>
-            <a:ext cx="11000000" cy="833333"/>
-          </a:xfrm>
-          <a:prstGeom prst="rect">
-            <a:avLst/>
-          </a:prstGeom>
-          <a:solidFill>
-            <a:srgbClr val="FFFFFF"/>
-          </a:solidFill>
-          <a:ln w="12700">
-            <a:solidFill>
-              <a:srgbClr val="999999"/>
-            </a:solidFill>
-          </a:ln>
-        </p:spPr>
-        <p:style>
-          <a:lnRef idx="1">
-            <a:schemeClr val="accent1"/>
-          </a:lnRef>
-          <a:fillRef idx="3">
-            <a:schemeClr val="accent1"/>
-          </a:fillRef>
-          <a:effectRef idx="2">
-            <a:schemeClr val="accent1"/>
-          </a:effectRef>
-          <a:fontRef idx="minor">
-            <a:schemeClr val="lt1"/>
-          </a:fontRef>
-        </p:style>
-        <p:txBody>
-          <a:bodyPr rtlCol="0" anchor="ctr"/>
-          <a:lstStyle/>
-          <a:p>
-            <a:pPr algn="ctr"/>
-          </a:p>
-        </p:txBody>
-      </p:sp>
-      <p:sp>
-        <p:nvSpPr>
-          <p:cNvPr id="24" name="Rectangle 23"/>
-          <p:cNvSpPr/>
-          <p:nvPr/>
-        </p:nvSpPr>
-        <p:spPr>
-          <a:xfrm>
-            <a:off x="700000" y="6116665"/>
-            <a:ext cx="90000" cy="833333"/>
-          </a:xfrm>
-          <a:prstGeom prst="rect">
-            <a:avLst/>
-          </a:prstGeom>
-          <a:solidFill>
-            <a:srgbClr val="CC0000"/>
-          </a:solidFill>
-          <a:ln>
-            <a:noFill/>
-          </a:ln>
-        </p:spPr>
-        <p:style>
-          <a:lnRef idx="1">
-            <a:schemeClr val="accent1"/>
-          </a:lnRef>
-          <a:fillRef idx="3">
-            <a:schemeClr val="accent1"/>
-          </a:fillRef>
-          <a:effectRef idx="2">
-            <a:schemeClr val="accent1"/>
-          </a:effectRef>
-          <a:fontRef idx="minor">
-            <a:schemeClr val="lt1"/>
-          </a:fontRef>
-        </p:style>
-        <p:txBody>
-          <a:bodyPr rtlCol="0" anchor="ctr"/>
-          <a:lstStyle/>
-          <a:p>
-            <a:pPr algn="ctr"/>
-          </a:p>
-        </p:txBody>
-      </p:sp>
-      <p:sp>
-        <p:nvSpPr>
-          <p:cNvPr id="25" name="TextBox 24"/>
-          <p:cNvSpPr txBox="1"/>
-          <p:nvPr/>
-        </p:nvSpPr>
-        <p:spPr>
-          <a:xfrm>
-            <a:off x="1000000" y="6216665"/>
-            <a:ext cx="10400000" cy="633333"/>
-          </a:xfrm>
-          <a:prstGeom prst="rect">
-            <a:avLst/>
-          </a:prstGeom>
-          <a:noFill/>
-        </p:spPr>
-        <p:txBody>
-          <a:bodyPr wrap="square" anchor="ctr">
-            <a:spAutoFit/>
-          </a:bodyPr>
-          <a:lstStyle/>
-          <a:p>
-            <a:pPr algn="l"/>
-            <a:r>
-              <a:rPr sz="1300" b="0">
-                <a:solidFill>
-                  <a:srgbClr val="333333"/>
-                </a:solidFill>
-                <a:latin typeface="Open Sans"/>
-                <a:ea typeface="Open Sans"/>
-                <a:cs typeface="Open Sans"/>
-              </a:rPr>
-              <a:t>Позвоночник перемещают несколько человек</a:t>
+              <a:t>Положение выбирают с учетом сознания, дыхания и других травм; не заставляйте человека менять удобную позу без необходимости.</a:t>
             </a:r>
           </a:p>
         </p:txBody>
